--- a/deliverables/Menduner_企业导师交流.pptx
+++ b/deliverables/Menduner_企业导师交流.pptx
@@ -15,11 +15,6 @@
     <p:sldId id="263" r:id="rId14"/>
     <p:sldId id="264" r:id="rId15"/>
     <p:sldId id="265" r:id="rId16"/>
-    <p:sldId id="266" r:id="rId17"/>
-    <p:sldId id="267" r:id="rId18"/>
-    <p:sldId id="268" r:id="rId19"/>
-    <p:sldId id="269" r:id="rId20"/>
-    <p:sldId id="270" r:id="rId21"/>
   </p:sldIdLst>
   <p:sldSz cx="12191695" cy="6858000" type="screen4x3"/>
   <p:notesSz cx="6858000" cy="9144000"/>
@@ -3301,7 +3296,7 @@
         </p:nvSpPr>
         <p:spPr>
           <a:xfrm>
-            <a:off x="868680" y="5166360"/>
+            <a:off x="868680" y="4892040"/>
             <a:ext cx="10058400" cy="365760"/>
           </a:xfrm>
           <a:prstGeom prst="rect">
@@ -3328,6 +3323,45 @@
                 <a:latin typeface="微软雅黑"/>
               </a:rPr>
               <a:t>在线版本：entgroup14.com</a:t>
+            </a:r>
+          </a:p>
+        </p:txBody>
+      </p:sp>
+      <p:sp>
+        <p:nvSpPr>
+          <p:cNvPr id="8" name="TextBox 7"/>
+          <p:cNvSpPr txBox="1"/>
+          <p:nvPr/>
+        </p:nvSpPr>
+        <p:spPr>
+          <a:xfrm>
+            <a:off x="868680" y="5577840"/>
+            <a:ext cx="10332720" cy="411480"/>
+          </a:xfrm>
+          <a:prstGeom prst="rect">
+            <a:avLst/>
+          </a:prstGeom>
+          <a:noFill/>
+        </p:spPr>
+        <p:txBody>
+          <a:bodyPr wrap="square">
+            <a:spAutoFit/>
+          </a:bodyPr>
+          <a:lstStyle/>
+          <a:p>
+            <a:pPr algn="l">
+              <a:lnSpc>
+                <a:spcPct val="115000"/>
+              </a:lnSpc>
+            </a:pPr>
+            <a:r>
+              <a:rPr sz="1500" b="0">
+                <a:solidFill>
+                  <a:srgbClr val="6B7280"/>
+                </a:solidFill>
+                <a:latin typeface="微软雅黑"/>
+              </a:rPr>
+              <a:t>今天 30% 汇报、40% 听您讲、30% 争取一次小范围验证；我们不是来谈采购的。</a:t>
             </a:r>
           </a:p>
         </p:txBody>
@@ -3341,2704 +3375,6 @@
 </file>
 
 <file path=ppt/slides/slide10.xml><?xml version="1.0" encoding="utf-8"?>
-<p:sld xmlns:a="http://schemas.openxmlformats.org/drawingml/2006/main" xmlns:p="http://schemas.openxmlformats.org/presentationml/2006/main" xmlns:r="http://schemas.openxmlformats.org/officeDocument/2006/relationships">
-  <p:cSld>
-    <p:spTree>
-      <p:nvGrpSpPr>
-        <p:cNvPr id="1" name=""/>
-        <p:cNvGrpSpPr/>
-        <p:nvPr/>
-      </p:nvGrpSpPr>
-      <p:grpSpPr/>
-      <p:sp>
-        <p:nvSpPr>
-          <p:cNvPr id="2" name="TextBox 1"/>
-          <p:cNvSpPr txBox="1"/>
-          <p:nvPr/>
-        </p:nvSpPr>
-        <p:spPr>
-          <a:xfrm>
-            <a:off x="822960" y="475488"/>
-            <a:ext cx="10515600" cy="292608"/>
-          </a:xfrm>
-          <a:prstGeom prst="rect">
-            <a:avLst/>
-          </a:prstGeom>
-          <a:noFill/>
-        </p:spPr>
-        <p:txBody>
-          <a:bodyPr wrap="square">
-            <a:spAutoFit/>
-          </a:bodyPr>
-          <a:lstStyle/>
-          <a:p>
-            <a:pPr algn="l">
-              <a:lnSpc>
-                <a:spcPct val="115000"/>
-              </a:lnSpc>
-            </a:pPr>
-            <a:r>
-              <a:rPr sz="1200" b="0">
-                <a:solidFill>
-                  <a:srgbClr val="6B7280"/>
-                </a:solidFill>
-                <a:latin typeface="微软雅黑"/>
-              </a:rPr>
-              <a:t>边界</a:t>
-            </a:r>
-          </a:p>
-        </p:txBody>
-      </p:sp>
-      <p:sp>
-        <p:nvSpPr>
-          <p:cNvPr id="3" name="TextBox 2"/>
-          <p:cNvSpPr txBox="1"/>
-          <p:nvPr/>
-        </p:nvSpPr>
-        <p:spPr>
-          <a:xfrm>
-            <a:off x="822960" y="749808"/>
-            <a:ext cx="10607040" cy="640080"/>
-          </a:xfrm>
-          <a:prstGeom prst="rect">
-            <a:avLst/>
-          </a:prstGeom>
-          <a:noFill/>
-        </p:spPr>
-        <p:txBody>
-          <a:bodyPr wrap="square">
-            <a:spAutoFit/>
-          </a:bodyPr>
-          <a:lstStyle/>
-          <a:p>
-            <a:pPr algn="l">
-              <a:lnSpc>
-                <a:spcPct val="115000"/>
-              </a:lnSpc>
-            </a:pPr>
-            <a:r>
-              <a:rPr sz="3000" b="1">
-                <a:solidFill>
-                  <a:srgbClr val="1F2937"/>
-                </a:solidFill>
-                <a:latin typeface="微软雅黑"/>
-              </a:rPr>
-              <a:t>我们明确不做的事</a:t>
-            </a:r>
-          </a:p>
-        </p:txBody>
-      </p:sp>
-      <p:cxnSp>
-        <p:nvCxnSpPr>
-          <p:cNvPr id="4" name="Connector 3"/>
-          <p:cNvCxnSpPr/>
-          <p:nvPr/>
-        </p:nvCxnSpPr>
-        <p:spPr>
-          <a:xfrm>
-            <a:off x="822960" y="1481328"/>
-            <a:ext cx="10543032" cy="0"/>
-          </a:xfrm>
-          <a:prstGeom prst="line">
-            <a:avLst/>
-          </a:prstGeom>
-          <a:ln w="11430">
-            <a:solidFill>
-              <a:srgbClr val="D8DEE6"/>
-            </a:solidFill>
-          </a:ln>
-        </p:spPr>
-        <p:style>
-          <a:lnRef idx="2">
-            <a:schemeClr val="accent1"/>
-          </a:lnRef>
-          <a:fillRef idx="0">
-            <a:schemeClr val="accent1"/>
-          </a:fillRef>
-          <a:effectRef idx="1">
-            <a:schemeClr val="accent1"/>
-          </a:effectRef>
-          <a:fontRef idx="minor">
-            <a:schemeClr val="tx1"/>
-          </a:fontRef>
-        </p:style>
-      </p:cxnSp>
-      <p:sp>
-        <p:nvSpPr>
-          <p:cNvPr id="5" name="TextBox 4"/>
-          <p:cNvSpPr txBox="1"/>
-          <p:nvPr/>
-        </p:nvSpPr>
-        <p:spPr>
-          <a:xfrm>
-            <a:off x="11292840" y="6355080"/>
-            <a:ext cx="548640" cy="274320"/>
-          </a:xfrm>
-          <a:prstGeom prst="rect">
-            <a:avLst/>
-          </a:prstGeom>
-          <a:noFill/>
-        </p:spPr>
-        <p:txBody>
-          <a:bodyPr wrap="square">
-            <a:spAutoFit/>
-          </a:bodyPr>
-          <a:lstStyle/>
-          <a:p>
-            <a:pPr algn="r">
-              <a:lnSpc>
-                <a:spcPct val="115000"/>
-              </a:lnSpc>
-            </a:pPr>
-            <a:r>
-              <a:rPr sz="1000" b="0">
-                <a:solidFill>
-                  <a:srgbClr val="6B7280"/>
-                </a:solidFill>
-                <a:latin typeface="微软雅黑"/>
-              </a:rPr>
-              <a:t>10</a:t>
-            </a:r>
-          </a:p>
-        </p:txBody>
-      </p:sp>
-      <p:sp>
-        <p:nvSpPr>
-          <p:cNvPr id="6" name="TextBox 5"/>
-          <p:cNvSpPr txBox="1"/>
-          <p:nvPr/>
-        </p:nvSpPr>
-        <p:spPr>
-          <a:xfrm>
-            <a:off x="822960" y="6355080"/>
-            <a:ext cx="5486400" cy="274320"/>
-          </a:xfrm>
-          <a:prstGeom prst="rect">
-            <a:avLst/>
-          </a:prstGeom>
-          <a:noFill/>
-        </p:spPr>
-        <p:txBody>
-          <a:bodyPr wrap="square">
-            <a:spAutoFit/>
-          </a:bodyPr>
-          <a:lstStyle/>
-          <a:p>
-            <a:pPr algn="l">
-              <a:lnSpc>
-                <a:spcPct val="115000"/>
-              </a:lnSpc>
-            </a:pPr>
-            <a:r>
-              <a:rPr sz="1000" b="0">
-                <a:solidFill>
-                  <a:srgbClr val="6B7280"/>
-                </a:solidFill>
-                <a:latin typeface="微软雅黑"/>
-              </a:rPr>
-              <a:t>Menduner · ENT303TC 第 14 组</a:t>
-            </a:r>
-          </a:p>
-        </p:txBody>
-      </p:sp>
-      <p:graphicFrame>
-        <p:nvGraphicFramePr>
-          <p:cNvPr id="7" name="Table 6"/>
-          <p:cNvGraphicFramePr>
-            <a:graphicFrameLocks noGrp="1"/>
-          </p:cNvGraphicFramePr>
-          <p:nvPr/>
-        </p:nvGraphicFramePr>
-        <p:xfrm>
-          <a:off x="868680" y="1828800"/>
-          <a:ext cx="10332720" cy="3017520"/>
-        </p:xfrm>
-        <a:graphic>
-          <a:graphicData uri="http://schemas.openxmlformats.org/drawingml/2006/table">
-            <a:tbl>
-              <a:tblPr firstRow="0" bandRow="0">
-                <a:tableStyleId>{2D5ABB26-0587-4C30-8999-92F81FD0307C}</a:tableStyleId>
-              </a:tblPr>
-              <a:tblGrid>
-                <a:gridCol w="4206240"/>
-                <a:gridCol w="6126480"/>
-              </a:tblGrid>
-              <a:tr h="603504">
-                <a:tc>
-                  <a:txBody>
-                    <a:bodyPr/>
-                    <a:lstStyle/>
-                    <a:p>
-                      <a:pPr>
-                        <a:lnSpc>
-                          <a:spcPct val="105000"/>
-                        </a:lnSpc>
-                      </a:pPr>
-                      <a:r>
-                        <a:rPr sz="950" b="1">
-                          <a:solidFill>
-                            <a:srgbClr val="6B7280"/>
-                          </a:solidFill>
-                          <a:latin typeface="微软雅黑"/>
-                        </a:rPr>
-                        <a:t>不做</a:t>
-                      </a:r>
-                    </a:p>
-                  </a:txBody>
-                  <a:tcPr marL="73152" marR="73152" marT="27432" marB="27432" anchor="ctr"/>
-                </a:tc>
-                <a:tc>
-                  <a:txBody>
-                    <a:bodyPr/>
-                    <a:lstStyle/>
-                    <a:p>
-                      <a:pPr>
-                        <a:lnSpc>
-                          <a:spcPct val="105000"/>
-                        </a:lnSpc>
-                      </a:pPr>
-                      <a:r>
-                        <a:rPr sz="950" b="1">
-                          <a:solidFill>
-                            <a:srgbClr val="6B7280"/>
-                          </a:solidFill>
-                          <a:latin typeface="微软雅黑"/>
-                        </a:rPr>
-                        <a:t>原因</a:t>
-                      </a:r>
-                    </a:p>
-                  </a:txBody>
-                  <a:tcPr marL="73152" marR="73152" marT="27432" marB="27432" anchor="ctr"/>
-                </a:tc>
-              </a:tr>
-              <a:tr h="603504">
-                <a:tc>
-                  <a:txBody>
-                    <a:bodyPr/>
-                    <a:lstStyle/>
-                    <a:p>
-                      <a:pPr>
-                        <a:lnSpc>
-                          <a:spcPct val="105000"/>
-                        </a:lnSpc>
-                      </a:pPr>
-                      <a:r>
-                        <a:rPr sz="1100" b="0">
-                          <a:solidFill>
-                            <a:srgbClr val="1F2937"/>
-                          </a:solidFill>
-                          <a:latin typeface="微软雅黑"/>
-                        </a:rPr>
-                        <a:t>需求预测、房价建议</a:t>
-                      </a:r>
-                    </a:p>
-                  </a:txBody>
-                  <a:tcPr marL="73152" marR="73152" marT="27432" marB="27432" anchor="ctr"/>
-                </a:tc>
-                <a:tc>
-                  <a:txBody>
-                    <a:bodyPr/>
-                    <a:lstStyle/>
-                    <a:p>
-                      <a:pPr>
-                        <a:lnSpc>
-                          <a:spcPct val="105000"/>
-                        </a:lnSpc>
-                      </a:pPr>
-                      <a:r>
-                        <a:rPr sz="1100" b="0">
-                          <a:solidFill>
-                            <a:srgbClr val="1F2937"/>
-                          </a:solidFill>
-                          <a:latin typeface="微软雅黑"/>
-                        </a:rPr>
-                        <a:t>没有足够的酒店侧数据，做了也不可信</a:t>
-                      </a:r>
-                    </a:p>
-                  </a:txBody>
-                  <a:tcPr marL="73152" marR="73152" marT="27432" marB="27432" anchor="ctr"/>
-                </a:tc>
-              </a:tr>
-              <a:tr h="603504">
-                <a:tc>
-                  <a:txBody>
-                    <a:bodyPr/>
-                    <a:lstStyle/>
-                    <a:p>
-                      <a:pPr>
-                        <a:lnSpc>
-                          <a:spcPct val="105000"/>
-                        </a:lnSpc>
-                      </a:pPr>
-                      <a:r>
-                        <a:rPr sz="1100" b="0">
-                          <a:solidFill>
-                            <a:srgbClr val="1F2937"/>
-                          </a:solidFill>
-                          <a:latin typeface="微软雅黑"/>
-                        </a:rPr>
-                        <a:t>替代酒店收益管理系统（RMS）</a:t>
-                      </a:r>
-                    </a:p>
-                  </a:txBody>
-                  <a:tcPr marL="73152" marR="73152" marT="27432" marB="27432" anchor="ctr"/>
-                </a:tc>
-                <a:tc>
-                  <a:txBody>
-                    <a:bodyPr/>
-                    <a:lstStyle/>
-                    <a:p>
-                      <a:pPr>
-                        <a:lnSpc>
-                          <a:spcPct val="105000"/>
-                        </a:lnSpc>
-                      </a:pPr>
-                      <a:r>
-                        <a:rPr sz="1100" b="0">
-                          <a:solidFill>
-                            <a:srgbClr val="1F2937"/>
-                          </a:solidFill>
-                          <a:latin typeface="微软雅黑"/>
-                        </a:rPr>
-                        <a:t>我们做的是它的输入侧，不是竞品</a:t>
-                      </a:r>
-                    </a:p>
-                  </a:txBody>
-                  <a:tcPr marL="73152" marR="73152" marT="27432" marB="27432" anchor="ctr"/>
-                </a:tc>
-              </a:tr>
-              <a:tr h="603504">
-                <a:tc>
-                  <a:txBody>
-                    <a:bodyPr/>
-                    <a:lstStyle/>
-                    <a:p>
-                      <a:pPr>
-                        <a:lnSpc>
-                          <a:spcPct val="105000"/>
-                        </a:lnSpc>
-                      </a:pPr>
-                      <a:r>
-                        <a:rPr sz="1100" b="0">
-                          <a:solidFill>
-                            <a:srgbClr val="1F2937"/>
-                          </a:solidFill>
-                          <a:latin typeface="微软雅黑"/>
-                        </a:rPr>
-                        <a:t>承诺提升 RevPAR / ADR</a:t>
-                      </a:r>
-                    </a:p>
-                  </a:txBody>
-                  <a:tcPr marL="73152" marR="73152" marT="27432" marB="27432" anchor="ctr"/>
-                </a:tc>
-                <a:tc>
-                  <a:txBody>
-                    <a:bodyPr/>
-                    <a:lstStyle/>
-                    <a:p>
-                      <a:pPr>
-                        <a:lnSpc>
-                          <a:spcPct val="105000"/>
-                        </a:lnSpc>
-                      </a:pPr>
-                      <a:r>
-                        <a:rPr sz="1100" b="0">
-                          <a:solidFill>
-                            <a:srgbClr val="1F2937"/>
-                          </a:solidFill>
-                          <a:latin typeface="微软雅黑"/>
-                        </a:rPr>
-                        <a:t>现在没有证据，承诺就是不专业</a:t>
-                      </a:r>
-                    </a:p>
-                  </a:txBody>
-                  <a:tcPr marL="73152" marR="73152" marT="27432" marB="27432" anchor="ctr"/>
-                </a:tc>
-              </a:tr>
-              <a:tr h="603504">
-                <a:tc>
-                  <a:txBody>
-                    <a:bodyPr/>
-                    <a:lstStyle/>
-                    <a:p>
-                      <a:pPr>
-                        <a:lnSpc>
-                          <a:spcPct val="105000"/>
-                        </a:lnSpc>
-                      </a:pPr>
-                      <a:r>
-                        <a:rPr sz="1100" b="0">
-                          <a:solidFill>
-                            <a:srgbClr val="1F2937"/>
-                          </a:solidFill>
-                          <a:latin typeface="微软雅黑"/>
-                        </a:rPr>
-                        <a:t>把参数情景说成真实收入</a:t>
-                      </a:r>
-                    </a:p>
-                  </a:txBody>
-                  <a:tcPr marL="73152" marR="73152" marT="27432" marB="27432" anchor="ctr"/>
-                </a:tc>
-                <a:tc>
-                  <a:txBody>
-                    <a:bodyPr/>
-                    <a:lstStyle/>
-                    <a:p>
-                      <a:pPr>
-                        <a:lnSpc>
-                          <a:spcPct val="105000"/>
-                        </a:lnSpc>
-                      </a:pPr>
-                      <a:r>
-                        <a:rPr sz="1100" b="0">
-                          <a:solidFill>
-                            <a:srgbClr val="1F2937"/>
-                          </a:solidFill>
-                          <a:latin typeface="微软雅黑"/>
-                        </a:rPr>
-                        <a:t>假设和观测必须分开说</a:t>
-                      </a:r>
-                    </a:p>
-                  </a:txBody>
-                  <a:tcPr marL="73152" marR="73152" marT="27432" marB="27432" anchor="ctr"/>
-                </a:tc>
-              </a:tr>
-            </a:tbl>
-          </a:graphicData>
-        </a:graphic>
-      </p:graphicFrame>
-      <p:cxnSp>
-        <p:nvCxnSpPr>
-          <p:cNvPr id="8" name="Connector 7"/>
-          <p:cNvCxnSpPr/>
-          <p:nvPr/>
-        </p:nvCxnSpPr>
-        <p:spPr>
-          <a:xfrm>
-            <a:off x="868680" y="2432304"/>
-            <a:ext cx="10332720" cy="0"/>
-          </a:xfrm>
-          <a:prstGeom prst="line">
-            <a:avLst/>
-          </a:prstGeom>
-          <a:ln w="11430">
-            <a:solidFill>
-              <a:srgbClr val="D8DEE6"/>
-            </a:solidFill>
-          </a:ln>
-        </p:spPr>
-        <p:style>
-          <a:lnRef idx="2">
-            <a:schemeClr val="accent1"/>
-          </a:lnRef>
-          <a:fillRef idx="0">
-            <a:schemeClr val="accent1"/>
-          </a:fillRef>
-          <a:effectRef idx="1">
-            <a:schemeClr val="accent1"/>
-          </a:effectRef>
-          <a:fontRef idx="minor">
-            <a:schemeClr val="tx1"/>
-          </a:fontRef>
-        </p:style>
-      </p:cxnSp>
-      <p:sp>
-        <p:nvSpPr>
-          <p:cNvPr id="9" name="TextBox 8"/>
-          <p:cNvSpPr txBox="1"/>
-          <p:nvPr/>
-        </p:nvSpPr>
-        <p:spPr>
-          <a:xfrm>
-            <a:off x="868680" y="5120640"/>
-            <a:ext cx="10332720" cy="457200"/>
-          </a:xfrm>
-          <a:prstGeom prst="rect">
-            <a:avLst/>
-          </a:prstGeom>
-          <a:noFill/>
-        </p:spPr>
-        <p:txBody>
-          <a:bodyPr wrap="square">
-            <a:spAutoFit/>
-          </a:bodyPr>
-          <a:lstStyle/>
-          <a:p>
-            <a:pPr algn="l">
-              <a:lnSpc>
-                <a:spcPct val="115000"/>
-              </a:lnSpc>
-            </a:pPr>
-            <a:r>
-              <a:rPr sz="1600" b="0">
-                <a:solidFill>
-                  <a:srgbClr val="6B7280"/>
-                </a:solidFill>
-                <a:latin typeface="微软雅黑"/>
-              </a:rPr>
-              <a:t>能把「不做什么」说清楚，比多讲十个功能更可信。</a:t>
-            </a:r>
-          </a:p>
-        </p:txBody>
-      </p:sp>
-    </p:spTree>
-  </p:cSld>
-  <p:clrMapOvr>
-    <a:masterClrMapping/>
-  </p:clrMapOvr>
-</p:sld>
-</file>
-
-<file path=ppt/slides/slide11.xml><?xml version="1.0" encoding="utf-8"?>
-<p:sld xmlns:a="http://schemas.openxmlformats.org/drawingml/2006/main" xmlns:p="http://schemas.openxmlformats.org/presentationml/2006/main" xmlns:r="http://schemas.openxmlformats.org/officeDocument/2006/relationships">
-  <p:cSld>
-    <p:spTree>
-      <p:nvGrpSpPr>
-        <p:cNvPr id="1" name=""/>
-        <p:cNvGrpSpPr/>
-        <p:nvPr/>
-      </p:nvGrpSpPr>
-      <p:grpSpPr/>
-      <p:sp>
-        <p:nvSpPr>
-          <p:cNvPr id="2" name="TextBox 1"/>
-          <p:cNvSpPr txBox="1"/>
-          <p:nvPr/>
-        </p:nvSpPr>
-        <p:spPr>
-          <a:xfrm>
-            <a:off x="822960" y="475488"/>
-            <a:ext cx="10515600" cy="292608"/>
-          </a:xfrm>
-          <a:prstGeom prst="rect">
-            <a:avLst/>
-          </a:prstGeom>
-          <a:noFill/>
-        </p:spPr>
-        <p:txBody>
-          <a:bodyPr wrap="square">
-            <a:spAutoFit/>
-          </a:bodyPr>
-          <a:lstStyle/>
-          <a:p>
-            <a:pPr algn="l">
-              <a:lnSpc>
-                <a:spcPct val="115000"/>
-              </a:lnSpc>
-            </a:pPr>
-            <a:r>
-              <a:rPr sz="1200" b="0">
-                <a:solidFill>
-                  <a:srgbClr val="6B7280"/>
-                </a:solidFill>
-                <a:latin typeface="微软雅黑"/>
-              </a:rPr>
-              <a:t>合作请求</a:t>
-            </a:r>
-          </a:p>
-        </p:txBody>
-      </p:sp>
-      <p:sp>
-        <p:nvSpPr>
-          <p:cNvPr id="3" name="TextBox 2"/>
-          <p:cNvSpPr txBox="1"/>
-          <p:nvPr/>
-        </p:nvSpPr>
-        <p:spPr>
-          <a:xfrm>
-            <a:off x="822960" y="749808"/>
-            <a:ext cx="10607040" cy="640080"/>
-          </a:xfrm>
-          <a:prstGeom prst="rect">
-            <a:avLst/>
-          </a:prstGeom>
-          <a:noFill/>
-        </p:spPr>
-        <p:txBody>
-          <a:bodyPr wrap="square">
-            <a:spAutoFit/>
-          </a:bodyPr>
-          <a:lstStyle/>
-          <a:p>
-            <a:pPr algn="l">
-              <a:lnSpc>
-                <a:spcPct val="115000"/>
-              </a:lnSpc>
-            </a:pPr>
-            <a:r>
-              <a:rPr sz="3000" b="1">
-                <a:solidFill>
-                  <a:srgbClr val="1F2937"/>
-                </a:solidFill>
-                <a:latin typeface="微软雅黑"/>
-              </a:rPr>
-              <a:t>想请老师帮的三件事</a:t>
-            </a:r>
-          </a:p>
-        </p:txBody>
-      </p:sp>
-      <p:cxnSp>
-        <p:nvCxnSpPr>
-          <p:cNvPr id="4" name="Connector 3"/>
-          <p:cNvCxnSpPr/>
-          <p:nvPr/>
-        </p:nvCxnSpPr>
-        <p:spPr>
-          <a:xfrm>
-            <a:off x="822960" y="1481328"/>
-            <a:ext cx="10543032" cy="0"/>
-          </a:xfrm>
-          <a:prstGeom prst="line">
-            <a:avLst/>
-          </a:prstGeom>
-          <a:ln w="11430">
-            <a:solidFill>
-              <a:srgbClr val="D8DEE6"/>
-            </a:solidFill>
-          </a:ln>
-        </p:spPr>
-        <p:style>
-          <a:lnRef idx="2">
-            <a:schemeClr val="accent1"/>
-          </a:lnRef>
-          <a:fillRef idx="0">
-            <a:schemeClr val="accent1"/>
-          </a:fillRef>
-          <a:effectRef idx="1">
-            <a:schemeClr val="accent1"/>
-          </a:effectRef>
-          <a:fontRef idx="minor">
-            <a:schemeClr val="tx1"/>
-          </a:fontRef>
-        </p:style>
-      </p:cxnSp>
-      <p:sp>
-        <p:nvSpPr>
-          <p:cNvPr id="5" name="TextBox 4"/>
-          <p:cNvSpPr txBox="1"/>
-          <p:nvPr/>
-        </p:nvSpPr>
-        <p:spPr>
-          <a:xfrm>
-            <a:off x="11292840" y="6355080"/>
-            <a:ext cx="548640" cy="274320"/>
-          </a:xfrm>
-          <a:prstGeom prst="rect">
-            <a:avLst/>
-          </a:prstGeom>
-          <a:noFill/>
-        </p:spPr>
-        <p:txBody>
-          <a:bodyPr wrap="square">
-            <a:spAutoFit/>
-          </a:bodyPr>
-          <a:lstStyle/>
-          <a:p>
-            <a:pPr algn="r">
-              <a:lnSpc>
-                <a:spcPct val="115000"/>
-              </a:lnSpc>
-            </a:pPr>
-            <a:r>
-              <a:rPr sz="1000" b="0">
-                <a:solidFill>
-                  <a:srgbClr val="6B7280"/>
-                </a:solidFill>
-                <a:latin typeface="微软雅黑"/>
-              </a:rPr>
-              <a:t>11</a:t>
-            </a:r>
-          </a:p>
-        </p:txBody>
-      </p:sp>
-      <p:sp>
-        <p:nvSpPr>
-          <p:cNvPr id="6" name="TextBox 5"/>
-          <p:cNvSpPr txBox="1"/>
-          <p:nvPr/>
-        </p:nvSpPr>
-        <p:spPr>
-          <a:xfrm>
-            <a:off x="822960" y="6355080"/>
-            <a:ext cx="5486400" cy="274320"/>
-          </a:xfrm>
-          <a:prstGeom prst="rect">
-            <a:avLst/>
-          </a:prstGeom>
-          <a:noFill/>
-        </p:spPr>
-        <p:txBody>
-          <a:bodyPr wrap="square">
-            <a:spAutoFit/>
-          </a:bodyPr>
-          <a:lstStyle/>
-          <a:p>
-            <a:pPr algn="l">
-              <a:lnSpc>
-                <a:spcPct val="115000"/>
-              </a:lnSpc>
-            </a:pPr>
-            <a:r>
-              <a:rPr sz="1000" b="0">
-                <a:solidFill>
-                  <a:srgbClr val="6B7280"/>
-                </a:solidFill>
-                <a:latin typeface="微软雅黑"/>
-              </a:rPr>
-              <a:t>Menduner · ENT303TC 第 14 组</a:t>
-            </a:r>
-          </a:p>
-        </p:txBody>
-      </p:sp>
-      <p:graphicFrame>
-        <p:nvGraphicFramePr>
-          <p:cNvPr id="7" name="Table 6"/>
-          <p:cNvGraphicFramePr>
-            <a:graphicFrameLocks noGrp="1"/>
-          </p:cNvGraphicFramePr>
-          <p:nvPr/>
-        </p:nvGraphicFramePr>
-        <p:xfrm>
-          <a:off x="868680" y="1783080"/>
-          <a:ext cx="10332720" cy="2852928"/>
-        </p:xfrm>
-        <a:graphic>
-          <a:graphicData uri="http://schemas.openxmlformats.org/drawingml/2006/table">
-            <a:tbl>
-              <a:tblPr firstRow="0" bandRow="0">
-                <a:tableStyleId>{2D5ABB26-0587-4C30-8999-92F81FD0307C}</a:tableStyleId>
-              </a:tblPr>
-              <a:tblGrid>
-                <a:gridCol w="6035040"/>
-                <a:gridCol w="4297680"/>
-              </a:tblGrid>
-              <a:tr h="713232">
-                <a:tc>
-                  <a:txBody>
-                    <a:bodyPr/>
-                    <a:lstStyle/>
-                    <a:p>
-                      <a:pPr>
-                        <a:lnSpc>
-                          <a:spcPct val="105000"/>
-                        </a:lnSpc>
-                      </a:pPr>
-                      <a:r>
-                        <a:rPr sz="1000" b="1">
-                          <a:solidFill>
-                            <a:srgbClr val="6B7280"/>
-                          </a:solidFill>
-                          <a:latin typeface="微软雅黑"/>
-                        </a:rPr>
-                        <a:t>层级 · 请求</a:t>
-                      </a:r>
-                    </a:p>
-                  </a:txBody>
-                  <a:tcPr marL="73152" marR="73152" marT="27432" marB="27432" anchor="ctr"/>
-                </a:tc>
-                <a:tc>
-                  <a:txBody>
-                    <a:bodyPr/>
-                    <a:lstStyle/>
-                    <a:p>
-                      <a:pPr>
-                        <a:lnSpc>
-                          <a:spcPct val="105000"/>
-                        </a:lnSpc>
-                      </a:pPr>
-                      <a:r>
-                        <a:rPr sz="1000" b="1">
-                          <a:solidFill>
-                            <a:srgbClr val="6B7280"/>
-                          </a:solidFill>
-                          <a:latin typeface="微软雅黑"/>
-                        </a:rPr>
-                        <a:t>我们的承诺</a:t>
-                      </a:r>
-                    </a:p>
-                  </a:txBody>
-                  <a:tcPr marL="73152" marR="73152" marT="27432" marB="27432" anchor="ctr"/>
-                </a:tc>
-              </a:tr>
-              <a:tr h="713232">
-                <a:tc>
-                  <a:txBody>
-                    <a:bodyPr/>
-                    <a:lstStyle/>
-                    <a:p>
-                      <a:pPr>
-                        <a:lnSpc>
-                          <a:spcPct val="105000"/>
-                        </a:lnSpc>
-                      </a:pPr>
-                      <a:r>
-                        <a:rPr sz="1150" b="0">
-                          <a:solidFill>
-                            <a:srgbClr val="1F2937"/>
-                          </a:solidFill>
-                          <a:latin typeface="微软雅黑"/>
-                        </a:rPr>
-                        <a:t>第一层：帮我们评审一份真实城市简报，指出无效字段与缺失信息</a:t>
-                      </a:r>
-                    </a:p>
-                  </a:txBody>
-                  <a:tcPr marL="73152" marR="73152" marT="27432" marB="27432" anchor="ctr"/>
-                </a:tc>
-                <a:tc>
-                  <a:txBody>
-                    <a:bodyPr/>
-                    <a:lstStyle/>
-                    <a:p>
-                      <a:pPr>
-                        <a:lnSpc>
-                          <a:spcPct val="105000"/>
-                        </a:lnSpc>
-                      </a:pPr>
-                      <a:r>
-                        <a:rPr sz="1150" b="0">
-                          <a:solidFill>
-                            <a:srgbClr val="1F2937"/>
-                          </a:solidFill>
-                          <a:latin typeface="微软雅黑"/>
-                        </a:rPr>
-                        <a:t>不增加企业同事工作量</a:t>
-                      </a:r>
-                    </a:p>
-                  </a:txBody>
-                  <a:tcPr marL="73152" marR="73152" marT="27432" marB="27432" anchor="ctr"/>
-                </a:tc>
-              </a:tr>
-              <a:tr h="713232">
-                <a:tc>
-                  <a:txBody>
-                    <a:bodyPr/>
-                    <a:lstStyle/>
-                    <a:p>
-                      <a:pPr>
-                        <a:lnSpc>
-                          <a:spcPct val="105000"/>
-                        </a:lnSpc>
-                      </a:pPr>
-                      <a:r>
-                        <a:rPr sz="1150" b="0">
-                          <a:solidFill>
-                            <a:srgbClr val="1F2937"/>
-                          </a:solidFill>
-                          <a:latin typeface="微软雅黑"/>
-                        </a:rPr>
-                        <a:t>第二层：20–30 分钟，与市场/销售/收益岗位交流业务流程</a:t>
-                      </a:r>
-                    </a:p>
-                  </a:txBody>
-                  <a:tcPr marL="73152" marR="73152" marT="27432" marB="27432" anchor="ctr"/>
-                </a:tc>
-                <a:tc>
-                  <a:txBody>
-                    <a:bodyPr/>
-                    <a:lstStyle/>
-                    <a:p>
-                      <a:pPr>
-                        <a:lnSpc>
-                          <a:spcPct val="105000"/>
-                        </a:lnSpc>
-                      </a:pPr>
-                      <a:r>
-                        <a:rPr sz="1150" b="0">
-                          <a:solidFill>
-                            <a:srgbClr val="1F2937"/>
-                          </a:solidFill>
-                          <a:latin typeface="微软雅黑"/>
-                        </a:rPr>
-                        <a:t>提前给议题，不超时</a:t>
-                      </a:r>
-                    </a:p>
-                  </a:txBody>
-                  <a:tcPr marL="73152" marR="73152" marT="27432" marB="27432" anchor="ctr"/>
-                </a:tc>
-              </a:tr>
-              <a:tr h="713232">
-                <a:tc>
-                  <a:txBody>
-                    <a:bodyPr/>
-                    <a:lstStyle/>
-                    <a:p>
-                      <a:pPr>
-                        <a:lnSpc>
-                          <a:spcPct val="105000"/>
-                        </a:lnSpc>
-                      </a:pPr>
-                      <a:r>
-                        <a:rPr sz="1150" b="0">
-                          <a:solidFill>
-                            <a:srgbClr val="1F2937"/>
-                          </a:solidFill>
-                          <a:latin typeface="微软雅黑"/>
-                        </a:rPr>
-                        <a:t>第三层：推荐一家合适酒店，做单城市小范围验证</a:t>
-                      </a:r>
-                    </a:p>
-                  </a:txBody>
-                  <a:tcPr marL="73152" marR="73152" marT="27432" marB="27432" anchor="ctr"/>
-                </a:tc>
-                <a:tc>
-                  <a:txBody>
-                    <a:bodyPr/>
-                    <a:lstStyle/>
-                    <a:p>
-                      <a:pPr>
-                        <a:lnSpc>
-                          <a:spcPct val="105000"/>
-                        </a:lnSpc>
-                      </a:pPr>
-                      <a:r>
-                        <a:rPr sz="1150" b="0">
-                          <a:solidFill>
-                            <a:srgbClr val="1F2937"/>
-                          </a:solidFill>
-                          <a:latin typeface="微软雅黑"/>
-                        </a:rPr>
-                        <a:t>系统运行、简报整理、问题修正由我们负责</a:t>
-                      </a:r>
-                    </a:p>
-                  </a:txBody>
-                  <a:tcPr marL="73152" marR="73152" marT="27432" marB="27432" anchor="ctr"/>
-                </a:tc>
-              </a:tr>
-            </a:tbl>
-          </a:graphicData>
-        </a:graphic>
-      </p:graphicFrame>
-      <p:cxnSp>
-        <p:nvCxnSpPr>
-          <p:cNvPr id="8" name="Connector 7"/>
-          <p:cNvCxnSpPr/>
-          <p:nvPr/>
-        </p:nvCxnSpPr>
-        <p:spPr>
-          <a:xfrm>
-            <a:off x="868680" y="2496312"/>
-            <a:ext cx="10332720" cy="0"/>
-          </a:xfrm>
-          <a:prstGeom prst="line">
-            <a:avLst/>
-          </a:prstGeom>
-          <a:ln w="11430">
-            <a:solidFill>
-              <a:srgbClr val="D8DEE6"/>
-            </a:solidFill>
-          </a:ln>
-        </p:spPr>
-        <p:style>
-          <a:lnRef idx="2">
-            <a:schemeClr val="accent1"/>
-          </a:lnRef>
-          <a:fillRef idx="0">
-            <a:schemeClr val="accent1"/>
-          </a:fillRef>
-          <a:effectRef idx="1">
-            <a:schemeClr val="accent1"/>
-          </a:effectRef>
-          <a:fontRef idx="minor">
-            <a:schemeClr val="tx1"/>
-          </a:fontRef>
-        </p:style>
-      </p:cxnSp>
-      <p:sp>
-        <p:nvSpPr>
-          <p:cNvPr id="9" name="TextBox 8"/>
-          <p:cNvSpPr txBox="1"/>
-          <p:nvPr/>
-        </p:nvSpPr>
-        <p:spPr>
-          <a:xfrm>
-            <a:off x="868680" y="4892040"/>
-            <a:ext cx="10332720" cy="411480"/>
-          </a:xfrm>
-          <a:prstGeom prst="rect">
-            <a:avLst/>
-          </a:prstGeom>
-          <a:noFill/>
-        </p:spPr>
-        <p:txBody>
-          <a:bodyPr wrap="square">
-            <a:spAutoFit/>
-          </a:bodyPr>
-          <a:lstStyle/>
-          <a:p>
-            <a:pPr algn="l">
-              <a:lnSpc>
-                <a:spcPct val="115000"/>
-              </a:lnSpc>
-            </a:pPr>
-            <a:r>
-              <a:rPr sz="1500" b="0">
-                <a:solidFill>
-                  <a:srgbClr val="1D4ED8"/>
-                </a:solidFill>
-                <a:latin typeface="微软雅黑"/>
-              </a:rPr>
-              <a:t>不需要接入酒店内部系统，也不要客户名单、订单明细或任何个人信息。</a:t>
-            </a:r>
-          </a:p>
-        </p:txBody>
-      </p:sp>
-      <p:sp>
-        <p:nvSpPr>
-          <p:cNvPr id="10" name="TextBox 9"/>
-          <p:cNvSpPr txBox="1"/>
-          <p:nvPr/>
-        </p:nvSpPr>
-        <p:spPr>
-          <a:xfrm>
-            <a:off x="868680" y="5349240"/>
-            <a:ext cx="10332720" cy="365760"/>
-          </a:xfrm>
-          <a:prstGeom prst="rect">
-            <a:avLst/>
-          </a:prstGeom>
-          <a:noFill/>
-        </p:spPr>
-        <p:txBody>
-          <a:bodyPr wrap="square">
-            <a:spAutoFit/>
-          </a:bodyPr>
-          <a:lstStyle/>
-          <a:p>
-            <a:pPr algn="l">
-              <a:lnSpc>
-                <a:spcPct val="115000"/>
-              </a:lnSpc>
-            </a:pPr>
-            <a:r>
-              <a:rPr sz="1400" b="0">
-                <a:solidFill>
-                  <a:srgbClr val="6B7280"/>
-                </a:solidFill>
-                <a:latin typeface="微软雅黑"/>
-              </a:rPr>
-              <a:t>如果近期不方便，也完全可以先从业务建议和材料反馈开始。</a:t>
-            </a:r>
-          </a:p>
-        </p:txBody>
-      </p:sp>
-    </p:spTree>
-  </p:cSld>
-  <p:clrMapOvr>
-    <a:masterClrMapping/>
-  </p:clrMapOvr>
-</p:sld>
-</file>
-
-<file path=ppt/slides/slide12.xml><?xml version="1.0" encoding="utf-8"?>
-<p:sld xmlns:a="http://schemas.openxmlformats.org/drawingml/2006/main" xmlns:p="http://schemas.openxmlformats.org/presentationml/2006/main" xmlns:r="http://schemas.openxmlformats.org/officeDocument/2006/relationships">
-  <p:cSld>
-    <p:spTree>
-      <p:nvGrpSpPr>
-        <p:cNvPr id="1" name=""/>
-        <p:cNvGrpSpPr/>
-        <p:nvPr/>
-      </p:nvGrpSpPr>
-      <p:grpSpPr/>
-      <p:sp>
-        <p:nvSpPr>
-          <p:cNvPr id="2" name="TextBox 1"/>
-          <p:cNvSpPr txBox="1"/>
-          <p:nvPr/>
-        </p:nvSpPr>
-        <p:spPr>
-          <a:xfrm>
-            <a:off x="822960" y="475488"/>
-            <a:ext cx="10515600" cy="292608"/>
-          </a:xfrm>
-          <a:prstGeom prst="rect">
-            <a:avLst/>
-          </a:prstGeom>
-          <a:noFill/>
-        </p:spPr>
-        <p:txBody>
-          <a:bodyPr wrap="square">
-            <a:spAutoFit/>
-          </a:bodyPr>
-          <a:lstStyle/>
-          <a:p>
-            <a:pPr algn="l">
-              <a:lnSpc>
-                <a:spcPct val="115000"/>
-              </a:lnSpc>
-            </a:pPr>
-            <a:r>
-              <a:rPr sz="1200" b="0">
-                <a:solidFill>
-                  <a:srgbClr val="6B7280"/>
-                </a:solidFill>
-                <a:latin typeface="微软雅黑"/>
-              </a:rPr>
-              <a:t>价值</a:t>
-            </a:r>
-          </a:p>
-        </p:txBody>
-      </p:sp>
-      <p:sp>
-        <p:nvSpPr>
-          <p:cNvPr id="3" name="TextBox 2"/>
-          <p:cNvSpPr txBox="1"/>
-          <p:nvPr/>
-        </p:nvSpPr>
-        <p:spPr>
-          <a:xfrm>
-            <a:off x="822960" y="749808"/>
-            <a:ext cx="10607040" cy="640080"/>
-          </a:xfrm>
-          <a:prstGeom prst="rect">
-            <a:avLst/>
-          </a:prstGeom>
-          <a:noFill/>
-        </p:spPr>
-        <p:txBody>
-          <a:bodyPr wrap="square">
-            <a:spAutoFit/>
-          </a:bodyPr>
-          <a:lstStyle/>
-          <a:p>
-            <a:pPr algn="l">
-              <a:lnSpc>
-                <a:spcPct val="115000"/>
-              </a:lnSpc>
-            </a:pPr>
-            <a:r>
-              <a:rPr sz="3000" b="1">
-                <a:solidFill>
-                  <a:srgbClr val="1F2937"/>
-                </a:solidFill>
-                <a:latin typeface="微软雅黑"/>
-              </a:rPr>
-              <a:t>企业能得到的：三项可以量出来的结果</a:t>
-            </a:r>
-          </a:p>
-        </p:txBody>
-      </p:sp>
-      <p:cxnSp>
-        <p:nvCxnSpPr>
-          <p:cNvPr id="4" name="Connector 3"/>
-          <p:cNvCxnSpPr/>
-          <p:nvPr/>
-        </p:nvCxnSpPr>
-        <p:spPr>
-          <a:xfrm>
-            <a:off x="822960" y="1481328"/>
-            <a:ext cx="10543032" cy="0"/>
-          </a:xfrm>
-          <a:prstGeom prst="line">
-            <a:avLst/>
-          </a:prstGeom>
-          <a:ln w="11430">
-            <a:solidFill>
-              <a:srgbClr val="D8DEE6"/>
-            </a:solidFill>
-          </a:ln>
-        </p:spPr>
-        <p:style>
-          <a:lnRef idx="2">
-            <a:schemeClr val="accent1"/>
-          </a:lnRef>
-          <a:fillRef idx="0">
-            <a:schemeClr val="accent1"/>
-          </a:fillRef>
-          <a:effectRef idx="1">
-            <a:schemeClr val="accent1"/>
-          </a:effectRef>
-          <a:fontRef idx="minor">
-            <a:schemeClr val="tx1"/>
-          </a:fontRef>
-        </p:style>
-      </p:cxnSp>
-      <p:sp>
-        <p:nvSpPr>
-          <p:cNvPr id="5" name="TextBox 4"/>
-          <p:cNvSpPr txBox="1"/>
-          <p:nvPr/>
-        </p:nvSpPr>
-        <p:spPr>
-          <a:xfrm>
-            <a:off x="11292840" y="6355080"/>
-            <a:ext cx="548640" cy="274320"/>
-          </a:xfrm>
-          <a:prstGeom prst="rect">
-            <a:avLst/>
-          </a:prstGeom>
-          <a:noFill/>
-        </p:spPr>
-        <p:txBody>
-          <a:bodyPr wrap="square">
-            <a:spAutoFit/>
-          </a:bodyPr>
-          <a:lstStyle/>
-          <a:p>
-            <a:pPr algn="r">
-              <a:lnSpc>
-                <a:spcPct val="115000"/>
-              </a:lnSpc>
-            </a:pPr>
-            <a:r>
-              <a:rPr sz="1000" b="0">
-                <a:solidFill>
-                  <a:srgbClr val="6B7280"/>
-                </a:solidFill>
-                <a:latin typeface="微软雅黑"/>
-              </a:rPr>
-              <a:t>12</a:t>
-            </a:r>
-          </a:p>
-        </p:txBody>
-      </p:sp>
-      <p:sp>
-        <p:nvSpPr>
-          <p:cNvPr id="6" name="TextBox 5"/>
-          <p:cNvSpPr txBox="1"/>
-          <p:nvPr/>
-        </p:nvSpPr>
-        <p:spPr>
-          <a:xfrm>
-            <a:off x="822960" y="6355080"/>
-            <a:ext cx="5486400" cy="274320"/>
-          </a:xfrm>
-          <a:prstGeom prst="rect">
-            <a:avLst/>
-          </a:prstGeom>
-          <a:noFill/>
-        </p:spPr>
-        <p:txBody>
-          <a:bodyPr wrap="square">
-            <a:spAutoFit/>
-          </a:bodyPr>
-          <a:lstStyle/>
-          <a:p>
-            <a:pPr algn="l">
-              <a:lnSpc>
-                <a:spcPct val="115000"/>
-              </a:lnSpc>
-            </a:pPr>
-            <a:r>
-              <a:rPr sz="1000" b="0">
-                <a:solidFill>
-                  <a:srgbClr val="6B7280"/>
-                </a:solidFill>
-                <a:latin typeface="微软雅黑"/>
-              </a:rPr>
-              <a:t>Menduner · ENT303TC 第 14 组</a:t>
-            </a:r>
-          </a:p>
-        </p:txBody>
-      </p:sp>
-      <p:graphicFrame>
-        <p:nvGraphicFramePr>
-          <p:cNvPr id="7" name="Table 6"/>
-          <p:cNvGraphicFramePr>
-            <a:graphicFrameLocks noGrp="1"/>
-          </p:cNvGraphicFramePr>
-          <p:nvPr/>
-        </p:nvGraphicFramePr>
-        <p:xfrm>
-          <a:off x="868680" y="1828800"/>
-          <a:ext cx="10332719" cy="2194560"/>
-        </p:xfrm>
-        <a:graphic>
-          <a:graphicData uri="http://schemas.openxmlformats.org/drawingml/2006/table">
-            <a:tbl>
-              <a:tblPr firstRow="0" bandRow="0">
-                <a:tableStyleId>{2D5ABB26-0587-4C30-8999-92F81FD0307C}</a:tableStyleId>
-              </a:tblPr>
-              <a:tblGrid>
-                <a:gridCol w="2377440"/>
-                <a:gridCol w="7955279"/>
-              </a:tblGrid>
-              <a:tr h="548640">
-                <a:tc>
-                  <a:txBody>
-                    <a:bodyPr/>
-                    <a:lstStyle/>
-                    <a:p>
-                      <a:pPr>
-                        <a:lnSpc>
-                          <a:spcPct val="105000"/>
-                        </a:lnSpc>
-                      </a:pPr>
-                      <a:r>
-                        <a:rPr sz="1000" b="1">
-                          <a:solidFill>
-                            <a:srgbClr val="6B7280"/>
-                          </a:solidFill>
-                          <a:latin typeface="微软雅黑"/>
-                        </a:rPr>
-                        <a:t>维度</a:t>
-                      </a:r>
-                    </a:p>
-                  </a:txBody>
-                  <a:tcPr marL="73152" marR="73152" marT="27432" marB="27432" anchor="ctr"/>
-                </a:tc>
-                <a:tc>
-                  <a:txBody>
-                    <a:bodyPr/>
-                    <a:lstStyle/>
-                    <a:p>
-                      <a:pPr>
-                        <a:lnSpc>
-                          <a:spcPct val="105000"/>
-                        </a:lnSpc>
-                      </a:pPr>
-                      <a:r>
-                        <a:rPr sz="1000" b="1">
-                          <a:solidFill>
-                            <a:srgbClr val="6B7280"/>
-                          </a:solidFill>
-                          <a:latin typeface="微软雅黑"/>
-                        </a:rPr>
-                        <a:t>验证方式</a:t>
-                      </a:r>
-                    </a:p>
-                  </a:txBody>
-                  <a:tcPr marL="73152" marR="73152" marT="27432" marB="27432" anchor="ctr"/>
-                </a:tc>
-              </a:tr>
-              <a:tr h="548640">
-                <a:tc>
-                  <a:txBody>
-                    <a:bodyPr/>
-                    <a:lstStyle/>
-                    <a:p>
-                      <a:pPr>
-                        <a:lnSpc>
-                          <a:spcPct val="105000"/>
-                        </a:lnSpc>
-                      </a:pPr>
-                      <a:r>
-                        <a:rPr sz="1150" b="0">
-                          <a:solidFill>
-                            <a:srgbClr val="1F2937"/>
-                          </a:solidFill>
-                          <a:latin typeface="微软雅黑"/>
-                        </a:rPr>
-                        <a:t>信息价值</a:t>
-                      </a:r>
-                    </a:p>
-                  </a:txBody>
-                  <a:tcPr marL="73152" marR="73152" marT="27432" marB="27432" anchor="ctr"/>
-                </a:tc>
-                <a:tc>
-                  <a:txBody>
-                    <a:bodyPr/>
-                    <a:lstStyle/>
-                    <a:p>
-                      <a:pPr>
-                        <a:lnSpc>
-                          <a:spcPct val="105000"/>
-                        </a:lnSpc>
-                      </a:pPr>
-                      <a:r>
-                        <a:rPr sz="1150" b="0">
-                          <a:solidFill>
-                            <a:srgbClr val="1F2937"/>
-                          </a:solidFill>
-                          <a:latin typeface="微软雅黑"/>
-                        </a:rPr>
-                        <a:t>能否更早发现与自身相关的活动（发现时间差）</a:t>
-                      </a:r>
-                    </a:p>
-                  </a:txBody>
-                  <a:tcPr marL="73152" marR="73152" marT="27432" marB="27432" anchor="ctr"/>
-                </a:tc>
-              </a:tr>
-              <a:tr h="548640">
-                <a:tc>
-                  <a:txBody>
-                    <a:bodyPr/>
-                    <a:lstStyle/>
-                    <a:p>
-                      <a:pPr>
-                        <a:lnSpc>
-                          <a:spcPct val="105000"/>
-                        </a:lnSpc>
-                      </a:pPr>
-                      <a:r>
-                        <a:rPr sz="1150" b="0">
-                          <a:solidFill>
-                            <a:srgbClr val="1F2937"/>
-                          </a:solidFill>
-                          <a:latin typeface="微软雅黑"/>
-                        </a:rPr>
-                        <a:t>工作效率</a:t>
-                      </a:r>
-                    </a:p>
-                  </a:txBody>
-                  <a:tcPr marL="73152" marR="73152" marT="27432" marB="27432" anchor="ctr"/>
-                </a:tc>
-                <a:tc>
-                  <a:txBody>
-                    <a:bodyPr/>
-                    <a:lstStyle/>
-                    <a:p>
-                      <a:pPr>
-                        <a:lnSpc>
-                          <a:spcPct val="105000"/>
-                        </a:lnSpc>
-                      </a:pPr>
-                      <a:r>
-                        <a:rPr sz="1150" b="0">
-                          <a:solidFill>
-                            <a:srgbClr val="1F2937"/>
-                          </a:solidFill>
-                          <a:latin typeface="微软雅黑"/>
-                        </a:rPr>
-                        <a:t>整理一份活动简报所需时间是否减少</a:t>
-                      </a:r>
-                    </a:p>
-                  </a:txBody>
-                  <a:tcPr marL="73152" marR="73152" marT="27432" marB="27432" anchor="ctr"/>
-                </a:tc>
-              </a:tr>
-              <a:tr h="548640">
-                <a:tc>
-                  <a:txBody>
-                    <a:bodyPr/>
-                    <a:lstStyle/>
-                    <a:p>
-                      <a:pPr>
-                        <a:lnSpc>
-                          <a:spcPct val="105000"/>
-                        </a:lnSpc>
-                      </a:pPr>
-                      <a:r>
-                        <a:rPr sz="1150" b="0">
-                          <a:solidFill>
-                            <a:srgbClr val="1F2937"/>
-                          </a:solidFill>
-                          <a:latin typeface="微软雅黑"/>
-                        </a:rPr>
-                        <a:t>决策价值</a:t>
-                      </a:r>
-                    </a:p>
-                  </a:txBody>
-                  <a:tcPr marL="73152" marR="73152" marT="27432" marB="27432" anchor="ctr"/>
-                </a:tc>
-                <a:tc>
-                  <a:txBody>
-                    <a:bodyPr/>
-                    <a:lstStyle/>
-                    <a:p>
-                      <a:pPr>
-                        <a:lnSpc>
-                          <a:spcPct val="105000"/>
-                        </a:lnSpc>
-                      </a:pPr>
-                      <a:r>
-                        <a:rPr sz="1150" b="0">
-                          <a:solidFill>
-                            <a:srgbClr val="1F2937"/>
-                          </a:solidFill>
-                          <a:latin typeface="微软雅黑"/>
-                        </a:rPr>
-                        <a:t>员工能否基于简报挑出该跟进的活动，并说清理由</a:t>
-                      </a:r>
-                    </a:p>
-                  </a:txBody>
-                  <a:tcPr marL="73152" marR="73152" marT="27432" marB="27432" anchor="ctr"/>
-                </a:tc>
-              </a:tr>
-            </a:tbl>
-          </a:graphicData>
-        </a:graphic>
-      </p:graphicFrame>
-      <p:cxnSp>
-        <p:nvCxnSpPr>
-          <p:cNvPr id="8" name="Connector 7"/>
-          <p:cNvCxnSpPr/>
-          <p:nvPr/>
-        </p:nvCxnSpPr>
-        <p:spPr>
-          <a:xfrm>
-            <a:off x="868680" y="2377440"/>
-            <a:ext cx="10332719" cy="0"/>
-          </a:xfrm>
-          <a:prstGeom prst="line">
-            <a:avLst/>
-          </a:prstGeom>
-          <a:ln w="11430">
-            <a:solidFill>
-              <a:srgbClr val="D8DEE6"/>
-            </a:solidFill>
-          </a:ln>
-        </p:spPr>
-        <p:style>
-          <a:lnRef idx="2">
-            <a:schemeClr val="accent1"/>
-          </a:lnRef>
-          <a:fillRef idx="0">
-            <a:schemeClr val="accent1"/>
-          </a:fillRef>
-          <a:effectRef idx="1">
-            <a:schemeClr val="accent1"/>
-          </a:effectRef>
-          <a:fontRef idx="minor">
-            <a:schemeClr val="tx1"/>
-          </a:fontRef>
-        </p:style>
-      </p:cxnSp>
-      <p:sp>
-        <p:nvSpPr>
-          <p:cNvPr id="9" name="TextBox 8"/>
-          <p:cNvSpPr txBox="1"/>
-          <p:nvPr/>
-        </p:nvSpPr>
-        <p:spPr>
-          <a:xfrm>
-            <a:off x="868680" y="4343400"/>
-            <a:ext cx="10332720" cy="457200"/>
-          </a:xfrm>
-          <a:prstGeom prst="rect">
-            <a:avLst/>
-          </a:prstGeom>
-          <a:noFill/>
-        </p:spPr>
-        <p:txBody>
-          <a:bodyPr wrap="square">
-            <a:spAutoFit/>
-          </a:bodyPr>
-          <a:lstStyle/>
-          <a:p>
-            <a:pPr algn="l">
-              <a:lnSpc>
-                <a:spcPct val="115000"/>
-              </a:lnSpc>
-            </a:pPr>
-            <a:r>
-              <a:rPr sz="1600" b="0">
-                <a:solidFill>
-                  <a:srgbClr val="6B7280"/>
-                </a:solidFill>
-                <a:latin typeface="微软雅黑"/>
-              </a:rPr>
-              <a:t>我们不承诺营业额提升，只承诺把这三件事量出来给您看。</a:t>
-            </a:r>
-          </a:p>
-        </p:txBody>
-      </p:sp>
-    </p:spTree>
-  </p:cSld>
-  <p:clrMapOvr>
-    <a:masterClrMapping/>
-  </p:clrMapOvr>
-</p:sld>
-</file>
-
-<file path=ppt/slides/slide13.xml><?xml version="1.0" encoding="utf-8"?>
-<p:sld xmlns:a="http://schemas.openxmlformats.org/drawingml/2006/main" xmlns:p="http://schemas.openxmlformats.org/presentationml/2006/main" xmlns:r="http://schemas.openxmlformats.org/officeDocument/2006/relationships">
-  <p:cSld>
-    <p:spTree>
-      <p:nvGrpSpPr>
-        <p:cNvPr id="1" name=""/>
-        <p:cNvGrpSpPr/>
-        <p:nvPr/>
-      </p:nvGrpSpPr>
-      <p:grpSpPr/>
-      <p:sp>
-        <p:nvSpPr>
-          <p:cNvPr id="2" name="TextBox 1"/>
-          <p:cNvSpPr txBox="1"/>
-          <p:nvPr/>
-        </p:nvSpPr>
-        <p:spPr>
-          <a:xfrm>
-            <a:off x="822960" y="475488"/>
-            <a:ext cx="10515600" cy="292608"/>
-          </a:xfrm>
-          <a:prstGeom prst="rect">
-            <a:avLst/>
-          </a:prstGeom>
-          <a:noFill/>
-        </p:spPr>
-        <p:txBody>
-          <a:bodyPr wrap="square">
-            <a:spAutoFit/>
-          </a:bodyPr>
-          <a:lstStyle/>
-          <a:p>
-            <a:pPr algn="l">
-              <a:lnSpc>
-                <a:spcPct val="115000"/>
-              </a:lnSpc>
-            </a:pPr>
-            <a:r>
-              <a:rPr sz="1200" b="0">
-                <a:solidFill>
-                  <a:srgbClr val="6B7280"/>
-                </a:solidFill>
-                <a:latin typeface="微软雅黑"/>
-              </a:rPr>
-              <a:t>路线图</a:t>
-            </a:r>
-          </a:p>
-        </p:txBody>
-      </p:sp>
-      <p:sp>
-        <p:nvSpPr>
-          <p:cNvPr id="3" name="TextBox 2"/>
-          <p:cNvSpPr txBox="1"/>
-          <p:nvPr/>
-        </p:nvSpPr>
-        <p:spPr>
-          <a:xfrm>
-            <a:off x="822960" y="749808"/>
-            <a:ext cx="10607040" cy="640080"/>
-          </a:xfrm>
-          <a:prstGeom prst="rect">
-            <a:avLst/>
-          </a:prstGeom>
-          <a:noFill/>
-        </p:spPr>
-        <p:txBody>
-          <a:bodyPr wrap="square">
-            <a:spAutoFit/>
-          </a:bodyPr>
-          <a:lstStyle/>
-          <a:p>
-            <a:pPr algn="l">
-              <a:lnSpc>
-                <a:spcPct val="115000"/>
-              </a:lnSpc>
-            </a:pPr>
-            <a:r>
-              <a:rPr sz="3000" b="1">
-                <a:solidFill>
-                  <a:srgbClr val="1F2937"/>
-                </a:solidFill>
-                <a:latin typeface="微软雅黑"/>
-              </a:rPr>
-              <a:t>后续路线：三步走</a:t>
-            </a:r>
-          </a:p>
-        </p:txBody>
-      </p:sp>
-      <p:cxnSp>
-        <p:nvCxnSpPr>
-          <p:cNvPr id="4" name="Connector 3"/>
-          <p:cNvCxnSpPr/>
-          <p:nvPr/>
-        </p:nvCxnSpPr>
-        <p:spPr>
-          <a:xfrm>
-            <a:off x="822960" y="1481328"/>
-            <a:ext cx="10543032" cy="0"/>
-          </a:xfrm>
-          <a:prstGeom prst="line">
-            <a:avLst/>
-          </a:prstGeom>
-          <a:ln w="11430">
-            <a:solidFill>
-              <a:srgbClr val="D8DEE6"/>
-            </a:solidFill>
-          </a:ln>
-        </p:spPr>
-        <p:style>
-          <a:lnRef idx="2">
-            <a:schemeClr val="accent1"/>
-          </a:lnRef>
-          <a:fillRef idx="0">
-            <a:schemeClr val="accent1"/>
-          </a:fillRef>
-          <a:effectRef idx="1">
-            <a:schemeClr val="accent1"/>
-          </a:effectRef>
-          <a:fontRef idx="minor">
-            <a:schemeClr val="tx1"/>
-          </a:fontRef>
-        </p:style>
-      </p:cxnSp>
-      <p:sp>
-        <p:nvSpPr>
-          <p:cNvPr id="5" name="TextBox 4"/>
-          <p:cNvSpPr txBox="1"/>
-          <p:nvPr/>
-        </p:nvSpPr>
-        <p:spPr>
-          <a:xfrm>
-            <a:off x="11292840" y="6355080"/>
-            <a:ext cx="548640" cy="274320"/>
-          </a:xfrm>
-          <a:prstGeom prst="rect">
-            <a:avLst/>
-          </a:prstGeom>
-          <a:noFill/>
-        </p:spPr>
-        <p:txBody>
-          <a:bodyPr wrap="square">
-            <a:spAutoFit/>
-          </a:bodyPr>
-          <a:lstStyle/>
-          <a:p>
-            <a:pPr algn="r">
-              <a:lnSpc>
-                <a:spcPct val="115000"/>
-              </a:lnSpc>
-            </a:pPr>
-            <a:r>
-              <a:rPr sz="1000" b="0">
-                <a:solidFill>
-                  <a:srgbClr val="6B7280"/>
-                </a:solidFill>
-                <a:latin typeface="微软雅黑"/>
-              </a:rPr>
-              <a:t>13</a:t>
-            </a:r>
-          </a:p>
-        </p:txBody>
-      </p:sp>
-      <p:sp>
-        <p:nvSpPr>
-          <p:cNvPr id="6" name="TextBox 5"/>
-          <p:cNvSpPr txBox="1"/>
-          <p:nvPr/>
-        </p:nvSpPr>
-        <p:spPr>
-          <a:xfrm>
-            <a:off x="822960" y="6355080"/>
-            <a:ext cx="5486400" cy="274320"/>
-          </a:xfrm>
-          <a:prstGeom prst="rect">
-            <a:avLst/>
-          </a:prstGeom>
-          <a:noFill/>
-        </p:spPr>
-        <p:txBody>
-          <a:bodyPr wrap="square">
-            <a:spAutoFit/>
-          </a:bodyPr>
-          <a:lstStyle/>
-          <a:p>
-            <a:pPr algn="l">
-              <a:lnSpc>
-                <a:spcPct val="115000"/>
-              </a:lnSpc>
-            </a:pPr>
-            <a:r>
-              <a:rPr sz="1000" b="0">
-                <a:solidFill>
-                  <a:srgbClr val="6B7280"/>
-                </a:solidFill>
-                <a:latin typeface="微软雅黑"/>
-              </a:rPr>
-              <a:t>Menduner · ENT303TC 第 14 组</a:t>
-            </a:r>
-          </a:p>
-        </p:txBody>
-      </p:sp>
-      <p:sp>
-        <p:nvSpPr>
-          <p:cNvPr id="7" name="TextBox 6"/>
-          <p:cNvSpPr txBox="1"/>
-          <p:nvPr/>
-        </p:nvSpPr>
-        <p:spPr>
-          <a:xfrm>
-            <a:off x="868680" y="1737360"/>
-            <a:ext cx="10332720" cy="384048"/>
-          </a:xfrm>
-          <a:prstGeom prst="rect">
-            <a:avLst/>
-          </a:prstGeom>
-          <a:noFill/>
-        </p:spPr>
-        <p:txBody>
-          <a:bodyPr wrap="square">
-            <a:spAutoFit/>
-          </a:bodyPr>
-          <a:lstStyle/>
-          <a:p>
-            <a:pPr algn="l">
-              <a:lnSpc>
-                <a:spcPct val="115000"/>
-              </a:lnSpc>
-            </a:pPr>
-            <a:r>
-              <a:rPr sz="2000" b="1">
-                <a:solidFill>
-                  <a:srgbClr val="1F2937"/>
-                </a:solidFill>
-                <a:latin typeface="微软雅黑"/>
-              </a:rPr>
-              <a:t>短期 2–4 周 · 收尾</a:t>
-            </a:r>
-          </a:p>
-        </p:txBody>
-      </p:sp>
-      <p:sp>
-        <p:nvSpPr>
-          <p:cNvPr id="8" name="TextBox 7"/>
-          <p:cNvSpPr txBox="1"/>
-          <p:nvPr/>
-        </p:nvSpPr>
-        <p:spPr>
-          <a:xfrm>
-            <a:off x="868680" y="2176272"/>
-            <a:ext cx="10332720" cy="365760"/>
-          </a:xfrm>
-          <a:prstGeom prst="rect">
-            <a:avLst/>
-          </a:prstGeom>
-          <a:noFill/>
-        </p:spPr>
-        <p:txBody>
-          <a:bodyPr wrap="square">
-            <a:spAutoFit/>
-          </a:bodyPr>
-          <a:lstStyle/>
-          <a:p>
-            <a:pPr algn="l">
-              <a:lnSpc>
-                <a:spcPct val="115000"/>
-              </a:lnSpc>
-            </a:pPr>
-            <a:r>
-              <a:rPr sz="1500" b="0">
-                <a:solidFill>
-                  <a:srgbClr val="1F2937"/>
-                </a:solidFill>
-                <a:latin typeface="微软雅黑"/>
-              </a:rPr>
-              <a:t>交互测试收尾、使用说明、演示流程、数据覆盖说明</a:t>
-            </a:r>
-          </a:p>
-        </p:txBody>
-      </p:sp>
-      <p:sp>
-        <p:nvSpPr>
-          <p:cNvPr id="9" name="TextBox 8"/>
-          <p:cNvSpPr txBox="1"/>
-          <p:nvPr/>
-        </p:nvSpPr>
-        <p:spPr>
-          <a:xfrm>
-            <a:off x="868680" y="2523744"/>
-            <a:ext cx="10332720" cy="329184"/>
-          </a:xfrm>
-          <a:prstGeom prst="rect">
-            <a:avLst/>
-          </a:prstGeom>
-          <a:noFill/>
-        </p:spPr>
-        <p:txBody>
-          <a:bodyPr wrap="square">
-            <a:spAutoFit/>
-          </a:bodyPr>
-          <a:lstStyle/>
-          <a:p>
-            <a:pPr algn="l">
-              <a:lnSpc>
-                <a:spcPct val="115000"/>
-              </a:lnSpc>
-            </a:pPr>
-            <a:r>
-              <a:rPr sz="1300" b="0">
-                <a:solidFill>
-                  <a:srgbClr val="6B7280"/>
-                </a:solidFill>
-                <a:latin typeface="微软雅黑"/>
-              </a:rPr>
-              <a:t>交付：使用说明书 + 试点需求清单</a:t>
-            </a:r>
-          </a:p>
-        </p:txBody>
-      </p:sp>
-      <p:cxnSp>
-        <p:nvCxnSpPr>
-          <p:cNvPr id="10" name="Connector 9"/>
-          <p:cNvCxnSpPr/>
-          <p:nvPr/>
-        </p:nvCxnSpPr>
-        <p:spPr>
-          <a:xfrm>
-            <a:off x="868680" y="2907791"/>
-            <a:ext cx="10241279" cy="0"/>
-          </a:xfrm>
-          <a:prstGeom prst="line">
-            <a:avLst/>
-          </a:prstGeom>
-          <a:ln w="11430">
-            <a:solidFill>
-              <a:srgbClr val="D8DEE6"/>
-            </a:solidFill>
-          </a:ln>
-        </p:spPr>
-        <p:style>
-          <a:lnRef idx="2">
-            <a:schemeClr val="accent1"/>
-          </a:lnRef>
-          <a:fillRef idx="0">
-            <a:schemeClr val="accent1"/>
-          </a:fillRef>
-          <a:effectRef idx="1">
-            <a:schemeClr val="accent1"/>
-          </a:effectRef>
-          <a:fontRef idx="minor">
-            <a:schemeClr val="tx1"/>
-          </a:fontRef>
-        </p:style>
-      </p:cxnSp>
-      <p:sp>
-        <p:nvSpPr>
-          <p:cNvPr id="11" name="TextBox 10"/>
-          <p:cNvSpPr txBox="1"/>
-          <p:nvPr/>
-        </p:nvSpPr>
-        <p:spPr>
-          <a:xfrm>
-            <a:off x="868680" y="3218688"/>
-            <a:ext cx="10332720" cy="384048"/>
-          </a:xfrm>
-          <a:prstGeom prst="rect">
-            <a:avLst/>
-          </a:prstGeom>
-          <a:noFill/>
-        </p:spPr>
-        <p:txBody>
-          <a:bodyPr wrap="square">
-            <a:spAutoFit/>
-          </a:bodyPr>
-          <a:lstStyle/>
-          <a:p>
-            <a:pPr algn="l">
-              <a:lnSpc>
-                <a:spcPct val="115000"/>
-              </a:lnSpc>
-            </a:pPr>
-            <a:r>
-              <a:rPr sz="2000" b="1">
-                <a:solidFill>
-                  <a:srgbClr val="1F2937"/>
-                </a:solidFill>
-                <a:latin typeface="微软雅黑"/>
-              </a:rPr>
-              <a:t>中期 1–3 月 · 试点</a:t>
-            </a:r>
-          </a:p>
-        </p:txBody>
-      </p:sp>
-      <p:sp>
-        <p:nvSpPr>
-          <p:cNvPr id="12" name="TextBox 11"/>
-          <p:cNvSpPr txBox="1"/>
-          <p:nvPr/>
-        </p:nvSpPr>
-        <p:spPr>
-          <a:xfrm>
-            <a:off x="868680" y="3657600"/>
-            <a:ext cx="10332720" cy="365760"/>
-          </a:xfrm>
-          <a:prstGeom prst="rect">
-            <a:avLst/>
-          </a:prstGeom>
-          <a:noFill/>
-        </p:spPr>
-        <p:txBody>
-          <a:bodyPr wrap="square">
-            <a:spAutoFit/>
-          </a:bodyPr>
-          <a:lstStyle/>
-          <a:p>
-            <a:pPr algn="l">
-              <a:lnSpc>
-                <a:spcPct val="115000"/>
-              </a:lnSpc>
-            </a:pPr>
-            <a:r>
-              <a:rPr sz="1500" b="0">
-                <a:solidFill>
-                  <a:srgbClr val="1F2937"/>
-                </a:solidFill>
-                <a:latin typeface="微软雅黑"/>
-              </a:rPr>
-              <a:t>按约定范围整理活动、生成简报、记录问题、改进质量</a:t>
-            </a:r>
-          </a:p>
-        </p:txBody>
-      </p:sp>
-      <p:sp>
-        <p:nvSpPr>
-          <p:cNvPr id="13" name="TextBox 12"/>
-          <p:cNvSpPr txBox="1"/>
-          <p:nvPr/>
-        </p:nvSpPr>
-        <p:spPr>
-          <a:xfrm>
-            <a:off x="868680" y="4005072"/>
-            <a:ext cx="10332720" cy="329184"/>
-          </a:xfrm>
-          <a:prstGeom prst="rect">
-            <a:avLst/>
-          </a:prstGeom>
-          <a:noFill/>
-        </p:spPr>
-        <p:txBody>
-          <a:bodyPr wrap="square">
-            <a:spAutoFit/>
-          </a:bodyPr>
-          <a:lstStyle/>
-          <a:p>
-            <a:pPr algn="l">
-              <a:lnSpc>
-                <a:spcPct val="115000"/>
-              </a:lnSpc>
-            </a:pPr>
-            <a:r>
-              <a:rPr sz="1300" b="0">
-                <a:solidFill>
-                  <a:srgbClr val="6B7280"/>
-                </a:solidFill>
-                <a:latin typeface="微软雅黑"/>
-              </a:rPr>
-              <a:t>交付：试点评估报告 + 功能优先级</a:t>
-            </a:r>
-          </a:p>
-        </p:txBody>
-      </p:sp>
-      <p:cxnSp>
-        <p:nvCxnSpPr>
-          <p:cNvPr id="14" name="Connector 13"/>
-          <p:cNvCxnSpPr/>
-          <p:nvPr/>
-        </p:nvCxnSpPr>
-        <p:spPr>
-          <a:xfrm>
-            <a:off x="868680" y="4389120"/>
-            <a:ext cx="10241279" cy="0"/>
-          </a:xfrm>
-          <a:prstGeom prst="line">
-            <a:avLst/>
-          </a:prstGeom>
-          <a:ln w="11430">
-            <a:solidFill>
-              <a:srgbClr val="D8DEE6"/>
-            </a:solidFill>
-          </a:ln>
-        </p:spPr>
-        <p:style>
-          <a:lnRef idx="2">
-            <a:schemeClr val="accent1"/>
-          </a:lnRef>
-          <a:fillRef idx="0">
-            <a:schemeClr val="accent1"/>
-          </a:fillRef>
-          <a:effectRef idx="1">
-            <a:schemeClr val="accent1"/>
-          </a:effectRef>
-          <a:fontRef idx="minor">
-            <a:schemeClr val="tx1"/>
-          </a:fontRef>
-        </p:style>
-      </p:cxnSp>
-      <p:sp>
-        <p:nvSpPr>
-          <p:cNvPr id="15" name="TextBox 14"/>
-          <p:cNvSpPr txBox="1"/>
-          <p:nvPr/>
-        </p:nvSpPr>
-        <p:spPr>
-          <a:xfrm>
-            <a:off x="868680" y="4700016"/>
-            <a:ext cx="10332720" cy="384048"/>
-          </a:xfrm>
-          <a:prstGeom prst="rect">
-            <a:avLst/>
-          </a:prstGeom>
-          <a:noFill/>
-        </p:spPr>
-        <p:txBody>
-          <a:bodyPr wrap="square">
-            <a:spAutoFit/>
-          </a:bodyPr>
-          <a:lstStyle/>
-          <a:p>
-            <a:pPr algn="l">
-              <a:lnSpc>
-                <a:spcPct val="115000"/>
-              </a:lnSpc>
-            </a:pPr>
-            <a:r>
-              <a:rPr sz="2000" b="1">
-                <a:solidFill>
-                  <a:srgbClr val="1F2937"/>
-                </a:solidFill>
-                <a:latin typeface="微软雅黑"/>
-              </a:rPr>
-              <a:t>长期 · 商业化探索</a:t>
-            </a:r>
-          </a:p>
-        </p:txBody>
-      </p:sp>
-      <p:sp>
-        <p:nvSpPr>
-          <p:cNvPr id="16" name="TextBox 15"/>
-          <p:cNvSpPr txBox="1"/>
-          <p:nvPr/>
-        </p:nvSpPr>
-        <p:spPr>
-          <a:xfrm>
-            <a:off x="868680" y="5138928"/>
-            <a:ext cx="10332720" cy="365760"/>
-          </a:xfrm>
-          <a:prstGeom prst="rect">
-            <a:avLst/>
-          </a:prstGeom>
-          <a:noFill/>
-        </p:spPr>
-        <p:txBody>
-          <a:bodyPr wrap="square">
-            <a:spAutoFit/>
-          </a:bodyPr>
-          <a:lstStyle/>
-          <a:p>
-            <a:pPr algn="l">
-              <a:lnSpc>
-                <a:spcPct val="115000"/>
-              </a:lnSpc>
-            </a:pPr>
-            <a:r>
-              <a:rPr sz="1500" b="0">
-                <a:solidFill>
-                  <a:srgbClr val="1F2937"/>
-                </a:solidFill>
-                <a:latin typeface="微软雅黑"/>
-              </a:rPr>
-              <a:t>数据维护成本、标准化、多店管理、权限隔离</a:t>
-            </a:r>
-          </a:p>
-        </p:txBody>
-      </p:sp>
-      <p:sp>
-        <p:nvSpPr>
-          <p:cNvPr id="17" name="TextBox 16"/>
-          <p:cNvSpPr txBox="1"/>
-          <p:nvPr/>
-        </p:nvSpPr>
-        <p:spPr>
-          <a:xfrm>
-            <a:off x="868680" y="5486400"/>
-            <a:ext cx="10332720" cy="329184"/>
-          </a:xfrm>
-          <a:prstGeom prst="rect">
-            <a:avLst/>
-          </a:prstGeom>
-          <a:noFill/>
-        </p:spPr>
-        <p:txBody>
-          <a:bodyPr wrap="square">
-            <a:spAutoFit/>
-          </a:bodyPr>
-          <a:lstStyle/>
-          <a:p>
-            <a:pPr algn="l">
-              <a:lnSpc>
-                <a:spcPct val="115000"/>
-              </a:lnSpc>
-            </a:pPr>
-            <a:r>
-              <a:rPr sz="1300" b="0">
-                <a:solidFill>
-                  <a:srgbClr val="6B7280"/>
-                </a:solidFill>
-                <a:latin typeface="微软雅黑"/>
-              </a:rPr>
-              <a:t>交付：基于真实使用反馈的可行性方案</a:t>
-            </a:r>
-          </a:p>
-        </p:txBody>
-      </p:sp>
-      <p:cxnSp>
-        <p:nvCxnSpPr>
-          <p:cNvPr id="18" name="Connector 17"/>
-          <p:cNvCxnSpPr/>
-          <p:nvPr/>
-        </p:nvCxnSpPr>
-        <p:spPr>
-          <a:xfrm>
-            <a:off x="868680" y="5870448"/>
-            <a:ext cx="10241279" cy="0"/>
-          </a:xfrm>
-          <a:prstGeom prst="line">
-            <a:avLst/>
-          </a:prstGeom>
-          <a:ln w="11430">
-            <a:solidFill>
-              <a:srgbClr val="D8DEE6"/>
-            </a:solidFill>
-          </a:ln>
-        </p:spPr>
-        <p:style>
-          <a:lnRef idx="2">
-            <a:schemeClr val="accent1"/>
-          </a:lnRef>
-          <a:fillRef idx="0">
-            <a:schemeClr val="accent1"/>
-          </a:fillRef>
-          <a:effectRef idx="1">
-            <a:schemeClr val="accent1"/>
-          </a:effectRef>
-          <a:fontRef idx="minor">
-            <a:schemeClr val="tx1"/>
-          </a:fontRef>
-        </p:style>
-      </p:cxnSp>
-      <p:sp>
-        <p:nvSpPr>
-          <p:cNvPr id="19" name="TextBox 18"/>
-          <p:cNvSpPr txBox="1"/>
-          <p:nvPr/>
-        </p:nvSpPr>
-        <p:spPr>
-          <a:xfrm>
-            <a:off x="868680" y="5806440"/>
-            <a:ext cx="10332720" cy="365760"/>
-          </a:xfrm>
-          <a:prstGeom prst="rect">
-            <a:avLst/>
-          </a:prstGeom>
-          <a:noFill/>
-        </p:spPr>
-        <p:txBody>
-          <a:bodyPr wrap="square">
-            <a:spAutoFit/>
-          </a:bodyPr>
-          <a:lstStyle/>
-          <a:p>
-            <a:pPr algn="l">
-              <a:lnSpc>
-                <a:spcPct val="115000"/>
-              </a:lnSpc>
-            </a:pPr>
-            <a:r>
-              <a:rPr sz="1300" b="0">
-                <a:solidFill>
-                  <a:srgbClr val="6B7280"/>
-                </a:solidFill>
-                <a:latin typeface="微软雅黑"/>
-              </a:rPr>
-              <a:t>每一步都需要企业配合：短期给业务反馈，中期给一个试点场景，长期给采购与预算流程的指导。</a:t>
-            </a:r>
-          </a:p>
-        </p:txBody>
-      </p:sp>
-    </p:spTree>
-  </p:cSld>
-  <p:clrMapOvr>
-    <a:masterClrMapping/>
-  </p:clrMapOvr>
-</p:sld>
-</file>
-
-<file path=ppt/slides/slide14.xml><?xml version="1.0" encoding="utf-8"?>
-<p:sld xmlns:a="http://schemas.openxmlformats.org/drawingml/2006/main" xmlns:p="http://schemas.openxmlformats.org/presentationml/2006/main" xmlns:r="http://schemas.openxmlformats.org/officeDocument/2006/relationships">
-  <p:cSld>
-    <p:spTree>
-      <p:nvGrpSpPr>
-        <p:cNvPr id="1" name=""/>
-        <p:cNvGrpSpPr/>
-        <p:nvPr/>
-      </p:nvGrpSpPr>
-      <p:grpSpPr/>
-      <p:sp>
-        <p:nvSpPr>
-          <p:cNvPr id="2" name="TextBox 1"/>
-          <p:cNvSpPr txBox="1"/>
-          <p:nvPr/>
-        </p:nvSpPr>
-        <p:spPr>
-          <a:xfrm>
-            <a:off x="822960" y="475488"/>
-            <a:ext cx="10515600" cy="292608"/>
-          </a:xfrm>
-          <a:prstGeom prst="rect">
-            <a:avLst/>
-          </a:prstGeom>
-          <a:noFill/>
-        </p:spPr>
-        <p:txBody>
-          <a:bodyPr wrap="square">
-            <a:spAutoFit/>
-          </a:bodyPr>
-          <a:lstStyle/>
-          <a:p>
-            <a:pPr algn="l">
-              <a:lnSpc>
-                <a:spcPct val="115000"/>
-              </a:lnSpc>
-            </a:pPr>
-            <a:r>
-              <a:rPr sz="1200" b="0">
-                <a:solidFill>
-                  <a:srgbClr val="6B7280"/>
-                </a:solidFill>
-                <a:latin typeface="微软雅黑"/>
-              </a:rPr>
-              <a:t>收尾</a:t>
-            </a:r>
-          </a:p>
-        </p:txBody>
-      </p:sp>
-      <p:sp>
-        <p:nvSpPr>
-          <p:cNvPr id="3" name="TextBox 2"/>
-          <p:cNvSpPr txBox="1"/>
-          <p:nvPr/>
-        </p:nvSpPr>
-        <p:spPr>
-          <a:xfrm>
-            <a:off x="822960" y="749808"/>
-            <a:ext cx="10607040" cy="640080"/>
-          </a:xfrm>
-          <a:prstGeom prst="rect">
-            <a:avLst/>
-          </a:prstGeom>
-          <a:noFill/>
-        </p:spPr>
-        <p:txBody>
-          <a:bodyPr wrap="square">
-            <a:spAutoFit/>
-          </a:bodyPr>
-          <a:lstStyle/>
-          <a:p>
-            <a:pPr algn="l">
-              <a:lnSpc>
-                <a:spcPct val="115000"/>
-              </a:lnSpc>
-            </a:pPr>
-            <a:r>
-              <a:rPr sz="3000" b="1">
-                <a:solidFill>
-                  <a:srgbClr val="1F2937"/>
-                </a:solidFill>
-                <a:latin typeface="微软雅黑"/>
-              </a:rPr>
-              <a:t>今天离场前，希望能拿到两个答案</a:t>
-            </a:r>
-          </a:p>
-        </p:txBody>
-      </p:sp>
-      <p:cxnSp>
-        <p:nvCxnSpPr>
-          <p:cNvPr id="4" name="Connector 3"/>
-          <p:cNvCxnSpPr/>
-          <p:nvPr/>
-        </p:nvCxnSpPr>
-        <p:spPr>
-          <a:xfrm>
-            <a:off x="822960" y="1481328"/>
-            <a:ext cx="10543032" cy="0"/>
-          </a:xfrm>
-          <a:prstGeom prst="line">
-            <a:avLst/>
-          </a:prstGeom>
-          <a:ln w="11430">
-            <a:solidFill>
-              <a:srgbClr val="D8DEE6"/>
-            </a:solidFill>
-          </a:ln>
-        </p:spPr>
-        <p:style>
-          <a:lnRef idx="2">
-            <a:schemeClr val="accent1"/>
-          </a:lnRef>
-          <a:fillRef idx="0">
-            <a:schemeClr val="accent1"/>
-          </a:fillRef>
-          <a:effectRef idx="1">
-            <a:schemeClr val="accent1"/>
-          </a:effectRef>
-          <a:fontRef idx="minor">
-            <a:schemeClr val="tx1"/>
-          </a:fontRef>
-        </p:style>
-      </p:cxnSp>
-      <p:sp>
-        <p:nvSpPr>
-          <p:cNvPr id="5" name="TextBox 4"/>
-          <p:cNvSpPr txBox="1"/>
-          <p:nvPr/>
-        </p:nvSpPr>
-        <p:spPr>
-          <a:xfrm>
-            <a:off x="11292840" y="6355080"/>
-            <a:ext cx="548640" cy="274320"/>
-          </a:xfrm>
-          <a:prstGeom prst="rect">
-            <a:avLst/>
-          </a:prstGeom>
-          <a:noFill/>
-        </p:spPr>
-        <p:txBody>
-          <a:bodyPr wrap="square">
-            <a:spAutoFit/>
-          </a:bodyPr>
-          <a:lstStyle/>
-          <a:p>
-            <a:pPr algn="r">
-              <a:lnSpc>
-                <a:spcPct val="115000"/>
-              </a:lnSpc>
-            </a:pPr>
-            <a:r>
-              <a:rPr sz="1000" b="0">
-                <a:solidFill>
-                  <a:srgbClr val="6B7280"/>
-                </a:solidFill>
-                <a:latin typeface="微软雅黑"/>
-              </a:rPr>
-              <a:t>14</a:t>
-            </a:r>
-          </a:p>
-        </p:txBody>
-      </p:sp>
-      <p:sp>
-        <p:nvSpPr>
-          <p:cNvPr id="6" name="TextBox 5"/>
-          <p:cNvSpPr txBox="1"/>
-          <p:nvPr/>
-        </p:nvSpPr>
-        <p:spPr>
-          <a:xfrm>
-            <a:off x="822960" y="6355080"/>
-            <a:ext cx="5486400" cy="274320"/>
-          </a:xfrm>
-          <a:prstGeom prst="rect">
-            <a:avLst/>
-          </a:prstGeom>
-          <a:noFill/>
-        </p:spPr>
-        <p:txBody>
-          <a:bodyPr wrap="square">
-            <a:spAutoFit/>
-          </a:bodyPr>
-          <a:lstStyle/>
-          <a:p>
-            <a:pPr algn="l">
-              <a:lnSpc>
-                <a:spcPct val="115000"/>
-              </a:lnSpc>
-            </a:pPr>
-            <a:r>
-              <a:rPr sz="1000" b="0">
-                <a:solidFill>
-                  <a:srgbClr val="6B7280"/>
-                </a:solidFill>
-                <a:latin typeface="微软雅黑"/>
-              </a:rPr>
-              <a:t>Menduner · ENT303TC 第 14 组</a:t>
-            </a:r>
-          </a:p>
-        </p:txBody>
-      </p:sp>
-      <p:sp>
-        <p:nvSpPr>
-          <p:cNvPr id="7" name="TextBox 6"/>
-          <p:cNvSpPr txBox="1"/>
-          <p:nvPr/>
-        </p:nvSpPr>
-        <p:spPr>
-          <a:xfrm>
-            <a:off x="868680" y="2011680"/>
-            <a:ext cx="274320" cy="365760"/>
-          </a:xfrm>
-          <a:prstGeom prst="rect">
-            <a:avLst/>
-          </a:prstGeom>
-          <a:noFill/>
-        </p:spPr>
-        <p:txBody>
-          <a:bodyPr wrap="square">
-            <a:spAutoFit/>
-          </a:bodyPr>
-          <a:lstStyle/>
-          <a:p>
-            <a:pPr algn="l">
-              <a:lnSpc>
-                <a:spcPct val="115000"/>
-              </a:lnSpc>
-            </a:pPr>
-            <a:r>
-              <a:rPr sz="2100" b="0">
-                <a:solidFill>
-                  <a:srgbClr val="1D4ED8"/>
-                </a:solidFill>
-                <a:latin typeface="微软雅黑"/>
-              </a:rPr>
-              <a:t>· </a:t>
-            </a:r>
-          </a:p>
-        </p:txBody>
-      </p:sp>
-      <p:sp>
-        <p:nvSpPr>
-          <p:cNvPr id="8" name="TextBox 7"/>
-          <p:cNvSpPr txBox="1"/>
-          <p:nvPr/>
-        </p:nvSpPr>
-        <p:spPr>
-          <a:xfrm>
-            <a:off x="1179576" y="2011680"/>
-            <a:ext cx="10021824" cy="457200"/>
-          </a:xfrm>
-          <a:prstGeom prst="rect">
-            <a:avLst/>
-          </a:prstGeom>
-          <a:noFill/>
-        </p:spPr>
-        <p:txBody>
-          <a:bodyPr wrap="square">
-            <a:spAutoFit/>
-          </a:bodyPr>
-          <a:lstStyle/>
-          <a:p>
-            <a:pPr algn="l">
-              <a:lnSpc>
-                <a:spcPct val="115000"/>
-              </a:lnSpc>
-            </a:pPr>
-            <a:r>
-              <a:rPr sz="2100" b="0">
-                <a:solidFill>
-                  <a:srgbClr val="1F2937"/>
-                </a:solidFill>
-                <a:latin typeface="微软雅黑"/>
-              </a:rPr>
-              <a:t>先找哪个岗位、先解决哪一个具体问题？</a:t>
-            </a:r>
-          </a:p>
-        </p:txBody>
-      </p:sp>
-      <p:sp>
-        <p:nvSpPr>
-          <p:cNvPr id="9" name="TextBox 8"/>
-          <p:cNvSpPr txBox="1"/>
-          <p:nvPr/>
-        </p:nvSpPr>
-        <p:spPr>
-          <a:xfrm>
-            <a:off x="868680" y="2880360"/>
-            <a:ext cx="274320" cy="365760"/>
-          </a:xfrm>
-          <a:prstGeom prst="rect">
-            <a:avLst/>
-          </a:prstGeom>
-          <a:noFill/>
-        </p:spPr>
-        <p:txBody>
-          <a:bodyPr wrap="square">
-            <a:spAutoFit/>
-          </a:bodyPr>
-          <a:lstStyle/>
-          <a:p>
-            <a:pPr algn="l">
-              <a:lnSpc>
-                <a:spcPct val="115000"/>
-              </a:lnSpc>
-            </a:pPr>
-            <a:r>
-              <a:rPr sz="2100" b="0">
-                <a:solidFill>
-                  <a:srgbClr val="1D4ED8"/>
-                </a:solidFill>
-                <a:latin typeface="微软雅黑"/>
-              </a:rPr>
-              <a:t>· </a:t>
-            </a:r>
-          </a:p>
-        </p:txBody>
-      </p:sp>
-      <p:sp>
-        <p:nvSpPr>
-          <p:cNvPr id="10" name="TextBox 9"/>
-          <p:cNvSpPr txBox="1"/>
-          <p:nvPr/>
-        </p:nvSpPr>
-        <p:spPr>
-          <a:xfrm>
-            <a:off x="1179576" y="2880360"/>
-            <a:ext cx="10021824" cy="457200"/>
-          </a:xfrm>
-          <a:prstGeom prst="rect">
-            <a:avLst/>
-          </a:prstGeom>
-          <a:noFill/>
-        </p:spPr>
-        <p:txBody>
-          <a:bodyPr wrap="square">
-            <a:spAutoFit/>
-          </a:bodyPr>
-          <a:lstStyle/>
-          <a:p>
-            <a:pPr algn="l">
-              <a:lnSpc>
-                <a:spcPct val="115000"/>
-              </a:lnSpc>
-            </a:pPr>
-            <a:r>
-              <a:rPr sz="2100" b="0">
-                <a:solidFill>
-                  <a:srgbClr val="1F2937"/>
-                </a:solidFill>
-                <a:latin typeface="微软雅黑"/>
-              </a:rPr>
-              <a:t>下一步由谁在什么时候给我们一次反馈（哪怕是微信一句话）？</a:t>
-            </a:r>
-          </a:p>
-        </p:txBody>
-      </p:sp>
-      <p:sp>
-        <p:nvSpPr>
-          <p:cNvPr id="11" name="TextBox 10"/>
-          <p:cNvSpPr txBox="1"/>
-          <p:nvPr/>
-        </p:nvSpPr>
-        <p:spPr>
-          <a:xfrm>
-            <a:off x="868680" y="4343400"/>
-            <a:ext cx="10332720" cy="457200"/>
-          </a:xfrm>
-          <a:prstGeom prst="rect">
-            <a:avLst/>
-          </a:prstGeom>
-          <a:noFill/>
-        </p:spPr>
-        <p:txBody>
-          <a:bodyPr wrap="square">
-            <a:spAutoFit/>
-          </a:bodyPr>
-          <a:lstStyle/>
-          <a:p>
-            <a:pPr algn="l">
-              <a:lnSpc>
-                <a:spcPct val="115000"/>
-              </a:lnSpc>
-            </a:pPr>
-            <a:r>
-              <a:rPr sz="1700" b="0">
-                <a:solidFill>
-                  <a:srgbClr val="1D4ED8"/>
-                </a:solidFill>
-                <a:latin typeface="微软雅黑"/>
-              </a:rPr>
-              <a:t>如果只能给一个建议：您觉得我们最该先验证的方向是哪个？</a:t>
-            </a:r>
-          </a:p>
-        </p:txBody>
-      </p:sp>
-    </p:spTree>
-  </p:cSld>
-  <p:clrMapOvr>
-    <a:masterClrMapping/>
-  </p:clrMapOvr>
-</p:sld>
-</file>
-
-<file path=ppt/slides/slide15.xml><?xml version="1.0" encoding="utf-8"?>
 <p:sld xmlns:a="http://schemas.openxmlformats.org/drawingml/2006/main" xmlns:p="http://schemas.openxmlformats.org/presentationml/2006/main" xmlns:r="http://schemas.openxmlformats.org/officeDocument/2006/relationships">
   <p:cSld>
     <p:spTree>
@@ -6252,7 +3588,7 @@
                 </a:solidFill>
                 <a:latin typeface="微软雅黑"/>
               </a:rPr>
-              <a:t>交流目标</a:t>
+              <a:t>产品定位</a:t>
             </a:r>
           </a:p>
         </p:txBody>
@@ -6285,13 +3621,13 @@
               </a:lnSpc>
             </a:pPr>
             <a:r>
-              <a:rPr sz="3000" b="1">
+              <a:rPr sz="2500" b="1">
                 <a:solidFill>
                   <a:srgbClr val="1F2937"/>
                 </a:solidFill>
                 <a:latin typeface="微软雅黑"/>
               </a:rPr>
-              <a:t>今天我们主要不是来展示软件</a:t>
+              <a:t>Menduner 是什么：一个可追溯的城市活动工作流</a:t>
             </a:r>
           </a:p>
         </p:txBody>
@@ -6409,269 +3745,94 @@
           </a:p>
         </p:txBody>
       </p:sp>
-      <p:graphicFrame>
-        <p:nvGraphicFramePr>
-          <p:cNvPr id="7" name="Table 6"/>
-          <p:cNvGraphicFramePr>
-            <a:graphicFrameLocks noGrp="1"/>
-          </p:cNvGraphicFramePr>
-          <p:nvPr/>
-        </p:nvGraphicFramePr>
-        <p:xfrm>
-          <a:off x="868680" y="1874519"/>
-          <a:ext cx="10332720" cy="2048256"/>
-        </p:xfrm>
-        <a:graphic>
-          <a:graphicData uri="http://schemas.openxmlformats.org/drawingml/2006/table">
-            <a:tbl>
-              <a:tblPr firstRow="0" bandRow="0">
-                <a:tableStyleId>{2D5ABB26-0587-4C30-8999-92F81FD0307C}</a:tableStyleId>
-              </a:tblPr>
-              <a:tblGrid>
-                <a:gridCol w="2011680"/>
-                <a:gridCol w="8321040"/>
-              </a:tblGrid>
-              <a:tr h="512064">
-                <a:tc>
-                  <a:txBody>
-                    <a:bodyPr/>
-                    <a:lstStyle/>
-                    <a:p>
-                      <a:pPr>
-                        <a:lnSpc>
-                          <a:spcPct val="105000"/>
-                        </a:lnSpc>
-                      </a:pPr>
-                      <a:r>
-                        <a:rPr sz="1000" b="1">
-                          <a:solidFill>
-                            <a:srgbClr val="6B7280"/>
-                          </a:solidFill>
-                          <a:latin typeface="微软雅黑"/>
-                        </a:rPr>
-                        <a:t>时间分配</a:t>
-                      </a:r>
-                    </a:p>
-                  </a:txBody>
-                  <a:tcPr marL="73152" marR="73152" marT="27432" marB="27432" anchor="ctr"/>
-                </a:tc>
-                <a:tc>
-                  <a:txBody>
-                    <a:bodyPr/>
-                    <a:lstStyle/>
-                    <a:p>
-                      <a:pPr>
-                        <a:lnSpc>
-                          <a:spcPct val="105000"/>
-                        </a:lnSpc>
-                      </a:pPr>
-                      <a:r>
-                        <a:rPr sz="1000" b="1">
-                          <a:solidFill>
-                            <a:srgbClr val="6B7280"/>
-                          </a:solidFill>
-                          <a:latin typeface="微软雅黑"/>
-                        </a:rPr>
-                        <a:t>我们想做的事</a:t>
-                      </a:r>
-                    </a:p>
-                  </a:txBody>
-                  <a:tcPr marL="73152" marR="73152" marT="27432" marB="27432" anchor="ctr"/>
-                </a:tc>
-              </a:tr>
-              <a:tr h="512064">
-                <a:tc>
-                  <a:txBody>
-                    <a:bodyPr/>
-                    <a:lstStyle/>
-                    <a:p>
-                      <a:pPr>
-                        <a:lnSpc>
-                          <a:spcPct val="105000"/>
-                        </a:lnSpc>
-                      </a:pPr>
-                      <a:r>
-                        <a:rPr sz="1150" b="0">
-                          <a:solidFill>
-                            <a:srgbClr val="1F2937"/>
-                          </a:solidFill>
-                          <a:latin typeface="微软雅黑"/>
-                        </a:rPr>
-                        <a:t>30%</a:t>
-                      </a:r>
-                    </a:p>
-                  </a:txBody>
-                  <a:tcPr marL="73152" marR="73152" marT="27432" marB="27432" anchor="ctr"/>
-                </a:tc>
-                <a:tc>
-                  <a:txBody>
-                    <a:bodyPr/>
-                    <a:lstStyle/>
-                    <a:p>
-                      <a:pPr>
-                        <a:lnSpc>
-                          <a:spcPct val="105000"/>
-                        </a:lnSpc>
-                      </a:pPr>
-                      <a:r>
-                        <a:rPr sz="1150" b="0">
-                          <a:solidFill>
-                            <a:srgbClr val="1F2937"/>
-                          </a:solidFill>
-                          <a:latin typeface="微软雅黑"/>
-                        </a:rPr>
-                        <a:t>汇报已经做出来的东西（只说真实上线的）</a:t>
-                      </a:r>
-                    </a:p>
-                  </a:txBody>
-                  <a:tcPr marL="73152" marR="73152" marT="27432" marB="27432" anchor="ctr"/>
-                </a:tc>
-              </a:tr>
-              <a:tr h="512064">
-                <a:tc>
-                  <a:txBody>
-                    <a:bodyPr/>
-                    <a:lstStyle/>
-                    <a:p>
-                      <a:pPr>
-                        <a:lnSpc>
-                          <a:spcPct val="105000"/>
-                        </a:lnSpc>
-                      </a:pPr>
-                      <a:r>
-                        <a:rPr sz="1150" b="0">
-                          <a:solidFill>
-                            <a:srgbClr val="1F2937"/>
-                          </a:solidFill>
-                          <a:latin typeface="微软雅黑"/>
-                        </a:rPr>
-                        <a:t>40%</a:t>
-                      </a:r>
-                    </a:p>
-                  </a:txBody>
-                  <a:tcPr marL="73152" marR="73152" marT="27432" marB="27432" anchor="ctr"/>
-                </a:tc>
-                <a:tc>
-                  <a:txBody>
-                    <a:bodyPr/>
-                    <a:lstStyle/>
-                    <a:p>
-                      <a:pPr>
-                        <a:lnSpc>
-                          <a:spcPct val="105000"/>
-                        </a:lnSpc>
-                      </a:pPr>
-                      <a:r>
-                        <a:rPr sz="1150" b="0">
-                          <a:solidFill>
-                            <a:srgbClr val="1F2937"/>
-                          </a:solidFill>
-                          <a:latin typeface="微软雅黑"/>
-                        </a:rPr>
-                        <a:t>请您讲酒店实际怎么获取和使用活动信息</a:t>
-                      </a:r>
-                    </a:p>
-                  </a:txBody>
-                  <a:tcPr marL="73152" marR="73152" marT="27432" marB="27432" anchor="ctr"/>
-                </a:tc>
-              </a:tr>
-              <a:tr h="512064">
-                <a:tc>
-                  <a:txBody>
-                    <a:bodyPr/>
-                    <a:lstStyle/>
-                    <a:p>
-                      <a:pPr>
-                        <a:lnSpc>
-                          <a:spcPct val="105000"/>
-                        </a:lnSpc>
-                      </a:pPr>
-                      <a:r>
-                        <a:rPr sz="1150" b="0">
-                          <a:solidFill>
-                            <a:srgbClr val="1F2937"/>
-                          </a:solidFill>
-                          <a:latin typeface="微软雅黑"/>
-                        </a:rPr>
-                        <a:t>30%</a:t>
-                      </a:r>
-                    </a:p>
-                  </a:txBody>
-                  <a:tcPr marL="73152" marR="73152" marT="27432" marB="27432" anchor="ctr"/>
-                </a:tc>
-                <a:tc>
-                  <a:txBody>
-                    <a:bodyPr/>
-                    <a:lstStyle/>
-                    <a:p>
-                      <a:pPr>
-                        <a:lnSpc>
-                          <a:spcPct val="105000"/>
-                        </a:lnSpc>
-                      </a:pPr>
-                      <a:r>
-                        <a:rPr sz="1150" b="0">
-                          <a:solidFill>
-                            <a:srgbClr val="1F2937"/>
-                          </a:solidFill>
-                          <a:latin typeface="微软雅黑"/>
-                        </a:rPr>
-                        <a:t>争取一个成本低、范围小的验证机会</a:t>
-                      </a:r>
-                    </a:p>
-                  </a:txBody>
-                  <a:tcPr marL="73152" marR="73152" marT="27432" marB="27432" anchor="ctr"/>
-                </a:tc>
-              </a:tr>
-            </a:tbl>
-          </a:graphicData>
-        </a:graphic>
-      </p:graphicFrame>
-      <p:cxnSp>
-        <p:nvCxnSpPr>
-          <p:cNvPr id="8" name="Connector 7"/>
-          <p:cNvCxnSpPr/>
-          <p:nvPr/>
-        </p:nvCxnSpPr>
+      <p:sp>
+        <p:nvSpPr>
+          <p:cNvPr id="7" name="TextBox 6"/>
+          <p:cNvSpPr txBox="1"/>
+          <p:nvPr/>
+        </p:nvSpPr>
+        <p:spPr>
+          <a:xfrm>
+            <a:off x="868680" y="1783080"/>
+            <a:ext cx="274320" cy="365760"/>
+          </a:xfrm>
+          <a:prstGeom prst="rect">
+            <a:avLst/>
+          </a:prstGeom>
+          <a:noFill/>
+        </p:spPr>
+        <p:txBody>
+          <a:bodyPr wrap="square">
+            <a:spAutoFit/>
+          </a:bodyPr>
+          <a:lstStyle/>
+          <a:p>
+            <a:pPr algn="l">
+              <a:lnSpc>
+                <a:spcPct val="115000"/>
+              </a:lnSpc>
+            </a:pPr>
+            <a:r>
+              <a:rPr sz="1700" b="0">
+                <a:solidFill>
+                  <a:srgbClr val="1D4ED8"/>
+                </a:solidFill>
+                <a:latin typeface="微软雅黑"/>
+              </a:rPr>
+              <a:t>· </a:t>
+            </a:r>
+          </a:p>
+        </p:txBody>
+      </p:sp>
+      <p:sp>
+        <p:nvSpPr>
+          <p:cNvPr id="8" name="TextBox 7"/>
+          <p:cNvSpPr txBox="1"/>
+          <p:nvPr/>
+        </p:nvSpPr>
+        <p:spPr>
+          <a:xfrm>
+            <a:off x="1179576" y="1783080"/>
+            <a:ext cx="10021824" cy="457200"/>
+          </a:xfrm>
+          <a:prstGeom prst="rect">
+            <a:avLst/>
+          </a:prstGeom>
+          <a:noFill/>
+        </p:spPr>
+        <p:txBody>
+          <a:bodyPr wrap="square">
+            <a:spAutoFit/>
+          </a:bodyPr>
+          <a:lstStyle/>
+          <a:p>
+            <a:pPr algn="l">
+              <a:lnSpc>
+                <a:spcPct val="115000"/>
+              </a:lnSpc>
+            </a:pPr>
+            <a:r>
+              <a:rPr sz="1700" b="0">
+                <a:solidFill>
+                  <a:srgbClr val="1F2937"/>
+                </a:solidFill>
+                <a:latin typeface="微软雅黑"/>
+              </a:rPr>
+              <a:t>采集城市公开活动 → 去重 → 关联场馆与地区 → 判断对哪家酒店有用 → 形成跟进清单与周报</a:t>
+            </a:r>
+          </a:p>
+        </p:txBody>
+      </p:sp>
+      <p:sp>
+        <p:nvSpPr>
+          <p:cNvPr id="9" name="TextBox 8"/>
+          <p:cNvSpPr txBox="1"/>
+          <p:nvPr/>
+        </p:nvSpPr>
         <p:spPr>
           <a:xfrm>
             <a:off x="868680" y="2386584"/>
-            <a:ext cx="10332720" cy="0"/>
-          </a:xfrm>
-          <a:prstGeom prst="line">
-            <a:avLst/>
-          </a:prstGeom>
-          <a:ln w="11430">
-            <a:solidFill>
-              <a:srgbClr val="D8DEE6"/>
-            </a:solidFill>
-          </a:ln>
-        </p:spPr>
-        <p:style>
-          <a:lnRef idx="2">
-            <a:schemeClr val="accent1"/>
-          </a:lnRef>
-          <a:fillRef idx="0">
-            <a:schemeClr val="accent1"/>
-          </a:fillRef>
-          <a:effectRef idx="1">
-            <a:schemeClr val="accent1"/>
-          </a:effectRef>
-          <a:fontRef idx="minor">
-            <a:schemeClr val="tx1"/>
-          </a:fontRef>
-        </p:style>
-      </p:cxnSp>
-      <p:sp>
-        <p:nvSpPr>
-          <p:cNvPr id="9" name="TextBox 8"/>
-          <p:cNvSpPr txBox="1"/>
-          <p:nvPr/>
-        </p:nvSpPr>
-        <p:spPr>
-          <a:xfrm>
-            <a:off x="868680" y="4480560"/>
-            <a:ext cx="10332720" cy="457200"/>
+            <a:ext cx="274320" cy="365760"/>
           </a:xfrm>
           <a:prstGeom prst="rect">
             <a:avLst/>
@@ -6690,13 +3851,676 @@
               </a:lnSpc>
             </a:pPr>
             <a:r>
-              <a:rPr sz="1600" b="0">
+              <a:rPr sz="1700" b="0">
+                <a:solidFill>
+                  <a:srgbClr val="1D4ED8"/>
+                </a:solidFill>
+                <a:latin typeface="微软雅黑"/>
+              </a:rPr>
+              <a:t>· </a:t>
+            </a:r>
+          </a:p>
+        </p:txBody>
+      </p:sp>
+      <p:sp>
+        <p:nvSpPr>
+          <p:cNvPr id="10" name="TextBox 9"/>
+          <p:cNvSpPr txBox="1"/>
+          <p:nvPr/>
+        </p:nvSpPr>
+        <p:spPr>
+          <a:xfrm>
+            <a:off x="1179576" y="2386584"/>
+            <a:ext cx="10021824" cy="457200"/>
+          </a:xfrm>
+          <a:prstGeom prst="rect">
+            <a:avLst/>
+          </a:prstGeom>
+          <a:noFill/>
+        </p:spPr>
+        <p:txBody>
+          <a:bodyPr wrap="square">
+            <a:spAutoFit/>
+          </a:bodyPr>
+          <a:lstStyle/>
+          <a:p>
+            <a:pPr algn="l">
+              <a:lnSpc>
+                <a:spcPct val="115000"/>
+              </a:lnSpc>
+            </a:pPr>
+            <a:r>
+              <a:rPr sz="1700" b="0">
+                <a:solidFill>
+                  <a:srgbClr val="1F2937"/>
+                </a:solidFill>
+                <a:latin typeface="微软雅黑"/>
+              </a:rPr>
+              <a:t>每个数字都能点回来源；说不清的字段标「待补充」，不猜</a:t>
+            </a:r>
+          </a:p>
+        </p:txBody>
+      </p:sp>
+      <p:sp>
+        <p:nvSpPr>
+          <p:cNvPr id="11" name="TextBox 10"/>
+          <p:cNvSpPr txBox="1"/>
+          <p:nvPr/>
+        </p:nvSpPr>
+        <p:spPr>
+          <a:xfrm>
+            <a:off x="868680" y="2990088"/>
+            <a:ext cx="274320" cy="365760"/>
+          </a:xfrm>
+          <a:prstGeom prst="rect">
+            <a:avLst/>
+          </a:prstGeom>
+          <a:noFill/>
+        </p:spPr>
+        <p:txBody>
+          <a:bodyPr wrap="square">
+            <a:spAutoFit/>
+          </a:bodyPr>
+          <a:lstStyle/>
+          <a:p>
+            <a:pPr algn="l">
+              <a:lnSpc>
+                <a:spcPct val="115000"/>
+              </a:lnSpc>
+            </a:pPr>
+            <a:r>
+              <a:rPr sz="1700" b="0">
+                <a:solidFill>
+                  <a:srgbClr val="1D4ED8"/>
+                </a:solidFill>
+                <a:latin typeface="微软雅黑"/>
+              </a:rPr>
+              <a:t>· </a:t>
+            </a:r>
+          </a:p>
+        </p:txBody>
+      </p:sp>
+      <p:sp>
+        <p:nvSpPr>
+          <p:cNvPr id="12" name="TextBox 11"/>
+          <p:cNvSpPr txBox="1"/>
+          <p:nvPr/>
+        </p:nvSpPr>
+        <p:spPr>
+          <a:xfrm>
+            <a:off x="1179576" y="2990088"/>
+            <a:ext cx="10021824" cy="457200"/>
+          </a:xfrm>
+          <a:prstGeom prst="rect">
+            <a:avLst/>
+          </a:prstGeom>
+          <a:noFill/>
+        </p:spPr>
+        <p:txBody>
+          <a:bodyPr wrap="square">
+            <a:spAutoFit/>
+          </a:bodyPr>
+          <a:lstStyle/>
+          <a:p>
+            <a:pPr algn="l">
+              <a:lnSpc>
+                <a:spcPct val="115000"/>
+              </a:lnSpc>
+            </a:pPr>
+            <a:r>
+              <a:rPr sz="1700" b="0">
+                <a:solidFill>
+                  <a:srgbClr val="1F2937"/>
+                </a:solidFill>
+                <a:latin typeface="微软雅黑"/>
+              </a:rPr>
+              <a:t>面向酒店市场/销售/收益岗位的日常信息整理，不替代任何收益系统</a:t>
+            </a:r>
+          </a:p>
+        </p:txBody>
+      </p:sp>
+      <p:sp>
+        <p:nvSpPr>
+          <p:cNvPr id="13" name="TextBox 12"/>
+          <p:cNvSpPr txBox="1"/>
+          <p:nvPr/>
+        </p:nvSpPr>
+        <p:spPr>
+          <a:xfrm>
+            <a:off x="868680" y="4160520"/>
+            <a:ext cx="1645920" cy="548640"/>
+          </a:xfrm>
+          <a:prstGeom prst="rect">
+            <a:avLst/>
+          </a:prstGeom>
+          <a:noFill/>
+        </p:spPr>
+        <p:txBody>
+          <a:bodyPr wrap="square">
+            <a:spAutoFit/>
+          </a:bodyPr>
+          <a:lstStyle/>
+          <a:p>
+            <a:pPr algn="l">
+              <a:lnSpc>
+                <a:spcPct val="115000"/>
+              </a:lnSpc>
+            </a:pPr>
+            <a:r>
+              <a:rPr sz="3000" b="1">
+                <a:solidFill>
+                  <a:srgbClr val="1F2937"/>
+                </a:solidFill>
+                <a:latin typeface="微软雅黑"/>
+              </a:rPr>
+              <a:t>436</a:t>
+            </a:r>
+          </a:p>
+        </p:txBody>
+      </p:sp>
+      <p:sp>
+        <p:nvSpPr>
+          <p:cNvPr id="14" name="TextBox 13"/>
+          <p:cNvSpPr txBox="1"/>
+          <p:nvPr/>
+        </p:nvSpPr>
+        <p:spPr>
+          <a:xfrm>
+            <a:off x="868680" y="4736592"/>
+            <a:ext cx="1645920" cy="320040"/>
+          </a:xfrm>
+          <a:prstGeom prst="rect">
+            <a:avLst/>
+          </a:prstGeom>
+          <a:noFill/>
+        </p:spPr>
+        <p:txBody>
+          <a:bodyPr wrap="square">
+            <a:spAutoFit/>
+          </a:bodyPr>
+          <a:lstStyle/>
+          <a:p>
+            <a:pPr algn="l">
+              <a:lnSpc>
+                <a:spcPct val="115000"/>
+              </a:lnSpc>
+            </a:pPr>
+            <a:r>
+              <a:rPr sz="1200" b="0">
                 <a:solidFill>
                   <a:srgbClr val="6B7280"/>
                 </a:solidFill>
                 <a:latin typeface="微软雅黑"/>
               </a:rPr>
-              <a:t>我们不谈采购，也不承诺提升收入。先把方向做对。</a:t>
+              <a:t>活动记录</a:t>
+            </a:r>
+          </a:p>
+        </p:txBody>
+      </p:sp>
+      <p:sp>
+        <p:nvSpPr>
+          <p:cNvPr id="15" name="TextBox 14"/>
+          <p:cNvSpPr txBox="1"/>
+          <p:nvPr/>
+        </p:nvSpPr>
+        <p:spPr>
+          <a:xfrm>
+            <a:off x="2606039" y="4160520"/>
+            <a:ext cx="1645920" cy="548640"/>
+          </a:xfrm>
+          <a:prstGeom prst="rect">
+            <a:avLst/>
+          </a:prstGeom>
+          <a:noFill/>
+        </p:spPr>
+        <p:txBody>
+          <a:bodyPr wrap="square">
+            <a:spAutoFit/>
+          </a:bodyPr>
+          <a:lstStyle/>
+          <a:p>
+            <a:pPr algn="l">
+              <a:lnSpc>
+                <a:spcPct val="115000"/>
+              </a:lnSpc>
+            </a:pPr>
+            <a:r>
+              <a:rPr sz="3000" b="1">
+                <a:solidFill>
+                  <a:srgbClr val="1F2937"/>
+                </a:solidFill>
+                <a:latin typeface="微软雅黑"/>
+              </a:rPr>
+              <a:t>416</a:t>
+            </a:r>
+          </a:p>
+        </p:txBody>
+      </p:sp>
+      <p:sp>
+        <p:nvSpPr>
+          <p:cNvPr id="16" name="TextBox 15"/>
+          <p:cNvSpPr txBox="1"/>
+          <p:nvPr/>
+        </p:nvSpPr>
+        <p:spPr>
+          <a:xfrm>
+            <a:off x="2606039" y="4736592"/>
+            <a:ext cx="1645920" cy="320040"/>
+          </a:xfrm>
+          <a:prstGeom prst="rect">
+            <a:avLst/>
+          </a:prstGeom>
+          <a:noFill/>
+        </p:spPr>
+        <p:txBody>
+          <a:bodyPr wrap="square">
+            <a:spAutoFit/>
+          </a:bodyPr>
+          <a:lstStyle/>
+          <a:p>
+            <a:pPr algn="l">
+              <a:lnSpc>
+                <a:spcPct val="115000"/>
+              </a:lnSpc>
+            </a:pPr>
+            <a:r>
+              <a:rPr sz="1200" b="0">
+                <a:solidFill>
+                  <a:srgbClr val="6B7280"/>
+                </a:solidFill>
+                <a:latin typeface="微软雅黑"/>
+              </a:rPr>
+              <a:t>去重后身份</a:t>
+            </a:r>
+          </a:p>
+        </p:txBody>
+      </p:sp>
+      <p:sp>
+        <p:nvSpPr>
+          <p:cNvPr id="17" name="TextBox 16"/>
+          <p:cNvSpPr txBox="1"/>
+          <p:nvPr/>
+        </p:nvSpPr>
+        <p:spPr>
+          <a:xfrm>
+            <a:off x="4343400" y="4160520"/>
+            <a:ext cx="1645920" cy="548640"/>
+          </a:xfrm>
+          <a:prstGeom prst="rect">
+            <a:avLst/>
+          </a:prstGeom>
+          <a:noFill/>
+        </p:spPr>
+        <p:txBody>
+          <a:bodyPr wrap="square">
+            <a:spAutoFit/>
+          </a:bodyPr>
+          <a:lstStyle/>
+          <a:p>
+            <a:pPr algn="l">
+              <a:lnSpc>
+                <a:spcPct val="115000"/>
+              </a:lnSpc>
+            </a:pPr>
+            <a:r>
+              <a:rPr sz="3000" b="1">
+                <a:solidFill>
+                  <a:srgbClr val="1F2937"/>
+                </a:solidFill>
+                <a:latin typeface="微软雅黑"/>
+              </a:rPr>
+              <a:t>135</a:t>
+            </a:r>
+          </a:p>
+        </p:txBody>
+      </p:sp>
+      <p:sp>
+        <p:nvSpPr>
+          <p:cNvPr id="18" name="TextBox 17"/>
+          <p:cNvSpPr txBox="1"/>
+          <p:nvPr/>
+        </p:nvSpPr>
+        <p:spPr>
+          <a:xfrm>
+            <a:off x="4343400" y="4736592"/>
+            <a:ext cx="1645920" cy="320040"/>
+          </a:xfrm>
+          <a:prstGeom prst="rect">
+            <a:avLst/>
+          </a:prstGeom>
+          <a:noFill/>
+        </p:spPr>
+        <p:txBody>
+          <a:bodyPr wrap="square">
+            <a:spAutoFit/>
+          </a:bodyPr>
+          <a:lstStyle/>
+          <a:p>
+            <a:pPr algn="l">
+              <a:lnSpc>
+                <a:spcPct val="115000"/>
+              </a:lnSpc>
+            </a:pPr>
+            <a:r>
+              <a:rPr sz="1200" b="0">
+                <a:solidFill>
+                  <a:srgbClr val="6B7280"/>
+                </a:solidFill>
+                <a:latin typeface="微软雅黑"/>
+              </a:rPr>
+              <a:t>场馆</a:t>
+            </a:r>
+          </a:p>
+        </p:txBody>
+      </p:sp>
+      <p:sp>
+        <p:nvSpPr>
+          <p:cNvPr id="19" name="TextBox 18"/>
+          <p:cNvSpPr txBox="1"/>
+          <p:nvPr/>
+        </p:nvSpPr>
+        <p:spPr>
+          <a:xfrm>
+            <a:off x="6080759" y="4160520"/>
+            <a:ext cx="1645920" cy="548640"/>
+          </a:xfrm>
+          <a:prstGeom prst="rect">
+            <a:avLst/>
+          </a:prstGeom>
+          <a:noFill/>
+        </p:spPr>
+        <p:txBody>
+          <a:bodyPr wrap="square">
+            <a:spAutoFit/>
+          </a:bodyPr>
+          <a:lstStyle/>
+          <a:p>
+            <a:pPr algn="l">
+              <a:lnSpc>
+                <a:spcPct val="115000"/>
+              </a:lnSpc>
+            </a:pPr>
+            <a:r>
+              <a:rPr sz="3000" b="1">
+                <a:solidFill>
+                  <a:srgbClr val="1F2937"/>
+                </a:solidFill>
+                <a:latin typeface="微软雅黑"/>
+              </a:rPr>
+              <a:t>19</a:t>
+            </a:r>
+          </a:p>
+        </p:txBody>
+      </p:sp>
+      <p:sp>
+        <p:nvSpPr>
+          <p:cNvPr id="20" name="TextBox 19"/>
+          <p:cNvSpPr txBox="1"/>
+          <p:nvPr/>
+        </p:nvSpPr>
+        <p:spPr>
+          <a:xfrm>
+            <a:off x="6080759" y="4736592"/>
+            <a:ext cx="1645920" cy="320040"/>
+          </a:xfrm>
+          <a:prstGeom prst="rect">
+            <a:avLst/>
+          </a:prstGeom>
+          <a:noFill/>
+        </p:spPr>
+        <p:txBody>
+          <a:bodyPr wrap="square">
+            <a:spAutoFit/>
+          </a:bodyPr>
+          <a:lstStyle/>
+          <a:p>
+            <a:pPr algn="l">
+              <a:lnSpc>
+                <a:spcPct val="115000"/>
+              </a:lnSpc>
+            </a:pPr>
+            <a:r>
+              <a:rPr sz="1200" b="0">
+                <a:solidFill>
+                  <a:srgbClr val="6B7280"/>
+                </a:solidFill>
+                <a:latin typeface="微软雅黑"/>
+              </a:rPr>
+              <a:t>酒店</a:t>
+            </a:r>
+          </a:p>
+        </p:txBody>
+      </p:sp>
+      <p:sp>
+        <p:nvSpPr>
+          <p:cNvPr id="21" name="TextBox 20"/>
+          <p:cNvSpPr txBox="1"/>
+          <p:nvPr/>
+        </p:nvSpPr>
+        <p:spPr>
+          <a:xfrm>
+            <a:off x="7818119" y="4160520"/>
+            <a:ext cx="1645920" cy="548640"/>
+          </a:xfrm>
+          <a:prstGeom prst="rect">
+            <a:avLst/>
+          </a:prstGeom>
+          <a:noFill/>
+        </p:spPr>
+        <p:txBody>
+          <a:bodyPr wrap="square">
+            <a:spAutoFit/>
+          </a:bodyPr>
+          <a:lstStyle/>
+          <a:p>
+            <a:pPr algn="l">
+              <a:lnSpc>
+                <a:spcPct val="115000"/>
+              </a:lnSpc>
+            </a:pPr>
+            <a:r>
+              <a:rPr sz="3000" b="1">
+                <a:solidFill>
+                  <a:srgbClr val="1F2937"/>
+                </a:solidFill>
+                <a:latin typeface="微软雅黑"/>
+              </a:rPr>
+              <a:t>17</a:t>
+            </a:r>
+          </a:p>
+        </p:txBody>
+      </p:sp>
+      <p:sp>
+        <p:nvSpPr>
+          <p:cNvPr id="22" name="TextBox 21"/>
+          <p:cNvSpPr txBox="1"/>
+          <p:nvPr/>
+        </p:nvSpPr>
+        <p:spPr>
+          <a:xfrm>
+            <a:off x="7818119" y="4736592"/>
+            <a:ext cx="1645920" cy="320040"/>
+          </a:xfrm>
+          <a:prstGeom prst="rect">
+            <a:avLst/>
+          </a:prstGeom>
+          <a:noFill/>
+        </p:spPr>
+        <p:txBody>
+          <a:bodyPr wrap="square">
+            <a:spAutoFit/>
+          </a:bodyPr>
+          <a:lstStyle/>
+          <a:p>
+            <a:pPr algn="l">
+              <a:lnSpc>
+                <a:spcPct val="115000"/>
+              </a:lnSpc>
+            </a:pPr>
+            <a:r>
+              <a:rPr sz="1200" b="0">
+                <a:solidFill>
+                  <a:srgbClr val="6B7280"/>
+                </a:solidFill>
+                <a:latin typeface="微软雅黑"/>
+              </a:rPr>
+              <a:t>公开来源</a:t>
+            </a:r>
+          </a:p>
+        </p:txBody>
+      </p:sp>
+      <p:sp>
+        <p:nvSpPr>
+          <p:cNvPr id="23" name="TextBox 22"/>
+          <p:cNvSpPr txBox="1"/>
+          <p:nvPr/>
+        </p:nvSpPr>
+        <p:spPr>
+          <a:xfrm>
+            <a:off x="9555480" y="4160520"/>
+            <a:ext cx="1645920" cy="548640"/>
+          </a:xfrm>
+          <a:prstGeom prst="rect">
+            <a:avLst/>
+          </a:prstGeom>
+          <a:noFill/>
+        </p:spPr>
+        <p:txBody>
+          <a:bodyPr wrap="square">
+            <a:spAutoFit/>
+          </a:bodyPr>
+          <a:lstStyle/>
+          <a:p>
+            <a:pPr algn="l">
+              <a:lnSpc>
+                <a:spcPct val="115000"/>
+              </a:lnSpc>
+            </a:pPr>
+            <a:r>
+              <a:rPr sz="3000" b="1">
+                <a:solidFill>
+                  <a:srgbClr val="1F2937"/>
+                </a:solidFill>
+                <a:latin typeface="微软雅黑"/>
+              </a:rPr>
+              <a:t>4463</a:t>
+            </a:r>
+          </a:p>
+        </p:txBody>
+      </p:sp>
+      <p:sp>
+        <p:nvSpPr>
+          <p:cNvPr id="24" name="TextBox 23"/>
+          <p:cNvSpPr txBox="1"/>
+          <p:nvPr/>
+        </p:nvSpPr>
+        <p:spPr>
+          <a:xfrm>
+            <a:off x="9555480" y="4736592"/>
+            <a:ext cx="1645920" cy="320040"/>
+          </a:xfrm>
+          <a:prstGeom prst="rect">
+            <a:avLst/>
+          </a:prstGeom>
+          <a:noFill/>
+        </p:spPr>
+        <p:txBody>
+          <a:bodyPr wrap="square">
+            <a:spAutoFit/>
+          </a:bodyPr>
+          <a:lstStyle/>
+          <a:p>
+            <a:pPr algn="l">
+              <a:lnSpc>
+                <a:spcPct val="115000"/>
+              </a:lnSpc>
+            </a:pPr>
+            <a:r>
+              <a:rPr sz="1200" b="0">
+                <a:solidFill>
+                  <a:srgbClr val="6B7280"/>
+                </a:solidFill>
+                <a:latin typeface="微软雅黑"/>
+              </a:rPr>
+              <a:t>字段证据</a:t>
+            </a:r>
+          </a:p>
+        </p:txBody>
+      </p:sp>
+      <p:sp>
+        <p:nvSpPr>
+          <p:cNvPr id="25" name="TextBox 24"/>
+          <p:cNvSpPr txBox="1"/>
+          <p:nvPr/>
+        </p:nvSpPr>
+        <p:spPr>
+          <a:xfrm>
+            <a:off x="868680" y="5102352"/>
+            <a:ext cx="10332720" cy="365760"/>
+          </a:xfrm>
+          <a:prstGeom prst="rect">
+            <a:avLst/>
+          </a:prstGeom>
+          <a:noFill/>
+        </p:spPr>
+        <p:txBody>
+          <a:bodyPr wrap="square">
+            <a:spAutoFit/>
+          </a:bodyPr>
+          <a:lstStyle/>
+          <a:p>
+            <a:pPr algn="l">
+              <a:lnSpc>
+                <a:spcPct val="115000"/>
+              </a:lnSpc>
+            </a:pPr>
+            <a:r>
+              <a:rPr sz="1300" b="0">
+                <a:solidFill>
+                  <a:srgbClr val="6B7280"/>
+                </a:solidFill>
+                <a:latin typeface="微软雅黑"/>
+              </a:rPr>
+              <a:t>数据为 2026-10-26 生产环境实测；太仓市直接归属活动 16 条 —— 这是样本，不是全覆盖。</a:t>
+            </a:r>
+          </a:p>
+        </p:txBody>
+      </p:sp>
+      <p:sp>
+        <p:nvSpPr>
+          <p:cNvPr id="26" name="TextBox 25"/>
+          <p:cNvSpPr txBox="1"/>
+          <p:nvPr/>
+        </p:nvSpPr>
+        <p:spPr>
+          <a:xfrm>
+            <a:off x="868680" y="5632704"/>
+            <a:ext cx="10332720" cy="365760"/>
+          </a:xfrm>
+          <a:prstGeom prst="rect">
+            <a:avLst/>
+          </a:prstGeom>
+          <a:noFill/>
+        </p:spPr>
+        <p:txBody>
+          <a:bodyPr wrap="square">
+            <a:spAutoFit/>
+          </a:bodyPr>
+          <a:lstStyle/>
+          <a:p>
+            <a:pPr algn="l">
+              <a:lnSpc>
+                <a:spcPct val="115000"/>
+              </a:lnSpc>
+            </a:pPr>
+            <a:r>
+              <a:rPr sz="1400" b="0">
+                <a:solidFill>
+                  <a:srgbClr val="1D4ED8"/>
+                </a:solidFill>
+                <a:latin typeface="微软雅黑"/>
+              </a:rPr>
+              <a:t>明确不做：需求预测与房价建议 · 替代酒店 RMS · 承诺 RevPAR/ADR · 把参数情景说成真实收入</a:t>
             </a:r>
           </a:p>
         </p:txBody>
@@ -6753,7 +4577,7 @@
                 </a:solidFill>
                 <a:latin typeface="微软雅黑"/>
               </a:rPr>
-              <a:t>产品定位</a:t>
+              <a:t>数据基础</a:t>
             </a:r>
           </a:p>
         </p:txBody>
@@ -6786,13 +4610,13 @@
               </a:lnSpc>
             </a:pPr>
             <a:r>
-              <a:rPr sz="2500" b="1">
+              <a:rPr sz="3000" b="1">
                 <a:solidFill>
                   <a:srgbClr val="1F2937"/>
                 </a:solidFill>
                 <a:latin typeface="微软雅黑"/>
               </a:rPr>
-              <a:t>Menduner 是什么：一个可追溯的城市活动工作流</a:t>
+              <a:t>数据为什么可信：来源、证据、状态三件事</a:t>
             </a:r>
           </a:p>
         </p:txBody>
@@ -6867,956 +4691,6 @@
                 <a:latin typeface="微软雅黑"/>
               </a:rPr>
               <a:t>3</a:t>
-            </a:r>
-          </a:p>
-        </p:txBody>
-      </p:sp>
-      <p:sp>
-        <p:nvSpPr>
-          <p:cNvPr id="6" name="TextBox 5"/>
-          <p:cNvSpPr txBox="1"/>
-          <p:nvPr/>
-        </p:nvSpPr>
-        <p:spPr>
-          <a:xfrm>
-            <a:off x="822960" y="6355080"/>
-            <a:ext cx="5486400" cy="274320"/>
-          </a:xfrm>
-          <a:prstGeom prst="rect">
-            <a:avLst/>
-          </a:prstGeom>
-          <a:noFill/>
-        </p:spPr>
-        <p:txBody>
-          <a:bodyPr wrap="square">
-            <a:spAutoFit/>
-          </a:bodyPr>
-          <a:lstStyle/>
-          <a:p>
-            <a:pPr algn="l">
-              <a:lnSpc>
-                <a:spcPct val="115000"/>
-              </a:lnSpc>
-            </a:pPr>
-            <a:r>
-              <a:rPr sz="1000" b="0">
-                <a:solidFill>
-                  <a:srgbClr val="6B7280"/>
-                </a:solidFill>
-                <a:latin typeface="微软雅黑"/>
-              </a:rPr>
-              <a:t>Menduner · ENT303TC 第 14 组</a:t>
-            </a:r>
-          </a:p>
-        </p:txBody>
-      </p:sp>
-      <p:sp>
-        <p:nvSpPr>
-          <p:cNvPr id="7" name="TextBox 6"/>
-          <p:cNvSpPr txBox="1"/>
-          <p:nvPr/>
-        </p:nvSpPr>
-        <p:spPr>
-          <a:xfrm>
-            <a:off x="868680" y="1783080"/>
-            <a:ext cx="274320" cy="365760"/>
-          </a:xfrm>
-          <a:prstGeom prst="rect">
-            <a:avLst/>
-          </a:prstGeom>
-          <a:noFill/>
-        </p:spPr>
-        <p:txBody>
-          <a:bodyPr wrap="square">
-            <a:spAutoFit/>
-          </a:bodyPr>
-          <a:lstStyle/>
-          <a:p>
-            <a:pPr algn="l">
-              <a:lnSpc>
-                <a:spcPct val="115000"/>
-              </a:lnSpc>
-            </a:pPr>
-            <a:r>
-              <a:rPr sz="1700" b="0">
-                <a:solidFill>
-                  <a:srgbClr val="1D4ED8"/>
-                </a:solidFill>
-                <a:latin typeface="微软雅黑"/>
-              </a:rPr>
-              <a:t>· </a:t>
-            </a:r>
-          </a:p>
-        </p:txBody>
-      </p:sp>
-      <p:sp>
-        <p:nvSpPr>
-          <p:cNvPr id="8" name="TextBox 7"/>
-          <p:cNvSpPr txBox="1"/>
-          <p:nvPr/>
-        </p:nvSpPr>
-        <p:spPr>
-          <a:xfrm>
-            <a:off x="1179576" y="1783080"/>
-            <a:ext cx="10021824" cy="457200"/>
-          </a:xfrm>
-          <a:prstGeom prst="rect">
-            <a:avLst/>
-          </a:prstGeom>
-          <a:noFill/>
-        </p:spPr>
-        <p:txBody>
-          <a:bodyPr wrap="square">
-            <a:spAutoFit/>
-          </a:bodyPr>
-          <a:lstStyle/>
-          <a:p>
-            <a:pPr algn="l">
-              <a:lnSpc>
-                <a:spcPct val="115000"/>
-              </a:lnSpc>
-            </a:pPr>
-            <a:r>
-              <a:rPr sz="1700" b="0">
-                <a:solidFill>
-                  <a:srgbClr val="1F2937"/>
-                </a:solidFill>
-                <a:latin typeface="微软雅黑"/>
-              </a:rPr>
-              <a:t>采集城市公开活动 → 去重 → 关联场馆与地区 → 判断对哪家酒店有用 → 形成跟进清单与周报</a:t>
-            </a:r>
-          </a:p>
-        </p:txBody>
-      </p:sp>
-      <p:sp>
-        <p:nvSpPr>
-          <p:cNvPr id="9" name="TextBox 8"/>
-          <p:cNvSpPr txBox="1"/>
-          <p:nvPr/>
-        </p:nvSpPr>
-        <p:spPr>
-          <a:xfrm>
-            <a:off x="868680" y="2386584"/>
-            <a:ext cx="274320" cy="365760"/>
-          </a:xfrm>
-          <a:prstGeom prst="rect">
-            <a:avLst/>
-          </a:prstGeom>
-          <a:noFill/>
-        </p:spPr>
-        <p:txBody>
-          <a:bodyPr wrap="square">
-            <a:spAutoFit/>
-          </a:bodyPr>
-          <a:lstStyle/>
-          <a:p>
-            <a:pPr algn="l">
-              <a:lnSpc>
-                <a:spcPct val="115000"/>
-              </a:lnSpc>
-            </a:pPr>
-            <a:r>
-              <a:rPr sz="1700" b="0">
-                <a:solidFill>
-                  <a:srgbClr val="1D4ED8"/>
-                </a:solidFill>
-                <a:latin typeface="微软雅黑"/>
-              </a:rPr>
-              <a:t>· </a:t>
-            </a:r>
-          </a:p>
-        </p:txBody>
-      </p:sp>
-      <p:sp>
-        <p:nvSpPr>
-          <p:cNvPr id="10" name="TextBox 9"/>
-          <p:cNvSpPr txBox="1"/>
-          <p:nvPr/>
-        </p:nvSpPr>
-        <p:spPr>
-          <a:xfrm>
-            <a:off x="1179576" y="2386584"/>
-            <a:ext cx="10021824" cy="457200"/>
-          </a:xfrm>
-          <a:prstGeom prst="rect">
-            <a:avLst/>
-          </a:prstGeom>
-          <a:noFill/>
-        </p:spPr>
-        <p:txBody>
-          <a:bodyPr wrap="square">
-            <a:spAutoFit/>
-          </a:bodyPr>
-          <a:lstStyle/>
-          <a:p>
-            <a:pPr algn="l">
-              <a:lnSpc>
-                <a:spcPct val="115000"/>
-              </a:lnSpc>
-            </a:pPr>
-            <a:r>
-              <a:rPr sz="1700" b="0">
-                <a:solidFill>
-                  <a:srgbClr val="1F2937"/>
-                </a:solidFill>
-                <a:latin typeface="微软雅黑"/>
-              </a:rPr>
-              <a:t>每个数字都能点回来源；说不清的字段标「待补充」，不猜</a:t>
-            </a:r>
-          </a:p>
-        </p:txBody>
-      </p:sp>
-      <p:sp>
-        <p:nvSpPr>
-          <p:cNvPr id="11" name="TextBox 10"/>
-          <p:cNvSpPr txBox="1"/>
-          <p:nvPr/>
-        </p:nvSpPr>
-        <p:spPr>
-          <a:xfrm>
-            <a:off x="868680" y="2990088"/>
-            <a:ext cx="274320" cy="365760"/>
-          </a:xfrm>
-          <a:prstGeom prst="rect">
-            <a:avLst/>
-          </a:prstGeom>
-          <a:noFill/>
-        </p:spPr>
-        <p:txBody>
-          <a:bodyPr wrap="square">
-            <a:spAutoFit/>
-          </a:bodyPr>
-          <a:lstStyle/>
-          <a:p>
-            <a:pPr algn="l">
-              <a:lnSpc>
-                <a:spcPct val="115000"/>
-              </a:lnSpc>
-            </a:pPr>
-            <a:r>
-              <a:rPr sz="1700" b="0">
-                <a:solidFill>
-                  <a:srgbClr val="1D4ED8"/>
-                </a:solidFill>
-                <a:latin typeface="微软雅黑"/>
-              </a:rPr>
-              <a:t>· </a:t>
-            </a:r>
-          </a:p>
-        </p:txBody>
-      </p:sp>
-      <p:sp>
-        <p:nvSpPr>
-          <p:cNvPr id="12" name="TextBox 11"/>
-          <p:cNvSpPr txBox="1"/>
-          <p:nvPr/>
-        </p:nvSpPr>
-        <p:spPr>
-          <a:xfrm>
-            <a:off x="1179576" y="2990088"/>
-            <a:ext cx="10021824" cy="457200"/>
-          </a:xfrm>
-          <a:prstGeom prst="rect">
-            <a:avLst/>
-          </a:prstGeom>
-          <a:noFill/>
-        </p:spPr>
-        <p:txBody>
-          <a:bodyPr wrap="square">
-            <a:spAutoFit/>
-          </a:bodyPr>
-          <a:lstStyle/>
-          <a:p>
-            <a:pPr algn="l">
-              <a:lnSpc>
-                <a:spcPct val="115000"/>
-              </a:lnSpc>
-            </a:pPr>
-            <a:r>
-              <a:rPr sz="1700" b="0">
-                <a:solidFill>
-                  <a:srgbClr val="1F2937"/>
-                </a:solidFill>
-                <a:latin typeface="微软雅黑"/>
-              </a:rPr>
-              <a:t>面向酒店市场/销售/收益岗位的日常信息整理，不替代任何收益系统</a:t>
-            </a:r>
-          </a:p>
-        </p:txBody>
-      </p:sp>
-      <p:sp>
-        <p:nvSpPr>
-          <p:cNvPr id="13" name="TextBox 12"/>
-          <p:cNvSpPr txBox="1"/>
-          <p:nvPr/>
-        </p:nvSpPr>
-        <p:spPr>
-          <a:xfrm>
-            <a:off x="868680" y="4160520"/>
-            <a:ext cx="1645920" cy="548640"/>
-          </a:xfrm>
-          <a:prstGeom prst="rect">
-            <a:avLst/>
-          </a:prstGeom>
-          <a:noFill/>
-        </p:spPr>
-        <p:txBody>
-          <a:bodyPr wrap="square">
-            <a:spAutoFit/>
-          </a:bodyPr>
-          <a:lstStyle/>
-          <a:p>
-            <a:pPr algn="l">
-              <a:lnSpc>
-                <a:spcPct val="115000"/>
-              </a:lnSpc>
-            </a:pPr>
-            <a:r>
-              <a:rPr sz="3000" b="1">
-                <a:solidFill>
-                  <a:srgbClr val="1F2937"/>
-                </a:solidFill>
-                <a:latin typeface="微软雅黑"/>
-              </a:rPr>
-              <a:t>436</a:t>
-            </a:r>
-          </a:p>
-        </p:txBody>
-      </p:sp>
-      <p:sp>
-        <p:nvSpPr>
-          <p:cNvPr id="14" name="TextBox 13"/>
-          <p:cNvSpPr txBox="1"/>
-          <p:nvPr/>
-        </p:nvSpPr>
-        <p:spPr>
-          <a:xfrm>
-            <a:off x="868680" y="4736592"/>
-            <a:ext cx="1645920" cy="320040"/>
-          </a:xfrm>
-          <a:prstGeom prst="rect">
-            <a:avLst/>
-          </a:prstGeom>
-          <a:noFill/>
-        </p:spPr>
-        <p:txBody>
-          <a:bodyPr wrap="square">
-            <a:spAutoFit/>
-          </a:bodyPr>
-          <a:lstStyle/>
-          <a:p>
-            <a:pPr algn="l">
-              <a:lnSpc>
-                <a:spcPct val="115000"/>
-              </a:lnSpc>
-            </a:pPr>
-            <a:r>
-              <a:rPr sz="1200" b="0">
-                <a:solidFill>
-                  <a:srgbClr val="6B7280"/>
-                </a:solidFill>
-                <a:latin typeface="微软雅黑"/>
-              </a:rPr>
-              <a:t>活动记录</a:t>
-            </a:r>
-          </a:p>
-        </p:txBody>
-      </p:sp>
-      <p:sp>
-        <p:nvSpPr>
-          <p:cNvPr id="15" name="TextBox 14"/>
-          <p:cNvSpPr txBox="1"/>
-          <p:nvPr/>
-        </p:nvSpPr>
-        <p:spPr>
-          <a:xfrm>
-            <a:off x="2606039" y="4160520"/>
-            <a:ext cx="1645920" cy="548640"/>
-          </a:xfrm>
-          <a:prstGeom prst="rect">
-            <a:avLst/>
-          </a:prstGeom>
-          <a:noFill/>
-        </p:spPr>
-        <p:txBody>
-          <a:bodyPr wrap="square">
-            <a:spAutoFit/>
-          </a:bodyPr>
-          <a:lstStyle/>
-          <a:p>
-            <a:pPr algn="l">
-              <a:lnSpc>
-                <a:spcPct val="115000"/>
-              </a:lnSpc>
-            </a:pPr>
-            <a:r>
-              <a:rPr sz="3000" b="1">
-                <a:solidFill>
-                  <a:srgbClr val="1F2937"/>
-                </a:solidFill>
-                <a:latin typeface="微软雅黑"/>
-              </a:rPr>
-              <a:t>416</a:t>
-            </a:r>
-          </a:p>
-        </p:txBody>
-      </p:sp>
-      <p:sp>
-        <p:nvSpPr>
-          <p:cNvPr id="16" name="TextBox 15"/>
-          <p:cNvSpPr txBox="1"/>
-          <p:nvPr/>
-        </p:nvSpPr>
-        <p:spPr>
-          <a:xfrm>
-            <a:off x="2606039" y="4736592"/>
-            <a:ext cx="1645920" cy="320040"/>
-          </a:xfrm>
-          <a:prstGeom prst="rect">
-            <a:avLst/>
-          </a:prstGeom>
-          <a:noFill/>
-        </p:spPr>
-        <p:txBody>
-          <a:bodyPr wrap="square">
-            <a:spAutoFit/>
-          </a:bodyPr>
-          <a:lstStyle/>
-          <a:p>
-            <a:pPr algn="l">
-              <a:lnSpc>
-                <a:spcPct val="115000"/>
-              </a:lnSpc>
-            </a:pPr>
-            <a:r>
-              <a:rPr sz="1200" b="0">
-                <a:solidFill>
-                  <a:srgbClr val="6B7280"/>
-                </a:solidFill>
-                <a:latin typeface="微软雅黑"/>
-              </a:rPr>
-              <a:t>去重后身份</a:t>
-            </a:r>
-          </a:p>
-        </p:txBody>
-      </p:sp>
-      <p:sp>
-        <p:nvSpPr>
-          <p:cNvPr id="17" name="TextBox 16"/>
-          <p:cNvSpPr txBox="1"/>
-          <p:nvPr/>
-        </p:nvSpPr>
-        <p:spPr>
-          <a:xfrm>
-            <a:off x="4343400" y="4160520"/>
-            <a:ext cx="1645920" cy="548640"/>
-          </a:xfrm>
-          <a:prstGeom prst="rect">
-            <a:avLst/>
-          </a:prstGeom>
-          <a:noFill/>
-        </p:spPr>
-        <p:txBody>
-          <a:bodyPr wrap="square">
-            <a:spAutoFit/>
-          </a:bodyPr>
-          <a:lstStyle/>
-          <a:p>
-            <a:pPr algn="l">
-              <a:lnSpc>
-                <a:spcPct val="115000"/>
-              </a:lnSpc>
-            </a:pPr>
-            <a:r>
-              <a:rPr sz="3000" b="1">
-                <a:solidFill>
-                  <a:srgbClr val="1F2937"/>
-                </a:solidFill>
-                <a:latin typeface="微软雅黑"/>
-              </a:rPr>
-              <a:t>135</a:t>
-            </a:r>
-          </a:p>
-        </p:txBody>
-      </p:sp>
-      <p:sp>
-        <p:nvSpPr>
-          <p:cNvPr id="18" name="TextBox 17"/>
-          <p:cNvSpPr txBox="1"/>
-          <p:nvPr/>
-        </p:nvSpPr>
-        <p:spPr>
-          <a:xfrm>
-            <a:off x="4343400" y="4736592"/>
-            <a:ext cx="1645920" cy="320040"/>
-          </a:xfrm>
-          <a:prstGeom prst="rect">
-            <a:avLst/>
-          </a:prstGeom>
-          <a:noFill/>
-        </p:spPr>
-        <p:txBody>
-          <a:bodyPr wrap="square">
-            <a:spAutoFit/>
-          </a:bodyPr>
-          <a:lstStyle/>
-          <a:p>
-            <a:pPr algn="l">
-              <a:lnSpc>
-                <a:spcPct val="115000"/>
-              </a:lnSpc>
-            </a:pPr>
-            <a:r>
-              <a:rPr sz="1200" b="0">
-                <a:solidFill>
-                  <a:srgbClr val="6B7280"/>
-                </a:solidFill>
-                <a:latin typeface="微软雅黑"/>
-              </a:rPr>
-              <a:t>场馆</a:t>
-            </a:r>
-          </a:p>
-        </p:txBody>
-      </p:sp>
-      <p:sp>
-        <p:nvSpPr>
-          <p:cNvPr id="19" name="TextBox 18"/>
-          <p:cNvSpPr txBox="1"/>
-          <p:nvPr/>
-        </p:nvSpPr>
-        <p:spPr>
-          <a:xfrm>
-            <a:off x="6080759" y="4160520"/>
-            <a:ext cx="1645920" cy="548640"/>
-          </a:xfrm>
-          <a:prstGeom prst="rect">
-            <a:avLst/>
-          </a:prstGeom>
-          <a:noFill/>
-        </p:spPr>
-        <p:txBody>
-          <a:bodyPr wrap="square">
-            <a:spAutoFit/>
-          </a:bodyPr>
-          <a:lstStyle/>
-          <a:p>
-            <a:pPr algn="l">
-              <a:lnSpc>
-                <a:spcPct val="115000"/>
-              </a:lnSpc>
-            </a:pPr>
-            <a:r>
-              <a:rPr sz="3000" b="1">
-                <a:solidFill>
-                  <a:srgbClr val="1F2937"/>
-                </a:solidFill>
-                <a:latin typeface="微软雅黑"/>
-              </a:rPr>
-              <a:t>19</a:t>
-            </a:r>
-          </a:p>
-        </p:txBody>
-      </p:sp>
-      <p:sp>
-        <p:nvSpPr>
-          <p:cNvPr id="20" name="TextBox 19"/>
-          <p:cNvSpPr txBox="1"/>
-          <p:nvPr/>
-        </p:nvSpPr>
-        <p:spPr>
-          <a:xfrm>
-            <a:off x="6080759" y="4736592"/>
-            <a:ext cx="1645920" cy="320040"/>
-          </a:xfrm>
-          <a:prstGeom prst="rect">
-            <a:avLst/>
-          </a:prstGeom>
-          <a:noFill/>
-        </p:spPr>
-        <p:txBody>
-          <a:bodyPr wrap="square">
-            <a:spAutoFit/>
-          </a:bodyPr>
-          <a:lstStyle/>
-          <a:p>
-            <a:pPr algn="l">
-              <a:lnSpc>
-                <a:spcPct val="115000"/>
-              </a:lnSpc>
-            </a:pPr>
-            <a:r>
-              <a:rPr sz="1200" b="0">
-                <a:solidFill>
-                  <a:srgbClr val="6B7280"/>
-                </a:solidFill>
-                <a:latin typeface="微软雅黑"/>
-              </a:rPr>
-              <a:t>酒店</a:t>
-            </a:r>
-          </a:p>
-        </p:txBody>
-      </p:sp>
-      <p:sp>
-        <p:nvSpPr>
-          <p:cNvPr id="21" name="TextBox 20"/>
-          <p:cNvSpPr txBox="1"/>
-          <p:nvPr/>
-        </p:nvSpPr>
-        <p:spPr>
-          <a:xfrm>
-            <a:off x="7818119" y="4160520"/>
-            <a:ext cx="1645920" cy="548640"/>
-          </a:xfrm>
-          <a:prstGeom prst="rect">
-            <a:avLst/>
-          </a:prstGeom>
-          <a:noFill/>
-        </p:spPr>
-        <p:txBody>
-          <a:bodyPr wrap="square">
-            <a:spAutoFit/>
-          </a:bodyPr>
-          <a:lstStyle/>
-          <a:p>
-            <a:pPr algn="l">
-              <a:lnSpc>
-                <a:spcPct val="115000"/>
-              </a:lnSpc>
-            </a:pPr>
-            <a:r>
-              <a:rPr sz="3000" b="1">
-                <a:solidFill>
-                  <a:srgbClr val="1F2937"/>
-                </a:solidFill>
-                <a:latin typeface="微软雅黑"/>
-              </a:rPr>
-              <a:t>17</a:t>
-            </a:r>
-          </a:p>
-        </p:txBody>
-      </p:sp>
-      <p:sp>
-        <p:nvSpPr>
-          <p:cNvPr id="22" name="TextBox 21"/>
-          <p:cNvSpPr txBox="1"/>
-          <p:nvPr/>
-        </p:nvSpPr>
-        <p:spPr>
-          <a:xfrm>
-            <a:off x="7818119" y="4736592"/>
-            <a:ext cx="1645920" cy="320040"/>
-          </a:xfrm>
-          <a:prstGeom prst="rect">
-            <a:avLst/>
-          </a:prstGeom>
-          <a:noFill/>
-        </p:spPr>
-        <p:txBody>
-          <a:bodyPr wrap="square">
-            <a:spAutoFit/>
-          </a:bodyPr>
-          <a:lstStyle/>
-          <a:p>
-            <a:pPr algn="l">
-              <a:lnSpc>
-                <a:spcPct val="115000"/>
-              </a:lnSpc>
-            </a:pPr>
-            <a:r>
-              <a:rPr sz="1200" b="0">
-                <a:solidFill>
-                  <a:srgbClr val="6B7280"/>
-                </a:solidFill>
-                <a:latin typeface="微软雅黑"/>
-              </a:rPr>
-              <a:t>公开来源</a:t>
-            </a:r>
-          </a:p>
-        </p:txBody>
-      </p:sp>
-      <p:sp>
-        <p:nvSpPr>
-          <p:cNvPr id="23" name="TextBox 22"/>
-          <p:cNvSpPr txBox="1"/>
-          <p:nvPr/>
-        </p:nvSpPr>
-        <p:spPr>
-          <a:xfrm>
-            <a:off x="9555480" y="4160520"/>
-            <a:ext cx="1645920" cy="548640"/>
-          </a:xfrm>
-          <a:prstGeom prst="rect">
-            <a:avLst/>
-          </a:prstGeom>
-          <a:noFill/>
-        </p:spPr>
-        <p:txBody>
-          <a:bodyPr wrap="square">
-            <a:spAutoFit/>
-          </a:bodyPr>
-          <a:lstStyle/>
-          <a:p>
-            <a:pPr algn="l">
-              <a:lnSpc>
-                <a:spcPct val="115000"/>
-              </a:lnSpc>
-            </a:pPr>
-            <a:r>
-              <a:rPr sz="3000" b="1">
-                <a:solidFill>
-                  <a:srgbClr val="1F2937"/>
-                </a:solidFill>
-                <a:latin typeface="微软雅黑"/>
-              </a:rPr>
-              <a:t>4463</a:t>
-            </a:r>
-          </a:p>
-        </p:txBody>
-      </p:sp>
-      <p:sp>
-        <p:nvSpPr>
-          <p:cNvPr id="24" name="TextBox 23"/>
-          <p:cNvSpPr txBox="1"/>
-          <p:nvPr/>
-        </p:nvSpPr>
-        <p:spPr>
-          <a:xfrm>
-            <a:off x="9555480" y="4736592"/>
-            <a:ext cx="1645920" cy="320040"/>
-          </a:xfrm>
-          <a:prstGeom prst="rect">
-            <a:avLst/>
-          </a:prstGeom>
-          <a:noFill/>
-        </p:spPr>
-        <p:txBody>
-          <a:bodyPr wrap="square">
-            <a:spAutoFit/>
-          </a:bodyPr>
-          <a:lstStyle/>
-          <a:p>
-            <a:pPr algn="l">
-              <a:lnSpc>
-                <a:spcPct val="115000"/>
-              </a:lnSpc>
-            </a:pPr>
-            <a:r>
-              <a:rPr sz="1200" b="0">
-                <a:solidFill>
-                  <a:srgbClr val="6B7280"/>
-                </a:solidFill>
-                <a:latin typeface="微软雅黑"/>
-              </a:rPr>
-              <a:t>字段证据</a:t>
-            </a:r>
-          </a:p>
-        </p:txBody>
-      </p:sp>
-      <p:sp>
-        <p:nvSpPr>
-          <p:cNvPr id="25" name="TextBox 24"/>
-          <p:cNvSpPr txBox="1"/>
-          <p:nvPr/>
-        </p:nvSpPr>
-        <p:spPr>
-          <a:xfrm>
-            <a:off x="868680" y="5394960"/>
-            <a:ext cx="10332720" cy="365760"/>
-          </a:xfrm>
-          <a:prstGeom prst="rect">
-            <a:avLst/>
-          </a:prstGeom>
-          <a:noFill/>
-        </p:spPr>
-        <p:txBody>
-          <a:bodyPr wrap="square">
-            <a:spAutoFit/>
-          </a:bodyPr>
-          <a:lstStyle/>
-          <a:p>
-            <a:pPr algn="l">
-              <a:lnSpc>
-                <a:spcPct val="115000"/>
-              </a:lnSpc>
-            </a:pPr>
-            <a:r>
-              <a:rPr sz="1300" b="0">
-                <a:solidFill>
-                  <a:srgbClr val="6B7280"/>
-                </a:solidFill>
-                <a:latin typeface="微软雅黑"/>
-              </a:rPr>
-              <a:t>数据为 2026-10-26 生产环境实测；太仓市直接归属活动 16 条 —— 这是样本，不是全覆盖。</a:t>
-            </a:r>
-          </a:p>
-        </p:txBody>
-      </p:sp>
-    </p:spTree>
-  </p:cSld>
-  <p:clrMapOvr>
-    <a:masterClrMapping/>
-  </p:clrMapOvr>
-</p:sld>
-</file>
-
-<file path=ppt/slides/slide4.xml><?xml version="1.0" encoding="utf-8"?>
-<p:sld xmlns:a="http://schemas.openxmlformats.org/drawingml/2006/main" xmlns:p="http://schemas.openxmlformats.org/presentationml/2006/main" xmlns:r="http://schemas.openxmlformats.org/officeDocument/2006/relationships">
-  <p:cSld>
-    <p:spTree>
-      <p:nvGrpSpPr>
-        <p:cNvPr id="1" name=""/>
-        <p:cNvGrpSpPr/>
-        <p:nvPr/>
-      </p:nvGrpSpPr>
-      <p:grpSpPr/>
-      <p:sp>
-        <p:nvSpPr>
-          <p:cNvPr id="2" name="TextBox 1"/>
-          <p:cNvSpPr txBox="1"/>
-          <p:nvPr/>
-        </p:nvSpPr>
-        <p:spPr>
-          <a:xfrm>
-            <a:off x="822960" y="475488"/>
-            <a:ext cx="10515600" cy="292608"/>
-          </a:xfrm>
-          <a:prstGeom prst="rect">
-            <a:avLst/>
-          </a:prstGeom>
-          <a:noFill/>
-        </p:spPr>
-        <p:txBody>
-          <a:bodyPr wrap="square">
-            <a:spAutoFit/>
-          </a:bodyPr>
-          <a:lstStyle/>
-          <a:p>
-            <a:pPr algn="l">
-              <a:lnSpc>
-                <a:spcPct val="115000"/>
-              </a:lnSpc>
-            </a:pPr>
-            <a:r>
-              <a:rPr sz="1200" b="0">
-                <a:solidFill>
-                  <a:srgbClr val="6B7280"/>
-                </a:solidFill>
-                <a:latin typeface="微软雅黑"/>
-              </a:rPr>
-              <a:t>数据基础</a:t>
-            </a:r>
-          </a:p>
-        </p:txBody>
-      </p:sp>
-      <p:sp>
-        <p:nvSpPr>
-          <p:cNvPr id="3" name="TextBox 2"/>
-          <p:cNvSpPr txBox="1"/>
-          <p:nvPr/>
-        </p:nvSpPr>
-        <p:spPr>
-          <a:xfrm>
-            <a:off x="822960" y="749808"/>
-            <a:ext cx="10607040" cy="640080"/>
-          </a:xfrm>
-          <a:prstGeom prst="rect">
-            <a:avLst/>
-          </a:prstGeom>
-          <a:noFill/>
-        </p:spPr>
-        <p:txBody>
-          <a:bodyPr wrap="square">
-            <a:spAutoFit/>
-          </a:bodyPr>
-          <a:lstStyle/>
-          <a:p>
-            <a:pPr algn="l">
-              <a:lnSpc>
-                <a:spcPct val="115000"/>
-              </a:lnSpc>
-            </a:pPr>
-            <a:r>
-              <a:rPr sz="3000" b="1">
-                <a:solidFill>
-                  <a:srgbClr val="1F2937"/>
-                </a:solidFill>
-                <a:latin typeface="微软雅黑"/>
-              </a:rPr>
-              <a:t>数据为什么可信：来源、证据、状态三件事</a:t>
-            </a:r>
-          </a:p>
-        </p:txBody>
-      </p:sp>
-      <p:cxnSp>
-        <p:nvCxnSpPr>
-          <p:cNvPr id="4" name="Connector 3"/>
-          <p:cNvCxnSpPr/>
-          <p:nvPr/>
-        </p:nvCxnSpPr>
-        <p:spPr>
-          <a:xfrm>
-            <a:off x="822960" y="1481328"/>
-            <a:ext cx="10543032" cy="0"/>
-          </a:xfrm>
-          <a:prstGeom prst="line">
-            <a:avLst/>
-          </a:prstGeom>
-          <a:ln w="11430">
-            <a:solidFill>
-              <a:srgbClr val="D8DEE6"/>
-            </a:solidFill>
-          </a:ln>
-        </p:spPr>
-        <p:style>
-          <a:lnRef idx="2">
-            <a:schemeClr val="accent1"/>
-          </a:lnRef>
-          <a:fillRef idx="0">
-            <a:schemeClr val="accent1"/>
-          </a:fillRef>
-          <a:effectRef idx="1">
-            <a:schemeClr val="accent1"/>
-          </a:effectRef>
-          <a:fontRef idx="minor">
-            <a:schemeClr val="tx1"/>
-          </a:fontRef>
-        </p:style>
-      </p:cxnSp>
-      <p:sp>
-        <p:nvSpPr>
-          <p:cNvPr id="5" name="TextBox 4"/>
-          <p:cNvSpPr txBox="1"/>
-          <p:nvPr/>
-        </p:nvSpPr>
-        <p:spPr>
-          <a:xfrm>
-            <a:off x="11292840" y="6355080"/>
-            <a:ext cx="548640" cy="274320"/>
-          </a:xfrm>
-          <a:prstGeom prst="rect">
-            <a:avLst/>
-          </a:prstGeom>
-          <a:noFill/>
-        </p:spPr>
-        <p:txBody>
-          <a:bodyPr wrap="square">
-            <a:spAutoFit/>
-          </a:bodyPr>
-          <a:lstStyle/>
-          <a:p>
-            <a:pPr algn="r">
-              <a:lnSpc>
-                <a:spcPct val="115000"/>
-              </a:lnSpc>
-            </a:pPr>
-            <a:r>
-              <a:rPr sz="1000" b="0">
-                <a:solidFill>
-                  <a:srgbClr val="6B7280"/>
-                </a:solidFill>
-                <a:latin typeface="微软雅黑"/>
-              </a:rPr>
-              <a:t>4</a:t>
             </a:r>
           </a:p>
         </p:txBody>
@@ -8044,7 +4918,7 @@
                           </a:solidFill>
                           <a:latin typeface="微软雅黑"/>
                         </a:rPr>
-                        <a:t>每日快照（当前 3 份），同一天的数据可比</a:t>
+                        <a:t>已积累 3 份历史快照，可比较对应时间区间内观察到的信息变化</a:t>
                       </a:r>
                     </a:p>
                   </a:txBody>
@@ -8067,7 +4941,7 @@
                           </a:solidFill>
                           <a:latin typeface="微软雅黑"/>
                         </a:rPr>
-                        <a:t>能看到活动是新增、改期还是消失</a:t>
+                        <a:t>未再次采集到的活动标「待核验」，不直接判定为取消</a:t>
                       </a:r>
                     </a:p>
                   </a:txBody>
@@ -8148,6 +5022,566 @@
                 <a:latin typeface="微软雅黑"/>
               </a:rPr>
               <a:t>字段已核验 ≠ 整条活动已核验 —— 这句话我们写在了页面上。</a:t>
+            </a:r>
+          </a:p>
+        </p:txBody>
+      </p:sp>
+    </p:spTree>
+  </p:cSld>
+  <p:clrMapOvr>
+    <a:masterClrMapping/>
+  </p:clrMapOvr>
+</p:sld>
+</file>
+
+<file path=ppt/slides/slide4.xml><?xml version="1.0" encoding="utf-8"?>
+<p:sld xmlns:a="http://schemas.openxmlformats.org/drawingml/2006/main" xmlns:p="http://schemas.openxmlformats.org/presentationml/2006/main" xmlns:r="http://schemas.openxmlformats.org/officeDocument/2006/relationships">
+  <p:cSld>
+    <p:spTree>
+      <p:nvGrpSpPr>
+        <p:cNvPr id="1" name=""/>
+        <p:cNvGrpSpPr/>
+        <p:nvPr/>
+      </p:nvGrpSpPr>
+      <p:grpSpPr/>
+      <p:sp>
+        <p:nvSpPr>
+          <p:cNvPr id="2" name="TextBox 1"/>
+          <p:cNvSpPr txBox="1"/>
+          <p:nvPr/>
+        </p:nvSpPr>
+        <p:spPr>
+          <a:xfrm>
+            <a:off x="822960" y="475488"/>
+            <a:ext cx="10515600" cy="292608"/>
+          </a:xfrm>
+          <a:prstGeom prst="rect">
+            <a:avLst/>
+          </a:prstGeom>
+          <a:noFill/>
+        </p:spPr>
+        <p:txBody>
+          <a:bodyPr wrap="square">
+            <a:spAutoFit/>
+          </a:bodyPr>
+          <a:lstStyle/>
+          <a:p>
+            <a:pPr algn="l">
+              <a:lnSpc>
+                <a:spcPct val="115000"/>
+              </a:lnSpc>
+            </a:pPr>
+            <a:r>
+              <a:rPr sz="1200" b="0">
+                <a:solidFill>
+                  <a:srgbClr val="6B7280"/>
+                </a:solidFill>
+                <a:latin typeface="微软雅黑"/>
+              </a:rPr>
+              <a:t>演示路径：发现活动 → 酒店跟进 → 导出简报（约 13 分钟）</a:t>
+            </a:r>
+          </a:p>
+        </p:txBody>
+      </p:sp>
+      <p:sp>
+        <p:nvSpPr>
+          <p:cNvPr id="3" name="TextBox 2"/>
+          <p:cNvSpPr txBox="1"/>
+          <p:nvPr/>
+        </p:nvSpPr>
+        <p:spPr>
+          <a:xfrm>
+            <a:off x="822960" y="749808"/>
+            <a:ext cx="10607040" cy="640080"/>
+          </a:xfrm>
+          <a:prstGeom prst="rect">
+            <a:avLst/>
+          </a:prstGeom>
+          <a:noFill/>
+        </p:spPr>
+        <p:txBody>
+          <a:bodyPr wrap="square">
+            <a:spAutoFit/>
+          </a:bodyPr>
+          <a:lstStyle/>
+          <a:p>
+            <a:pPr algn="l">
+              <a:lnSpc>
+                <a:spcPct val="115000"/>
+              </a:lnSpc>
+            </a:pPr>
+            <a:r>
+              <a:rPr sz="3000" b="1">
+                <a:solidFill>
+                  <a:srgbClr val="1F2937"/>
+                </a:solidFill>
+                <a:latin typeface="微软雅黑"/>
+              </a:rPr>
+              <a:t>① 发现活动：地图与清单</a:t>
+            </a:r>
+          </a:p>
+        </p:txBody>
+      </p:sp>
+      <p:cxnSp>
+        <p:nvCxnSpPr>
+          <p:cNvPr id="4" name="Connector 3"/>
+          <p:cNvCxnSpPr/>
+          <p:nvPr/>
+        </p:nvCxnSpPr>
+        <p:spPr>
+          <a:xfrm>
+            <a:off x="822960" y="1481328"/>
+            <a:ext cx="10543032" cy="0"/>
+          </a:xfrm>
+          <a:prstGeom prst="line">
+            <a:avLst/>
+          </a:prstGeom>
+          <a:ln w="11430">
+            <a:solidFill>
+              <a:srgbClr val="D8DEE6"/>
+            </a:solidFill>
+          </a:ln>
+        </p:spPr>
+        <p:style>
+          <a:lnRef idx="2">
+            <a:schemeClr val="accent1"/>
+          </a:lnRef>
+          <a:fillRef idx="0">
+            <a:schemeClr val="accent1"/>
+          </a:fillRef>
+          <a:effectRef idx="1">
+            <a:schemeClr val="accent1"/>
+          </a:effectRef>
+          <a:fontRef idx="minor">
+            <a:schemeClr val="tx1"/>
+          </a:fontRef>
+        </p:style>
+      </p:cxnSp>
+      <p:sp>
+        <p:nvSpPr>
+          <p:cNvPr id="5" name="TextBox 4"/>
+          <p:cNvSpPr txBox="1"/>
+          <p:nvPr/>
+        </p:nvSpPr>
+        <p:spPr>
+          <a:xfrm>
+            <a:off x="11292840" y="6355080"/>
+            <a:ext cx="548640" cy="274320"/>
+          </a:xfrm>
+          <a:prstGeom prst="rect">
+            <a:avLst/>
+          </a:prstGeom>
+          <a:noFill/>
+        </p:spPr>
+        <p:txBody>
+          <a:bodyPr wrap="square">
+            <a:spAutoFit/>
+          </a:bodyPr>
+          <a:lstStyle/>
+          <a:p>
+            <a:pPr algn="r">
+              <a:lnSpc>
+                <a:spcPct val="115000"/>
+              </a:lnSpc>
+            </a:pPr>
+            <a:r>
+              <a:rPr sz="1000" b="0">
+                <a:solidFill>
+                  <a:srgbClr val="6B7280"/>
+                </a:solidFill>
+                <a:latin typeface="微软雅黑"/>
+              </a:rPr>
+              <a:t>4</a:t>
+            </a:r>
+          </a:p>
+        </p:txBody>
+      </p:sp>
+      <p:sp>
+        <p:nvSpPr>
+          <p:cNvPr id="6" name="TextBox 5"/>
+          <p:cNvSpPr txBox="1"/>
+          <p:nvPr/>
+        </p:nvSpPr>
+        <p:spPr>
+          <a:xfrm>
+            <a:off x="822960" y="6355080"/>
+            <a:ext cx="5486400" cy="274320"/>
+          </a:xfrm>
+          <a:prstGeom prst="rect">
+            <a:avLst/>
+          </a:prstGeom>
+          <a:noFill/>
+        </p:spPr>
+        <p:txBody>
+          <a:bodyPr wrap="square">
+            <a:spAutoFit/>
+          </a:bodyPr>
+          <a:lstStyle/>
+          <a:p>
+            <a:pPr algn="l">
+              <a:lnSpc>
+                <a:spcPct val="115000"/>
+              </a:lnSpc>
+            </a:pPr>
+            <a:r>
+              <a:rPr sz="1000" b="0">
+                <a:solidFill>
+                  <a:srgbClr val="6B7280"/>
+                </a:solidFill>
+                <a:latin typeface="微软雅黑"/>
+              </a:rPr>
+              <a:t>Menduner · ENT303TC 第 14 组</a:t>
+            </a:r>
+          </a:p>
+        </p:txBody>
+      </p:sp>
+      <p:sp>
+        <p:nvSpPr>
+          <p:cNvPr id="7" name="TextBox 6"/>
+          <p:cNvSpPr txBox="1"/>
+          <p:nvPr/>
+        </p:nvSpPr>
+        <p:spPr>
+          <a:xfrm>
+            <a:off x="868680" y="1783080"/>
+            <a:ext cx="274320" cy="365760"/>
+          </a:xfrm>
+          <a:prstGeom prst="rect">
+            <a:avLst/>
+          </a:prstGeom>
+          <a:noFill/>
+        </p:spPr>
+        <p:txBody>
+          <a:bodyPr wrap="square">
+            <a:spAutoFit/>
+          </a:bodyPr>
+          <a:lstStyle/>
+          <a:p>
+            <a:pPr algn="l">
+              <a:lnSpc>
+                <a:spcPct val="115000"/>
+              </a:lnSpc>
+            </a:pPr>
+            <a:r>
+              <a:rPr sz="1700" b="0">
+                <a:solidFill>
+                  <a:srgbClr val="1D4ED8"/>
+                </a:solidFill>
+                <a:latin typeface="微软雅黑"/>
+              </a:rPr>
+              <a:t>· </a:t>
+            </a:r>
+          </a:p>
+        </p:txBody>
+      </p:sp>
+      <p:sp>
+        <p:nvSpPr>
+          <p:cNvPr id="8" name="TextBox 7"/>
+          <p:cNvSpPr txBox="1"/>
+          <p:nvPr/>
+        </p:nvSpPr>
+        <p:spPr>
+          <a:xfrm>
+            <a:off x="1179576" y="1783080"/>
+            <a:ext cx="10021824" cy="457200"/>
+          </a:xfrm>
+          <a:prstGeom prst="rect">
+            <a:avLst/>
+          </a:prstGeom>
+          <a:noFill/>
+        </p:spPr>
+        <p:txBody>
+          <a:bodyPr wrap="square">
+            <a:spAutoFit/>
+          </a:bodyPr>
+          <a:lstStyle/>
+          <a:p>
+            <a:pPr algn="l">
+              <a:lnSpc>
+                <a:spcPct val="115000"/>
+              </a:lnSpc>
+            </a:pPr>
+            <a:r>
+              <a:rPr sz="1700" b="0">
+                <a:solidFill>
+                  <a:srgbClr val="1F2937"/>
+                </a:solidFill>
+                <a:latin typeface="微软雅黑"/>
+              </a:rPr>
+              <a:t>按年份、类别、区域筛选；演示数据默认关闭，已结束活动默认隐藏</a:t>
+            </a:r>
+          </a:p>
+        </p:txBody>
+      </p:sp>
+      <p:sp>
+        <p:nvSpPr>
+          <p:cNvPr id="9" name="TextBox 8"/>
+          <p:cNvSpPr txBox="1"/>
+          <p:nvPr/>
+        </p:nvSpPr>
+        <p:spPr>
+          <a:xfrm>
+            <a:off x="868680" y="2441448"/>
+            <a:ext cx="274320" cy="365760"/>
+          </a:xfrm>
+          <a:prstGeom prst="rect">
+            <a:avLst/>
+          </a:prstGeom>
+          <a:noFill/>
+        </p:spPr>
+        <p:txBody>
+          <a:bodyPr wrap="square">
+            <a:spAutoFit/>
+          </a:bodyPr>
+          <a:lstStyle/>
+          <a:p>
+            <a:pPr algn="l">
+              <a:lnSpc>
+                <a:spcPct val="115000"/>
+              </a:lnSpc>
+            </a:pPr>
+            <a:r>
+              <a:rPr sz="1700" b="0">
+                <a:solidFill>
+                  <a:srgbClr val="1D4ED8"/>
+                </a:solidFill>
+                <a:latin typeface="微软雅黑"/>
+              </a:rPr>
+              <a:t>· </a:t>
+            </a:r>
+          </a:p>
+        </p:txBody>
+      </p:sp>
+      <p:sp>
+        <p:nvSpPr>
+          <p:cNvPr id="10" name="TextBox 9"/>
+          <p:cNvSpPr txBox="1"/>
+          <p:nvPr/>
+        </p:nvSpPr>
+        <p:spPr>
+          <a:xfrm>
+            <a:off x="1179576" y="2441448"/>
+            <a:ext cx="10021824" cy="457200"/>
+          </a:xfrm>
+          <a:prstGeom prst="rect">
+            <a:avLst/>
+          </a:prstGeom>
+          <a:noFill/>
+        </p:spPr>
+        <p:txBody>
+          <a:bodyPr wrap="square">
+            <a:spAutoFit/>
+          </a:bodyPr>
+          <a:lstStyle/>
+          <a:p>
+            <a:pPr algn="l">
+              <a:lnSpc>
+                <a:spcPct val="115000"/>
+              </a:lnSpc>
+            </a:pPr>
+            <a:r>
+              <a:rPr sz="1700" b="0">
+                <a:solidFill>
+                  <a:srgbClr val="1F2937"/>
+                </a:solidFill>
+                <a:latin typeface="微软雅黑"/>
+              </a:rPr>
+              <a:t>月初默认只看本月，月份控件折叠起来不占位置（1440×900 下地图可见高度 44%）</a:t>
+            </a:r>
+          </a:p>
+        </p:txBody>
+      </p:sp>
+      <p:sp>
+        <p:nvSpPr>
+          <p:cNvPr id="11" name="TextBox 10"/>
+          <p:cNvSpPr txBox="1"/>
+          <p:nvPr/>
+        </p:nvSpPr>
+        <p:spPr>
+          <a:xfrm>
+            <a:off x="868680" y="3099815"/>
+            <a:ext cx="274320" cy="365760"/>
+          </a:xfrm>
+          <a:prstGeom prst="rect">
+            <a:avLst/>
+          </a:prstGeom>
+          <a:noFill/>
+        </p:spPr>
+        <p:txBody>
+          <a:bodyPr wrap="square">
+            <a:spAutoFit/>
+          </a:bodyPr>
+          <a:lstStyle/>
+          <a:p>
+            <a:pPr algn="l">
+              <a:lnSpc>
+                <a:spcPct val="115000"/>
+              </a:lnSpc>
+            </a:pPr>
+            <a:r>
+              <a:rPr sz="1700" b="0">
+                <a:solidFill>
+                  <a:srgbClr val="1D4ED8"/>
+                </a:solidFill>
+                <a:latin typeface="微软雅黑"/>
+              </a:rPr>
+              <a:t>· </a:t>
+            </a:r>
+          </a:p>
+        </p:txBody>
+      </p:sp>
+      <p:sp>
+        <p:nvSpPr>
+          <p:cNvPr id="12" name="TextBox 11"/>
+          <p:cNvSpPr txBox="1"/>
+          <p:nvPr/>
+        </p:nvSpPr>
+        <p:spPr>
+          <a:xfrm>
+            <a:off x="1179576" y="3099815"/>
+            <a:ext cx="10021824" cy="457200"/>
+          </a:xfrm>
+          <a:prstGeom prst="rect">
+            <a:avLst/>
+          </a:prstGeom>
+          <a:noFill/>
+        </p:spPr>
+        <p:txBody>
+          <a:bodyPr wrap="square">
+            <a:spAutoFit/>
+          </a:bodyPr>
+          <a:lstStyle/>
+          <a:p>
+            <a:pPr algn="l">
+              <a:lnSpc>
+                <a:spcPct val="115000"/>
+              </a:lnSpc>
+            </a:pPr>
+            <a:r>
+              <a:rPr sz="1700" b="0">
+                <a:solidFill>
+                  <a:srgbClr val="1F2937"/>
+                </a:solidFill>
+                <a:latin typeface="微软雅黑"/>
+              </a:rPr>
+              <a:t>清单按「即将开始 / 进行中」分组；缺坐标的活动单独标注，不从统计里消失</a:t>
+            </a:r>
+          </a:p>
+        </p:txBody>
+      </p:sp>
+      <p:sp>
+        <p:nvSpPr>
+          <p:cNvPr id="13" name="TextBox 12"/>
+          <p:cNvSpPr txBox="1"/>
+          <p:nvPr/>
+        </p:nvSpPr>
+        <p:spPr>
+          <a:xfrm>
+            <a:off x="868680" y="3758184"/>
+            <a:ext cx="274320" cy="365760"/>
+          </a:xfrm>
+          <a:prstGeom prst="rect">
+            <a:avLst/>
+          </a:prstGeom>
+          <a:noFill/>
+        </p:spPr>
+        <p:txBody>
+          <a:bodyPr wrap="square">
+            <a:spAutoFit/>
+          </a:bodyPr>
+          <a:lstStyle/>
+          <a:p>
+            <a:pPr algn="l">
+              <a:lnSpc>
+                <a:spcPct val="115000"/>
+              </a:lnSpc>
+            </a:pPr>
+            <a:r>
+              <a:rPr sz="1700" b="0">
+                <a:solidFill>
+                  <a:srgbClr val="1D4ED8"/>
+                </a:solidFill>
+                <a:latin typeface="微软雅黑"/>
+              </a:rPr>
+              <a:t>· </a:t>
+            </a:r>
+          </a:p>
+        </p:txBody>
+      </p:sp>
+      <p:sp>
+        <p:nvSpPr>
+          <p:cNvPr id="14" name="TextBox 13"/>
+          <p:cNvSpPr txBox="1"/>
+          <p:nvPr/>
+        </p:nvSpPr>
+        <p:spPr>
+          <a:xfrm>
+            <a:off x="1179576" y="3758184"/>
+            <a:ext cx="10021824" cy="457200"/>
+          </a:xfrm>
+          <a:prstGeom prst="rect">
+            <a:avLst/>
+          </a:prstGeom>
+          <a:noFill/>
+        </p:spPr>
+        <p:txBody>
+          <a:bodyPr wrap="square">
+            <a:spAutoFit/>
+          </a:bodyPr>
+          <a:lstStyle/>
+          <a:p>
+            <a:pPr algn="l">
+              <a:lnSpc>
+                <a:spcPct val="115000"/>
+              </a:lnSpc>
+            </a:pPr>
+            <a:r>
+              <a:rPr sz="1700" b="0">
+                <a:solidFill>
+                  <a:srgbClr val="1F2937"/>
+                </a:solidFill>
+                <a:latin typeface="微软雅黑"/>
+              </a:rPr>
+              <a:t>每个活动点开能看到来源、核验状态与缺失字段</a:t>
+            </a:r>
+          </a:p>
+        </p:txBody>
+      </p:sp>
+      <p:sp>
+        <p:nvSpPr>
+          <p:cNvPr id="15" name="TextBox 14"/>
+          <p:cNvSpPr txBox="1"/>
+          <p:nvPr/>
+        </p:nvSpPr>
+        <p:spPr>
+          <a:xfrm>
+            <a:off x="868680" y="5074920"/>
+            <a:ext cx="10332720" cy="457200"/>
+          </a:xfrm>
+          <a:prstGeom prst="rect">
+            <a:avLst/>
+          </a:prstGeom>
+          <a:noFill/>
+        </p:spPr>
+        <p:txBody>
+          <a:bodyPr wrap="square">
+            <a:spAutoFit/>
+          </a:bodyPr>
+          <a:lstStyle/>
+          <a:p>
+            <a:pPr algn="l">
+              <a:lnSpc>
+                <a:spcPct val="115000"/>
+              </a:lnSpc>
+            </a:pPr>
+            <a:r>
+              <a:rPr sz="1600" b="0">
+                <a:solidFill>
+                  <a:srgbClr val="1D4ED8"/>
+                </a:solidFill>
+                <a:latin typeface="微软雅黑"/>
+              </a:rPr>
+              <a:t>关键句：我们整理的是公开活动信息，不是城市全部活动。</a:t>
             </a:r>
           </a:p>
         </p:txBody>
@@ -8204,7 +5638,7 @@
                 </a:solidFill>
                 <a:latin typeface="微软雅黑"/>
               </a:rPr>
-              <a:t>演示路径</a:t>
+              <a:t>演示 2/3</a:t>
             </a:r>
           </a:p>
         </p:txBody>
@@ -8243,7 +5677,7 @@
                 </a:solidFill>
                 <a:latin typeface="微软雅黑"/>
               </a:rPr>
-              <a:t>接下来 13 分钟：只看三个动作</a:t>
+              <a:t>② 酒店跟进：把这些活动变成待办</a:t>
             </a:r>
           </a:p>
         </p:txBody>
@@ -8369,8 +5803,8 @@
         </p:nvSpPr>
         <p:spPr>
           <a:xfrm>
-            <a:off x="914400" y="1920240"/>
-            <a:ext cx="3108960" cy="457200"/>
+            <a:off x="868680" y="1783080"/>
+            <a:ext cx="274320" cy="365760"/>
           </a:xfrm>
           <a:prstGeom prst="rect">
             <a:avLst/>
@@ -8389,27 +5823,66 @@
               </a:lnSpc>
             </a:pPr>
             <a:r>
-              <a:rPr sz="2200" b="1">
+              <a:rPr sz="1700" b="0">
+                <a:solidFill>
+                  <a:srgbClr val="1D4ED8"/>
+                </a:solidFill>
+                <a:latin typeface="微软雅黑"/>
+              </a:rPr>
+              <a:t>· </a:t>
+            </a:r>
+          </a:p>
+        </p:txBody>
+      </p:sp>
+      <p:sp>
+        <p:nvSpPr>
+          <p:cNvPr id="8" name="TextBox 7"/>
+          <p:cNvSpPr txBox="1"/>
+          <p:nvPr/>
+        </p:nvSpPr>
+        <p:spPr>
+          <a:xfrm>
+            <a:off x="1179576" y="1783080"/>
+            <a:ext cx="10021824" cy="457200"/>
+          </a:xfrm>
+          <a:prstGeom prst="rect">
+            <a:avLst/>
+          </a:prstGeom>
+          <a:noFill/>
+        </p:spPr>
+        <p:txBody>
+          <a:bodyPr wrap="square">
+            <a:spAutoFit/>
+          </a:bodyPr>
+          <a:lstStyle/>
+          <a:p>
+            <a:pPr algn="l">
+              <a:lnSpc>
+                <a:spcPct val="115000"/>
+              </a:lnSpc>
+            </a:pPr>
+            <a:r>
+              <a:rPr sz="1700" b="0">
                 <a:solidFill>
                   <a:srgbClr val="1F2937"/>
                 </a:solidFill>
                 <a:latin typeface="微软雅黑"/>
               </a:rPr>
-              <a:t>① 发现活动</a:t>
-            </a:r>
-          </a:p>
-        </p:txBody>
-      </p:sp>
-      <p:sp>
-        <p:nvSpPr>
-          <p:cNvPr id="8" name="TextBox 7"/>
-          <p:cNvSpPr txBox="1"/>
-          <p:nvPr/>
-        </p:nvSpPr>
-        <p:spPr>
-          <a:xfrm>
-            <a:off x="4114800" y="1975104"/>
-            <a:ext cx="7040880" cy="457200"/>
+              <a:t>工作台给每家店列出未来 7 天值得关注的活动，并写明推荐理由</a:t>
+            </a:r>
+          </a:p>
+        </p:txBody>
+      </p:sp>
+      <p:sp>
+        <p:nvSpPr>
+          <p:cNvPr id="9" name="TextBox 8"/>
+          <p:cNvSpPr txBox="1"/>
+          <p:nvPr/>
+        </p:nvSpPr>
+        <p:spPr>
+          <a:xfrm>
+            <a:off x="868680" y="2441448"/>
+            <a:ext cx="274320" cy="365760"/>
           </a:xfrm>
           <a:prstGeom prst="rect">
             <a:avLst/>
@@ -8428,52 +5901,17 @@
               </a:lnSpc>
             </a:pPr>
             <a:r>
-              <a:rPr sz="1600" b="0">
-                <a:solidFill>
-                  <a:srgbClr val="6B7280"/>
-                </a:solidFill>
-                <a:latin typeface="微软雅黑"/>
-              </a:rPr>
-              <a:t>地图 / 清单：这家酒店周边有什么、什么时候</a:t>
-            </a:r>
-          </a:p>
-        </p:txBody>
-      </p:sp>
-      <p:cxnSp>
-        <p:nvCxnSpPr>
-          <p:cNvPr id="9" name="Connector 8"/>
-          <p:cNvCxnSpPr/>
-          <p:nvPr/>
-        </p:nvCxnSpPr>
-        <p:spPr>
-          <a:xfrm>
-            <a:off x="914400" y="2788920"/>
-            <a:ext cx="10241280" cy="0"/>
-          </a:xfrm>
-          <a:prstGeom prst="line">
-            <a:avLst/>
-          </a:prstGeom>
-          <a:ln w="11430">
-            <a:solidFill>
-              <a:srgbClr val="D8DEE6"/>
-            </a:solidFill>
-          </a:ln>
-        </p:spPr>
-        <p:style>
-          <a:lnRef idx="2">
-            <a:schemeClr val="accent1"/>
-          </a:lnRef>
-          <a:fillRef idx="0">
-            <a:schemeClr val="accent1"/>
-          </a:fillRef>
-          <a:effectRef idx="1">
-            <a:schemeClr val="accent1"/>
-          </a:effectRef>
-          <a:fontRef idx="minor">
-            <a:schemeClr val="tx1"/>
-          </a:fontRef>
-        </p:style>
-      </p:cxnSp>
+              <a:rPr sz="1700" b="0">
+                <a:solidFill>
+                  <a:srgbClr val="1D4ED8"/>
+                </a:solidFill>
+                <a:latin typeface="微软雅黑"/>
+              </a:rPr>
+              <a:t>· </a:t>
+            </a:r>
+          </a:p>
+        </p:txBody>
+      </p:sp>
       <p:sp>
         <p:nvSpPr>
           <p:cNvPr id="10" name="TextBox 9"/>
@@ -8482,8 +5920,8 @@
         </p:nvSpPr>
         <p:spPr>
           <a:xfrm>
-            <a:off x="914400" y="3154680"/>
-            <a:ext cx="3108960" cy="457200"/>
+            <a:off x="1179576" y="2441448"/>
+            <a:ext cx="10021824" cy="457200"/>
           </a:xfrm>
           <a:prstGeom prst="rect">
             <a:avLst/>
@@ -8502,13 +5940,13 @@
               </a:lnSpc>
             </a:pPr>
             <a:r>
-              <a:rPr sz="2200" b="1">
+              <a:rPr sz="1700" b="0">
                 <a:solidFill>
                   <a:srgbClr val="1F2937"/>
                 </a:solidFill>
                 <a:latin typeface="微软雅黑"/>
               </a:rPr>
-              <a:t>② 酒店跟进</a:t>
+              <a:t>四个状态：关注 / 待跟进 / 已跟进 / 忽略；另有「是否采纳建议」记录</a:t>
             </a:r>
           </a:p>
         </p:txBody>
@@ -8521,8 +5959,8 @@
         </p:nvSpPr>
         <p:spPr>
           <a:xfrm>
-            <a:off x="4114800" y="3209544"/>
-            <a:ext cx="7040880" cy="457200"/>
+            <a:off x="868680" y="3099815"/>
+            <a:ext cx="274320" cy="365760"/>
           </a:xfrm>
           <a:prstGeom prst="rect">
             <a:avLst/>
@@ -8541,52 +5979,56 @@
               </a:lnSpc>
             </a:pPr>
             <a:r>
-              <a:rPr sz="1600" b="0">
-                <a:solidFill>
-                  <a:srgbClr val="6B7280"/>
-                </a:solidFill>
-                <a:latin typeface="微软雅黑"/>
-              </a:rPr>
-              <a:t>工作台：哪些值得跟进、谁在跟进、和上次比变了什么</a:t>
-            </a:r>
-          </a:p>
-        </p:txBody>
-      </p:sp>
-      <p:cxnSp>
-        <p:nvCxnSpPr>
-          <p:cNvPr id="12" name="Connector 11"/>
-          <p:cNvCxnSpPr/>
-          <p:nvPr/>
-        </p:nvCxnSpPr>
-        <p:spPr>
-          <a:xfrm>
-            <a:off x="914400" y="4023360"/>
-            <a:ext cx="10241280" cy="0"/>
-          </a:xfrm>
-          <a:prstGeom prst="line">
-            <a:avLst/>
-          </a:prstGeom>
-          <a:ln w="11430">
-            <a:solidFill>
-              <a:srgbClr val="D8DEE6"/>
-            </a:solidFill>
-          </a:ln>
-        </p:spPr>
-        <p:style>
-          <a:lnRef idx="2">
-            <a:schemeClr val="accent1"/>
-          </a:lnRef>
-          <a:fillRef idx="0">
-            <a:schemeClr val="accent1"/>
-          </a:fillRef>
-          <a:effectRef idx="1">
-            <a:schemeClr val="accent1"/>
-          </a:effectRef>
-          <a:fontRef idx="minor">
-            <a:schemeClr val="tx1"/>
-          </a:fontRef>
-        </p:style>
-      </p:cxnSp>
+              <a:rPr sz="1700" b="0">
+                <a:solidFill>
+                  <a:srgbClr val="1D4ED8"/>
+                </a:solidFill>
+                <a:latin typeface="微软雅黑"/>
+              </a:rPr>
+              <a:t>· </a:t>
+            </a:r>
+          </a:p>
+        </p:txBody>
+      </p:sp>
+      <p:sp>
+        <p:nvSpPr>
+          <p:cNvPr id="12" name="TextBox 11"/>
+          <p:cNvSpPr txBox="1"/>
+          <p:nvPr/>
+        </p:nvSpPr>
+        <p:spPr>
+          <a:xfrm>
+            <a:off x="1179576" y="3099815"/>
+            <a:ext cx="10021824" cy="457200"/>
+          </a:xfrm>
+          <a:prstGeom prst="rect">
+            <a:avLst/>
+          </a:prstGeom>
+          <a:noFill/>
+        </p:spPr>
+        <p:txBody>
+          <a:bodyPr wrap="square">
+            <a:spAutoFit/>
+          </a:bodyPr>
+          <a:lstStyle/>
+          <a:p>
+            <a:pPr algn="l">
+              <a:lnSpc>
+                <a:spcPct val="115000"/>
+              </a:lnSpc>
+            </a:pPr>
+            <a:r>
+              <a:rPr sz="1700" b="0">
+                <a:solidFill>
+                  <a:srgbClr val="1F2937"/>
+                </a:solidFill>
+                <a:latin typeface="微软雅黑"/>
+              </a:rPr>
+              <a:t>推荐用四维规则（业务相关性、距离、数据可信度、紧迫度）；缺数据的维度显示「未知」</a:t>
+            </a:r>
+          </a:p>
+        </p:txBody>
+      </p:sp>
       <p:sp>
         <p:nvSpPr>
           <p:cNvPr id="13" name="TextBox 12"/>
@@ -8595,8 +6037,8 @@
         </p:nvSpPr>
         <p:spPr>
           <a:xfrm>
-            <a:off x="914400" y="4389120"/>
-            <a:ext cx="3108960" cy="457200"/>
+            <a:off x="868680" y="3758184"/>
+            <a:ext cx="274320" cy="365760"/>
           </a:xfrm>
           <a:prstGeom prst="rect">
             <a:avLst/>
@@ -8615,126 +6057,52 @@
               </a:lnSpc>
             </a:pPr>
             <a:r>
-              <a:rPr sz="2200" b="1">
+              <a:rPr sz="1700" b="0">
+                <a:solidFill>
+                  <a:srgbClr val="1D4ED8"/>
+                </a:solidFill>
+                <a:latin typeface="微软雅黑"/>
+              </a:rPr>
+              <a:t>· </a:t>
+            </a:r>
+          </a:p>
+        </p:txBody>
+      </p:sp>
+      <p:sp>
+        <p:nvSpPr>
+          <p:cNvPr id="14" name="TextBox 13"/>
+          <p:cNvSpPr txBox="1"/>
+          <p:nvPr/>
+        </p:nvSpPr>
+        <p:spPr>
+          <a:xfrm>
+            <a:off x="1179576" y="3758184"/>
+            <a:ext cx="10021824" cy="457200"/>
+          </a:xfrm>
+          <a:prstGeom prst="rect">
+            <a:avLst/>
+          </a:prstGeom>
+          <a:noFill/>
+        </p:spPr>
+        <p:txBody>
+          <a:bodyPr wrap="square">
+            <a:spAutoFit/>
+          </a:bodyPr>
+          <a:lstStyle/>
+          <a:p>
+            <a:pPr algn="l">
+              <a:lnSpc>
+                <a:spcPct val="115000"/>
+              </a:lnSpc>
+            </a:pPr>
+            <a:r>
+              <a:rPr sz="1700" b="0">
                 <a:solidFill>
                   <a:srgbClr val="1F2937"/>
                 </a:solidFill>
                 <a:latin typeface="微软雅黑"/>
               </a:rPr>
-              <a:t>③ 导出简报</a:t>
-            </a:r>
-          </a:p>
-        </p:txBody>
-      </p:sp>
-      <p:sp>
-        <p:nvSpPr>
-          <p:cNvPr id="14" name="TextBox 13"/>
-          <p:cNvSpPr txBox="1"/>
-          <p:nvPr/>
-        </p:nvSpPr>
-        <p:spPr>
-          <a:xfrm>
-            <a:off x="4114800" y="4443984"/>
-            <a:ext cx="7040880" cy="457200"/>
-          </a:xfrm>
-          <a:prstGeom prst="rect">
-            <a:avLst/>
-          </a:prstGeom>
-          <a:noFill/>
-        </p:spPr>
-        <p:txBody>
-          <a:bodyPr wrap="square">
-            <a:spAutoFit/>
-          </a:bodyPr>
-          <a:lstStyle/>
-          <a:p>
-            <a:pPr algn="l">
-              <a:lnSpc>
-                <a:spcPct val="115000"/>
-              </a:lnSpc>
-            </a:pPr>
-            <a:r>
-              <a:rPr sz="1600" b="0">
-                <a:solidFill>
-                  <a:srgbClr val="6B7280"/>
-                </a:solidFill>
-                <a:latin typeface="微软雅黑"/>
-              </a:rPr>
-              <a:t>商圈洞察：一份可进周会的 Excel，每行带来源</a:t>
-            </a:r>
-          </a:p>
-        </p:txBody>
-      </p:sp>
-      <p:cxnSp>
-        <p:nvCxnSpPr>
-          <p:cNvPr id="15" name="Connector 14"/>
-          <p:cNvCxnSpPr/>
-          <p:nvPr/>
-        </p:nvCxnSpPr>
-        <p:spPr>
-          <a:xfrm>
-            <a:off x="914400" y="5257800"/>
-            <a:ext cx="10241280" cy="0"/>
-          </a:xfrm>
-          <a:prstGeom prst="line">
-            <a:avLst/>
-          </a:prstGeom>
-          <a:ln w="11430">
-            <a:solidFill>
-              <a:srgbClr val="D8DEE6"/>
-            </a:solidFill>
-          </a:ln>
-        </p:spPr>
-        <p:style>
-          <a:lnRef idx="2">
-            <a:schemeClr val="accent1"/>
-          </a:lnRef>
-          <a:fillRef idx="0">
-            <a:schemeClr val="accent1"/>
-          </a:fillRef>
-          <a:effectRef idx="1">
-            <a:schemeClr val="accent1"/>
-          </a:effectRef>
-          <a:fontRef idx="minor">
-            <a:schemeClr val="tx1"/>
-          </a:fontRef>
-        </p:style>
-      </p:cxnSp>
-      <p:sp>
-        <p:nvSpPr>
-          <p:cNvPr id="16" name="TextBox 15"/>
-          <p:cNvSpPr txBox="1"/>
-          <p:nvPr/>
-        </p:nvSpPr>
-        <p:spPr>
-          <a:xfrm>
-            <a:off x="868680" y="5806440"/>
-            <a:ext cx="10332720" cy="365760"/>
-          </a:xfrm>
-          <a:prstGeom prst="rect">
-            <a:avLst/>
-          </a:prstGeom>
-          <a:noFill/>
-        </p:spPr>
-        <p:txBody>
-          <a:bodyPr wrap="square">
-            <a:spAutoFit/>
-          </a:bodyPr>
-          <a:lstStyle/>
-          <a:p>
-            <a:pPr algn="l">
-              <a:lnSpc>
-                <a:spcPct val="115000"/>
-              </a:lnSpc>
-            </a:pPr>
-            <a:r>
-              <a:rPr sz="1400" b="0">
-                <a:solidFill>
-                  <a:srgbClr val="6B7280"/>
-                </a:solidFill>
-                <a:latin typeface="微软雅黑"/>
-              </a:rPr>
-              <a:t>全程只用一个城市（太仓）+ 一家真实收录酒店 + 一条真实活动 + 一份导出文件。</a:t>
+              <a:t>同一家店的员工看到的是同一份状态，不用在群里反复对口径</a:t>
             </a:r>
           </a:p>
         </p:txBody>
@@ -8791,7 +6159,7 @@
                 </a:solidFill>
                 <a:latin typeface="微软雅黑"/>
               </a:rPr>
-              <a:t>演示 1/3</a:t>
+              <a:t>演示 3/3</a:t>
             </a:r>
           </a:p>
         </p:txBody>
@@ -8830,7 +6198,7 @@
                 </a:solidFill>
                 <a:latin typeface="微软雅黑"/>
               </a:rPr>
-              <a:t>① 发现活动：地图与清单</a:t>
+              <a:t>③ 导出简报：一份能进周会的 Excel</a:t>
             </a:r>
           </a:p>
         </p:txBody>
@@ -8905,1087 +6273,6 @@
                 <a:latin typeface="微软雅黑"/>
               </a:rPr>
               <a:t>6</a:t>
-            </a:r>
-          </a:p>
-        </p:txBody>
-      </p:sp>
-      <p:sp>
-        <p:nvSpPr>
-          <p:cNvPr id="6" name="TextBox 5"/>
-          <p:cNvSpPr txBox="1"/>
-          <p:nvPr/>
-        </p:nvSpPr>
-        <p:spPr>
-          <a:xfrm>
-            <a:off x="822960" y="6355080"/>
-            <a:ext cx="5486400" cy="274320"/>
-          </a:xfrm>
-          <a:prstGeom prst="rect">
-            <a:avLst/>
-          </a:prstGeom>
-          <a:noFill/>
-        </p:spPr>
-        <p:txBody>
-          <a:bodyPr wrap="square">
-            <a:spAutoFit/>
-          </a:bodyPr>
-          <a:lstStyle/>
-          <a:p>
-            <a:pPr algn="l">
-              <a:lnSpc>
-                <a:spcPct val="115000"/>
-              </a:lnSpc>
-            </a:pPr>
-            <a:r>
-              <a:rPr sz="1000" b="0">
-                <a:solidFill>
-                  <a:srgbClr val="6B7280"/>
-                </a:solidFill>
-                <a:latin typeface="微软雅黑"/>
-              </a:rPr>
-              <a:t>Menduner · ENT303TC 第 14 组</a:t>
-            </a:r>
-          </a:p>
-        </p:txBody>
-      </p:sp>
-      <p:sp>
-        <p:nvSpPr>
-          <p:cNvPr id="7" name="TextBox 6"/>
-          <p:cNvSpPr txBox="1"/>
-          <p:nvPr/>
-        </p:nvSpPr>
-        <p:spPr>
-          <a:xfrm>
-            <a:off x="868680" y="1783080"/>
-            <a:ext cx="274320" cy="365760"/>
-          </a:xfrm>
-          <a:prstGeom prst="rect">
-            <a:avLst/>
-          </a:prstGeom>
-          <a:noFill/>
-        </p:spPr>
-        <p:txBody>
-          <a:bodyPr wrap="square">
-            <a:spAutoFit/>
-          </a:bodyPr>
-          <a:lstStyle/>
-          <a:p>
-            <a:pPr algn="l">
-              <a:lnSpc>
-                <a:spcPct val="115000"/>
-              </a:lnSpc>
-            </a:pPr>
-            <a:r>
-              <a:rPr sz="1700" b="0">
-                <a:solidFill>
-                  <a:srgbClr val="1D4ED8"/>
-                </a:solidFill>
-                <a:latin typeface="微软雅黑"/>
-              </a:rPr>
-              <a:t>· </a:t>
-            </a:r>
-          </a:p>
-        </p:txBody>
-      </p:sp>
-      <p:sp>
-        <p:nvSpPr>
-          <p:cNvPr id="8" name="TextBox 7"/>
-          <p:cNvSpPr txBox="1"/>
-          <p:nvPr/>
-        </p:nvSpPr>
-        <p:spPr>
-          <a:xfrm>
-            <a:off x="1179576" y="1783080"/>
-            <a:ext cx="10021824" cy="457200"/>
-          </a:xfrm>
-          <a:prstGeom prst="rect">
-            <a:avLst/>
-          </a:prstGeom>
-          <a:noFill/>
-        </p:spPr>
-        <p:txBody>
-          <a:bodyPr wrap="square">
-            <a:spAutoFit/>
-          </a:bodyPr>
-          <a:lstStyle/>
-          <a:p>
-            <a:pPr algn="l">
-              <a:lnSpc>
-                <a:spcPct val="115000"/>
-              </a:lnSpc>
-            </a:pPr>
-            <a:r>
-              <a:rPr sz="1700" b="0">
-                <a:solidFill>
-                  <a:srgbClr val="1F2937"/>
-                </a:solidFill>
-                <a:latin typeface="微软雅黑"/>
-              </a:rPr>
-              <a:t>按年份、类别、区域筛选；演示数据默认关闭，已结束活动默认隐藏</a:t>
-            </a:r>
-          </a:p>
-        </p:txBody>
-      </p:sp>
-      <p:sp>
-        <p:nvSpPr>
-          <p:cNvPr id="9" name="TextBox 8"/>
-          <p:cNvSpPr txBox="1"/>
-          <p:nvPr/>
-        </p:nvSpPr>
-        <p:spPr>
-          <a:xfrm>
-            <a:off x="868680" y="2441448"/>
-            <a:ext cx="274320" cy="365760"/>
-          </a:xfrm>
-          <a:prstGeom prst="rect">
-            <a:avLst/>
-          </a:prstGeom>
-          <a:noFill/>
-        </p:spPr>
-        <p:txBody>
-          <a:bodyPr wrap="square">
-            <a:spAutoFit/>
-          </a:bodyPr>
-          <a:lstStyle/>
-          <a:p>
-            <a:pPr algn="l">
-              <a:lnSpc>
-                <a:spcPct val="115000"/>
-              </a:lnSpc>
-            </a:pPr>
-            <a:r>
-              <a:rPr sz="1700" b="0">
-                <a:solidFill>
-                  <a:srgbClr val="1D4ED8"/>
-                </a:solidFill>
-                <a:latin typeface="微软雅黑"/>
-              </a:rPr>
-              <a:t>· </a:t>
-            </a:r>
-          </a:p>
-        </p:txBody>
-      </p:sp>
-      <p:sp>
-        <p:nvSpPr>
-          <p:cNvPr id="10" name="TextBox 9"/>
-          <p:cNvSpPr txBox="1"/>
-          <p:nvPr/>
-        </p:nvSpPr>
-        <p:spPr>
-          <a:xfrm>
-            <a:off x="1179576" y="2441448"/>
-            <a:ext cx="10021824" cy="457200"/>
-          </a:xfrm>
-          <a:prstGeom prst="rect">
-            <a:avLst/>
-          </a:prstGeom>
-          <a:noFill/>
-        </p:spPr>
-        <p:txBody>
-          <a:bodyPr wrap="square">
-            <a:spAutoFit/>
-          </a:bodyPr>
-          <a:lstStyle/>
-          <a:p>
-            <a:pPr algn="l">
-              <a:lnSpc>
-                <a:spcPct val="115000"/>
-              </a:lnSpc>
-            </a:pPr>
-            <a:r>
-              <a:rPr sz="1700" b="0">
-                <a:solidFill>
-                  <a:srgbClr val="1F2937"/>
-                </a:solidFill>
-                <a:latin typeface="微软雅黑"/>
-              </a:rPr>
-              <a:t>月初默认只看本月，月份控件折叠起来不占位置（1440×900 下地图可见高度 44%）</a:t>
-            </a:r>
-          </a:p>
-        </p:txBody>
-      </p:sp>
-      <p:sp>
-        <p:nvSpPr>
-          <p:cNvPr id="11" name="TextBox 10"/>
-          <p:cNvSpPr txBox="1"/>
-          <p:nvPr/>
-        </p:nvSpPr>
-        <p:spPr>
-          <a:xfrm>
-            <a:off x="868680" y="3099815"/>
-            <a:ext cx="274320" cy="365760"/>
-          </a:xfrm>
-          <a:prstGeom prst="rect">
-            <a:avLst/>
-          </a:prstGeom>
-          <a:noFill/>
-        </p:spPr>
-        <p:txBody>
-          <a:bodyPr wrap="square">
-            <a:spAutoFit/>
-          </a:bodyPr>
-          <a:lstStyle/>
-          <a:p>
-            <a:pPr algn="l">
-              <a:lnSpc>
-                <a:spcPct val="115000"/>
-              </a:lnSpc>
-            </a:pPr>
-            <a:r>
-              <a:rPr sz="1700" b="0">
-                <a:solidFill>
-                  <a:srgbClr val="1D4ED8"/>
-                </a:solidFill>
-                <a:latin typeface="微软雅黑"/>
-              </a:rPr>
-              <a:t>· </a:t>
-            </a:r>
-          </a:p>
-        </p:txBody>
-      </p:sp>
-      <p:sp>
-        <p:nvSpPr>
-          <p:cNvPr id="12" name="TextBox 11"/>
-          <p:cNvSpPr txBox="1"/>
-          <p:nvPr/>
-        </p:nvSpPr>
-        <p:spPr>
-          <a:xfrm>
-            <a:off x="1179576" y="3099815"/>
-            <a:ext cx="10021824" cy="457200"/>
-          </a:xfrm>
-          <a:prstGeom prst="rect">
-            <a:avLst/>
-          </a:prstGeom>
-          <a:noFill/>
-        </p:spPr>
-        <p:txBody>
-          <a:bodyPr wrap="square">
-            <a:spAutoFit/>
-          </a:bodyPr>
-          <a:lstStyle/>
-          <a:p>
-            <a:pPr algn="l">
-              <a:lnSpc>
-                <a:spcPct val="115000"/>
-              </a:lnSpc>
-            </a:pPr>
-            <a:r>
-              <a:rPr sz="1700" b="0">
-                <a:solidFill>
-                  <a:srgbClr val="1F2937"/>
-                </a:solidFill>
-                <a:latin typeface="微软雅黑"/>
-              </a:rPr>
-              <a:t>清单按「即将开始 / 进行中」分组；缺坐标的活动单独标注，不从统计里消失</a:t>
-            </a:r>
-          </a:p>
-        </p:txBody>
-      </p:sp>
-      <p:sp>
-        <p:nvSpPr>
-          <p:cNvPr id="13" name="TextBox 12"/>
-          <p:cNvSpPr txBox="1"/>
-          <p:nvPr/>
-        </p:nvSpPr>
-        <p:spPr>
-          <a:xfrm>
-            <a:off x="868680" y="3758184"/>
-            <a:ext cx="274320" cy="365760"/>
-          </a:xfrm>
-          <a:prstGeom prst="rect">
-            <a:avLst/>
-          </a:prstGeom>
-          <a:noFill/>
-        </p:spPr>
-        <p:txBody>
-          <a:bodyPr wrap="square">
-            <a:spAutoFit/>
-          </a:bodyPr>
-          <a:lstStyle/>
-          <a:p>
-            <a:pPr algn="l">
-              <a:lnSpc>
-                <a:spcPct val="115000"/>
-              </a:lnSpc>
-            </a:pPr>
-            <a:r>
-              <a:rPr sz="1700" b="0">
-                <a:solidFill>
-                  <a:srgbClr val="1D4ED8"/>
-                </a:solidFill>
-                <a:latin typeface="微软雅黑"/>
-              </a:rPr>
-              <a:t>· </a:t>
-            </a:r>
-          </a:p>
-        </p:txBody>
-      </p:sp>
-      <p:sp>
-        <p:nvSpPr>
-          <p:cNvPr id="14" name="TextBox 13"/>
-          <p:cNvSpPr txBox="1"/>
-          <p:nvPr/>
-        </p:nvSpPr>
-        <p:spPr>
-          <a:xfrm>
-            <a:off x="1179576" y="3758184"/>
-            <a:ext cx="10021824" cy="457200"/>
-          </a:xfrm>
-          <a:prstGeom prst="rect">
-            <a:avLst/>
-          </a:prstGeom>
-          <a:noFill/>
-        </p:spPr>
-        <p:txBody>
-          <a:bodyPr wrap="square">
-            <a:spAutoFit/>
-          </a:bodyPr>
-          <a:lstStyle/>
-          <a:p>
-            <a:pPr algn="l">
-              <a:lnSpc>
-                <a:spcPct val="115000"/>
-              </a:lnSpc>
-            </a:pPr>
-            <a:r>
-              <a:rPr sz="1700" b="0">
-                <a:solidFill>
-                  <a:srgbClr val="1F2937"/>
-                </a:solidFill>
-                <a:latin typeface="微软雅黑"/>
-              </a:rPr>
-              <a:t>每个活动点开能看到来源、核验状态与缺失字段</a:t>
-            </a:r>
-          </a:p>
-        </p:txBody>
-      </p:sp>
-      <p:sp>
-        <p:nvSpPr>
-          <p:cNvPr id="15" name="TextBox 14"/>
-          <p:cNvSpPr txBox="1"/>
-          <p:nvPr/>
-        </p:nvSpPr>
-        <p:spPr>
-          <a:xfrm>
-            <a:off x="868680" y="5074920"/>
-            <a:ext cx="10332720" cy="457200"/>
-          </a:xfrm>
-          <a:prstGeom prst="rect">
-            <a:avLst/>
-          </a:prstGeom>
-          <a:noFill/>
-        </p:spPr>
-        <p:txBody>
-          <a:bodyPr wrap="square">
-            <a:spAutoFit/>
-          </a:bodyPr>
-          <a:lstStyle/>
-          <a:p>
-            <a:pPr algn="l">
-              <a:lnSpc>
-                <a:spcPct val="115000"/>
-              </a:lnSpc>
-            </a:pPr>
-            <a:r>
-              <a:rPr sz="1600" b="0">
-                <a:solidFill>
-                  <a:srgbClr val="1D4ED8"/>
-                </a:solidFill>
-                <a:latin typeface="微软雅黑"/>
-              </a:rPr>
-              <a:t>关键句：我们整理的是公开活动信息，不是城市全部活动。</a:t>
-            </a:r>
-          </a:p>
-        </p:txBody>
-      </p:sp>
-    </p:spTree>
-  </p:cSld>
-  <p:clrMapOvr>
-    <a:masterClrMapping/>
-  </p:clrMapOvr>
-</p:sld>
-</file>
-
-<file path=ppt/slides/slide7.xml><?xml version="1.0" encoding="utf-8"?>
-<p:sld xmlns:a="http://schemas.openxmlformats.org/drawingml/2006/main" xmlns:p="http://schemas.openxmlformats.org/presentationml/2006/main" xmlns:r="http://schemas.openxmlformats.org/officeDocument/2006/relationships">
-  <p:cSld>
-    <p:spTree>
-      <p:nvGrpSpPr>
-        <p:cNvPr id="1" name=""/>
-        <p:cNvGrpSpPr/>
-        <p:nvPr/>
-      </p:nvGrpSpPr>
-      <p:grpSpPr/>
-      <p:sp>
-        <p:nvSpPr>
-          <p:cNvPr id="2" name="TextBox 1"/>
-          <p:cNvSpPr txBox="1"/>
-          <p:nvPr/>
-        </p:nvSpPr>
-        <p:spPr>
-          <a:xfrm>
-            <a:off x="822960" y="475488"/>
-            <a:ext cx="10515600" cy="292608"/>
-          </a:xfrm>
-          <a:prstGeom prst="rect">
-            <a:avLst/>
-          </a:prstGeom>
-          <a:noFill/>
-        </p:spPr>
-        <p:txBody>
-          <a:bodyPr wrap="square">
-            <a:spAutoFit/>
-          </a:bodyPr>
-          <a:lstStyle/>
-          <a:p>
-            <a:pPr algn="l">
-              <a:lnSpc>
-                <a:spcPct val="115000"/>
-              </a:lnSpc>
-            </a:pPr>
-            <a:r>
-              <a:rPr sz="1200" b="0">
-                <a:solidFill>
-                  <a:srgbClr val="6B7280"/>
-                </a:solidFill>
-                <a:latin typeface="微软雅黑"/>
-              </a:rPr>
-              <a:t>演示 2/3</a:t>
-            </a:r>
-          </a:p>
-        </p:txBody>
-      </p:sp>
-      <p:sp>
-        <p:nvSpPr>
-          <p:cNvPr id="3" name="TextBox 2"/>
-          <p:cNvSpPr txBox="1"/>
-          <p:nvPr/>
-        </p:nvSpPr>
-        <p:spPr>
-          <a:xfrm>
-            <a:off x="822960" y="749808"/>
-            <a:ext cx="10607040" cy="640080"/>
-          </a:xfrm>
-          <a:prstGeom prst="rect">
-            <a:avLst/>
-          </a:prstGeom>
-          <a:noFill/>
-        </p:spPr>
-        <p:txBody>
-          <a:bodyPr wrap="square">
-            <a:spAutoFit/>
-          </a:bodyPr>
-          <a:lstStyle/>
-          <a:p>
-            <a:pPr algn="l">
-              <a:lnSpc>
-                <a:spcPct val="115000"/>
-              </a:lnSpc>
-            </a:pPr>
-            <a:r>
-              <a:rPr sz="3000" b="1">
-                <a:solidFill>
-                  <a:srgbClr val="1F2937"/>
-                </a:solidFill>
-                <a:latin typeface="微软雅黑"/>
-              </a:rPr>
-              <a:t>② 酒店跟进：把这些活动变成待办</a:t>
-            </a:r>
-          </a:p>
-        </p:txBody>
-      </p:sp>
-      <p:cxnSp>
-        <p:nvCxnSpPr>
-          <p:cNvPr id="4" name="Connector 3"/>
-          <p:cNvCxnSpPr/>
-          <p:nvPr/>
-        </p:nvCxnSpPr>
-        <p:spPr>
-          <a:xfrm>
-            <a:off x="822960" y="1481328"/>
-            <a:ext cx="10543032" cy="0"/>
-          </a:xfrm>
-          <a:prstGeom prst="line">
-            <a:avLst/>
-          </a:prstGeom>
-          <a:ln w="11430">
-            <a:solidFill>
-              <a:srgbClr val="D8DEE6"/>
-            </a:solidFill>
-          </a:ln>
-        </p:spPr>
-        <p:style>
-          <a:lnRef idx="2">
-            <a:schemeClr val="accent1"/>
-          </a:lnRef>
-          <a:fillRef idx="0">
-            <a:schemeClr val="accent1"/>
-          </a:fillRef>
-          <a:effectRef idx="1">
-            <a:schemeClr val="accent1"/>
-          </a:effectRef>
-          <a:fontRef idx="minor">
-            <a:schemeClr val="tx1"/>
-          </a:fontRef>
-        </p:style>
-      </p:cxnSp>
-      <p:sp>
-        <p:nvSpPr>
-          <p:cNvPr id="5" name="TextBox 4"/>
-          <p:cNvSpPr txBox="1"/>
-          <p:nvPr/>
-        </p:nvSpPr>
-        <p:spPr>
-          <a:xfrm>
-            <a:off x="11292840" y="6355080"/>
-            <a:ext cx="548640" cy="274320"/>
-          </a:xfrm>
-          <a:prstGeom prst="rect">
-            <a:avLst/>
-          </a:prstGeom>
-          <a:noFill/>
-        </p:spPr>
-        <p:txBody>
-          <a:bodyPr wrap="square">
-            <a:spAutoFit/>
-          </a:bodyPr>
-          <a:lstStyle/>
-          <a:p>
-            <a:pPr algn="r">
-              <a:lnSpc>
-                <a:spcPct val="115000"/>
-              </a:lnSpc>
-            </a:pPr>
-            <a:r>
-              <a:rPr sz="1000" b="0">
-                <a:solidFill>
-                  <a:srgbClr val="6B7280"/>
-                </a:solidFill>
-                <a:latin typeface="微软雅黑"/>
-              </a:rPr>
-              <a:t>7</a:t>
-            </a:r>
-          </a:p>
-        </p:txBody>
-      </p:sp>
-      <p:sp>
-        <p:nvSpPr>
-          <p:cNvPr id="6" name="TextBox 5"/>
-          <p:cNvSpPr txBox="1"/>
-          <p:nvPr/>
-        </p:nvSpPr>
-        <p:spPr>
-          <a:xfrm>
-            <a:off x="822960" y="6355080"/>
-            <a:ext cx="5486400" cy="274320"/>
-          </a:xfrm>
-          <a:prstGeom prst="rect">
-            <a:avLst/>
-          </a:prstGeom>
-          <a:noFill/>
-        </p:spPr>
-        <p:txBody>
-          <a:bodyPr wrap="square">
-            <a:spAutoFit/>
-          </a:bodyPr>
-          <a:lstStyle/>
-          <a:p>
-            <a:pPr algn="l">
-              <a:lnSpc>
-                <a:spcPct val="115000"/>
-              </a:lnSpc>
-            </a:pPr>
-            <a:r>
-              <a:rPr sz="1000" b="0">
-                <a:solidFill>
-                  <a:srgbClr val="6B7280"/>
-                </a:solidFill>
-                <a:latin typeface="微软雅黑"/>
-              </a:rPr>
-              <a:t>Menduner · ENT303TC 第 14 组</a:t>
-            </a:r>
-          </a:p>
-        </p:txBody>
-      </p:sp>
-      <p:sp>
-        <p:nvSpPr>
-          <p:cNvPr id="7" name="TextBox 6"/>
-          <p:cNvSpPr txBox="1"/>
-          <p:nvPr/>
-        </p:nvSpPr>
-        <p:spPr>
-          <a:xfrm>
-            <a:off x="868680" y="1783080"/>
-            <a:ext cx="274320" cy="365760"/>
-          </a:xfrm>
-          <a:prstGeom prst="rect">
-            <a:avLst/>
-          </a:prstGeom>
-          <a:noFill/>
-        </p:spPr>
-        <p:txBody>
-          <a:bodyPr wrap="square">
-            <a:spAutoFit/>
-          </a:bodyPr>
-          <a:lstStyle/>
-          <a:p>
-            <a:pPr algn="l">
-              <a:lnSpc>
-                <a:spcPct val="115000"/>
-              </a:lnSpc>
-            </a:pPr>
-            <a:r>
-              <a:rPr sz="1700" b="0">
-                <a:solidFill>
-                  <a:srgbClr val="1D4ED8"/>
-                </a:solidFill>
-                <a:latin typeface="微软雅黑"/>
-              </a:rPr>
-              <a:t>· </a:t>
-            </a:r>
-          </a:p>
-        </p:txBody>
-      </p:sp>
-      <p:sp>
-        <p:nvSpPr>
-          <p:cNvPr id="8" name="TextBox 7"/>
-          <p:cNvSpPr txBox="1"/>
-          <p:nvPr/>
-        </p:nvSpPr>
-        <p:spPr>
-          <a:xfrm>
-            <a:off x="1179576" y="1783080"/>
-            <a:ext cx="10021824" cy="457200"/>
-          </a:xfrm>
-          <a:prstGeom prst="rect">
-            <a:avLst/>
-          </a:prstGeom>
-          <a:noFill/>
-        </p:spPr>
-        <p:txBody>
-          <a:bodyPr wrap="square">
-            <a:spAutoFit/>
-          </a:bodyPr>
-          <a:lstStyle/>
-          <a:p>
-            <a:pPr algn="l">
-              <a:lnSpc>
-                <a:spcPct val="115000"/>
-              </a:lnSpc>
-            </a:pPr>
-            <a:r>
-              <a:rPr sz="1700" b="0">
-                <a:solidFill>
-                  <a:srgbClr val="1F2937"/>
-                </a:solidFill>
-                <a:latin typeface="微软雅黑"/>
-              </a:rPr>
-              <a:t>工作台给每家店列出未来 7 天值得关注的活动，并写明推荐理由</a:t>
-            </a:r>
-          </a:p>
-        </p:txBody>
-      </p:sp>
-      <p:sp>
-        <p:nvSpPr>
-          <p:cNvPr id="9" name="TextBox 8"/>
-          <p:cNvSpPr txBox="1"/>
-          <p:nvPr/>
-        </p:nvSpPr>
-        <p:spPr>
-          <a:xfrm>
-            <a:off x="868680" y="2441448"/>
-            <a:ext cx="274320" cy="365760"/>
-          </a:xfrm>
-          <a:prstGeom prst="rect">
-            <a:avLst/>
-          </a:prstGeom>
-          <a:noFill/>
-        </p:spPr>
-        <p:txBody>
-          <a:bodyPr wrap="square">
-            <a:spAutoFit/>
-          </a:bodyPr>
-          <a:lstStyle/>
-          <a:p>
-            <a:pPr algn="l">
-              <a:lnSpc>
-                <a:spcPct val="115000"/>
-              </a:lnSpc>
-            </a:pPr>
-            <a:r>
-              <a:rPr sz="1700" b="0">
-                <a:solidFill>
-                  <a:srgbClr val="1D4ED8"/>
-                </a:solidFill>
-                <a:latin typeface="微软雅黑"/>
-              </a:rPr>
-              <a:t>· </a:t>
-            </a:r>
-          </a:p>
-        </p:txBody>
-      </p:sp>
-      <p:sp>
-        <p:nvSpPr>
-          <p:cNvPr id="10" name="TextBox 9"/>
-          <p:cNvSpPr txBox="1"/>
-          <p:nvPr/>
-        </p:nvSpPr>
-        <p:spPr>
-          <a:xfrm>
-            <a:off x="1179576" y="2441448"/>
-            <a:ext cx="10021824" cy="457200"/>
-          </a:xfrm>
-          <a:prstGeom prst="rect">
-            <a:avLst/>
-          </a:prstGeom>
-          <a:noFill/>
-        </p:spPr>
-        <p:txBody>
-          <a:bodyPr wrap="square">
-            <a:spAutoFit/>
-          </a:bodyPr>
-          <a:lstStyle/>
-          <a:p>
-            <a:pPr algn="l">
-              <a:lnSpc>
-                <a:spcPct val="115000"/>
-              </a:lnSpc>
-            </a:pPr>
-            <a:r>
-              <a:rPr sz="1700" b="0">
-                <a:solidFill>
-                  <a:srgbClr val="1F2937"/>
-                </a:solidFill>
-                <a:latin typeface="微软雅黑"/>
-              </a:rPr>
-              <a:t>四个状态：关注 / 待跟进 / 已跟进 / 忽略；另有「是否采纳建议」记录</a:t>
-            </a:r>
-          </a:p>
-        </p:txBody>
-      </p:sp>
-      <p:sp>
-        <p:nvSpPr>
-          <p:cNvPr id="11" name="TextBox 10"/>
-          <p:cNvSpPr txBox="1"/>
-          <p:nvPr/>
-        </p:nvSpPr>
-        <p:spPr>
-          <a:xfrm>
-            <a:off x="868680" y="3099815"/>
-            <a:ext cx="274320" cy="365760"/>
-          </a:xfrm>
-          <a:prstGeom prst="rect">
-            <a:avLst/>
-          </a:prstGeom>
-          <a:noFill/>
-        </p:spPr>
-        <p:txBody>
-          <a:bodyPr wrap="square">
-            <a:spAutoFit/>
-          </a:bodyPr>
-          <a:lstStyle/>
-          <a:p>
-            <a:pPr algn="l">
-              <a:lnSpc>
-                <a:spcPct val="115000"/>
-              </a:lnSpc>
-            </a:pPr>
-            <a:r>
-              <a:rPr sz="1700" b="0">
-                <a:solidFill>
-                  <a:srgbClr val="1D4ED8"/>
-                </a:solidFill>
-                <a:latin typeface="微软雅黑"/>
-              </a:rPr>
-              <a:t>· </a:t>
-            </a:r>
-          </a:p>
-        </p:txBody>
-      </p:sp>
-      <p:sp>
-        <p:nvSpPr>
-          <p:cNvPr id="12" name="TextBox 11"/>
-          <p:cNvSpPr txBox="1"/>
-          <p:nvPr/>
-        </p:nvSpPr>
-        <p:spPr>
-          <a:xfrm>
-            <a:off x="1179576" y="3099815"/>
-            <a:ext cx="10021824" cy="457200"/>
-          </a:xfrm>
-          <a:prstGeom prst="rect">
-            <a:avLst/>
-          </a:prstGeom>
-          <a:noFill/>
-        </p:spPr>
-        <p:txBody>
-          <a:bodyPr wrap="square">
-            <a:spAutoFit/>
-          </a:bodyPr>
-          <a:lstStyle/>
-          <a:p>
-            <a:pPr algn="l">
-              <a:lnSpc>
-                <a:spcPct val="115000"/>
-              </a:lnSpc>
-            </a:pPr>
-            <a:r>
-              <a:rPr sz="1700" b="0">
-                <a:solidFill>
-                  <a:srgbClr val="1F2937"/>
-                </a:solidFill>
-                <a:latin typeface="微软雅黑"/>
-              </a:rPr>
-              <a:t>推荐用四维规则（业务相关性、距离、数据可信度、紧迫度）；缺数据的维度显示「未知」</a:t>
-            </a:r>
-          </a:p>
-        </p:txBody>
-      </p:sp>
-      <p:sp>
-        <p:nvSpPr>
-          <p:cNvPr id="13" name="TextBox 12"/>
-          <p:cNvSpPr txBox="1"/>
-          <p:nvPr/>
-        </p:nvSpPr>
-        <p:spPr>
-          <a:xfrm>
-            <a:off x="868680" y="3758184"/>
-            <a:ext cx="274320" cy="365760"/>
-          </a:xfrm>
-          <a:prstGeom prst="rect">
-            <a:avLst/>
-          </a:prstGeom>
-          <a:noFill/>
-        </p:spPr>
-        <p:txBody>
-          <a:bodyPr wrap="square">
-            <a:spAutoFit/>
-          </a:bodyPr>
-          <a:lstStyle/>
-          <a:p>
-            <a:pPr algn="l">
-              <a:lnSpc>
-                <a:spcPct val="115000"/>
-              </a:lnSpc>
-            </a:pPr>
-            <a:r>
-              <a:rPr sz="1700" b="0">
-                <a:solidFill>
-                  <a:srgbClr val="1D4ED8"/>
-                </a:solidFill>
-                <a:latin typeface="微软雅黑"/>
-              </a:rPr>
-              <a:t>· </a:t>
-            </a:r>
-          </a:p>
-        </p:txBody>
-      </p:sp>
-      <p:sp>
-        <p:nvSpPr>
-          <p:cNvPr id="14" name="TextBox 13"/>
-          <p:cNvSpPr txBox="1"/>
-          <p:nvPr/>
-        </p:nvSpPr>
-        <p:spPr>
-          <a:xfrm>
-            <a:off x="1179576" y="3758184"/>
-            <a:ext cx="10021824" cy="457200"/>
-          </a:xfrm>
-          <a:prstGeom prst="rect">
-            <a:avLst/>
-          </a:prstGeom>
-          <a:noFill/>
-        </p:spPr>
-        <p:txBody>
-          <a:bodyPr wrap="square">
-            <a:spAutoFit/>
-          </a:bodyPr>
-          <a:lstStyle/>
-          <a:p>
-            <a:pPr algn="l">
-              <a:lnSpc>
-                <a:spcPct val="115000"/>
-              </a:lnSpc>
-            </a:pPr>
-            <a:r>
-              <a:rPr sz="1700" b="0">
-                <a:solidFill>
-                  <a:srgbClr val="1F2937"/>
-                </a:solidFill>
-                <a:latin typeface="微软雅黑"/>
-              </a:rPr>
-              <a:t>同一家店的员工看到的是同一份状态，不用在群里反复对口径</a:t>
-            </a:r>
-          </a:p>
-        </p:txBody>
-      </p:sp>
-    </p:spTree>
-  </p:cSld>
-  <p:clrMapOvr>
-    <a:masterClrMapping/>
-  </p:clrMapOvr>
-</p:sld>
-</file>
-
-<file path=ppt/slides/slide8.xml><?xml version="1.0" encoding="utf-8"?>
-<p:sld xmlns:a="http://schemas.openxmlformats.org/drawingml/2006/main" xmlns:p="http://schemas.openxmlformats.org/presentationml/2006/main" xmlns:r="http://schemas.openxmlformats.org/officeDocument/2006/relationships">
-  <p:cSld>
-    <p:spTree>
-      <p:nvGrpSpPr>
-        <p:cNvPr id="1" name=""/>
-        <p:cNvGrpSpPr/>
-        <p:nvPr/>
-      </p:nvGrpSpPr>
-      <p:grpSpPr/>
-      <p:sp>
-        <p:nvSpPr>
-          <p:cNvPr id="2" name="TextBox 1"/>
-          <p:cNvSpPr txBox="1"/>
-          <p:nvPr/>
-        </p:nvSpPr>
-        <p:spPr>
-          <a:xfrm>
-            <a:off x="822960" y="475488"/>
-            <a:ext cx="10515600" cy="292608"/>
-          </a:xfrm>
-          <a:prstGeom prst="rect">
-            <a:avLst/>
-          </a:prstGeom>
-          <a:noFill/>
-        </p:spPr>
-        <p:txBody>
-          <a:bodyPr wrap="square">
-            <a:spAutoFit/>
-          </a:bodyPr>
-          <a:lstStyle/>
-          <a:p>
-            <a:pPr algn="l">
-              <a:lnSpc>
-                <a:spcPct val="115000"/>
-              </a:lnSpc>
-            </a:pPr>
-            <a:r>
-              <a:rPr sz="1200" b="0">
-                <a:solidFill>
-                  <a:srgbClr val="6B7280"/>
-                </a:solidFill>
-                <a:latin typeface="微软雅黑"/>
-              </a:rPr>
-              <a:t>演示 3/3</a:t>
-            </a:r>
-          </a:p>
-        </p:txBody>
-      </p:sp>
-      <p:sp>
-        <p:nvSpPr>
-          <p:cNvPr id="3" name="TextBox 2"/>
-          <p:cNvSpPr txBox="1"/>
-          <p:nvPr/>
-        </p:nvSpPr>
-        <p:spPr>
-          <a:xfrm>
-            <a:off x="822960" y="749808"/>
-            <a:ext cx="10607040" cy="640080"/>
-          </a:xfrm>
-          <a:prstGeom prst="rect">
-            <a:avLst/>
-          </a:prstGeom>
-          <a:noFill/>
-        </p:spPr>
-        <p:txBody>
-          <a:bodyPr wrap="square">
-            <a:spAutoFit/>
-          </a:bodyPr>
-          <a:lstStyle/>
-          <a:p>
-            <a:pPr algn="l">
-              <a:lnSpc>
-                <a:spcPct val="115000"/>
-              </a:lnSpc>
-            </a:pPr>
-            <a:r>
-              <a:rPr sz="3000" b="1">
-                <a:solidFill>
-                  <a:srgbClr val="1F2937"/>
-                </a:solidFill>
-                <a:latin typeface="微软雅黑"/>
-              </a:rPr>
-              <a:t>③ 导出简报：一份能进周会的 Excel</a:t>
-            </a:r>
-          </a:p>
-        </p:txBody>
-      </p:sp>
-      <p:cxnSp>
-        <p:nvCxnSpPr>
-          <p:cNvPr id="4" name="Connector 3"/>
-          <p:cNvCxnSpPr/>
-          <p:nvPr/>
-        </p:nvCxnSpPr>
-        <p:spPr>
-          <a:xfrm>
-            <a:off x="822960" y="1481328"/>
-            <a:ext cx="10543032" cy="0"/>
-          </a:xfrm>
-          <a:prstGeom prst="line">
-            <a:avLst/>
-          </a:prstGeom>
-          <a:ln w="11430">
-            <a:solidFill>
-              <a:srgbClr val="D8DEE6"/>
-            </a:solidFill>
-          </a:ln>
-        </p:spPr>
-        <p:style>
-          <a:lnRef idx="2">
-            <a:schemeClr val="accent1"/>
-          </a:lnRef>
-          <a:fillRef idx="0">
-            <a:schemeClr val="accent1"/>
-          </a:fillRef>
-          <a:effectRef idx="1">
-            <a:schemeClr val="accent1"/>
-          </a:effectRef>
-          <a:fontRef idx="minor">
-            <a:schemeClr val="tx1"/>
-          </a:fontRef>
-        </p:style>
-      </p:cxnSp>
-      <p:sp>
-        <p:nvSpPr>
-          <p:cNvPr id="5" name="TextBox 4"/>
-          <p:cNvSpPr txBox="1"/>
-          <p:nvPr/>
-        </p:nvSpPr>
-        <p:spPr>
-          <a:xfrm>
-            <a:off x="11292840" y="6355080"/>
-            <a:ext cx="548640" cy="274320"/>
-          </a:xfrm>
-          <a:prstGeom prst="rect">
-            <a:avLst/>
-          </a:prstGeom>
-          <a:noFill/>
-        </p:spPr>
-        <p:txBody>
-          <a:bodyPr wrap="square">
-            <a:spAutoFit/>
-          </a:bodyPr>
-          <a:lstStyle/>
-          <a:p>
-            <a:pPr algn="r">
-              <a:lnSpc>
-                <a:spcPct val="115000"/>
-              </a:lnSpc>
-            </a:pPr>
-            <a:r>
-              <a:rPr sz="1000" b="0">
-                <a:solidFill>
-                  <a:srgbClr val="6B7280"/>
-                </a:solidFill>
-                <a:latin typeface="微软雅黑"/>
-              </a:rPr>
-              <a:t>8</a:t>
             </a:r>
           </a:p>
         </p:txBody>
@@ -10338,7 +6625,7 @@
 </p:sld>
 </file>
 
-<file path=ppt/slides/slide9.xml><?xml version="1.0" encoding="utf-8"?>
+<file path=ppt/slides/slide7.xml><?xml version="1.0" encoding="utf-8"?>
 <p:sld xmlns:a="http://schemas.openxmlformats.org/drawingml/2006/main" xmlns:p="http://schemas.openxmlformats.org/presentationml/2006/main" xmlns:r="http://schemas.openxmlformats.org/officeDocument/2006/relationships">
   <p:cSld>
     <p:spTree>
@@ -10382,7 +6669,7 @@
                 </a:solidFill>
                 <a:latin typeface="微软雅黑"/>
               </a:rPr>
-              <a:t>附录</a:t>
+              <a:t>合作请求</a:t>
             </a:r>
           </a:p>
         </p:txBody>
@@ -10421,7 +6708,7 @@
                 </a:solidFill>
                 <a:latin typeface="微软雅黑"/>
               </a:rPr>
-              <a:t>其他功能：老师想深入看时我们再打开</a:t>
+              <a:t>想请老师帮的三件事</a:t>
             </a:r>
           </a:p>
         </p:txBody>
@@ -10495,7 +6782,7 @@
                 </a:solidFill>
                 <a:latin typeface="微软雅黑"/>
               </a:rPr>
-              <a:t>9</a:t>
+              <a:t>7</a:t>
             </a:r>
           </a:p>
         </p:txBody>
@@ -10549,7 +6836,7 @@
         </p:nvGraphicFramePr>
         <p:xfrm>
           <a:off x="868680" y="1783080"/>
-          <a:ext cx="10332720" cy="3200400"/>
+          <a:ext cx="10332720" cy="2852928"/>
         </p:xfrm>
         <a:graphic>
           <a:graphicData uri="http://schemas.openxmlformats.org/drawingml/2006/table">
@@ -10558,10 +6845,10 @@
                 <a:tableStyleId>{2D5ABB26-0587-4C30-8999-92F81FD0307C}</a:tableStyleId>
               </a:tblPr>
               <a:tblGrid>
-                <a:gridCol w="2286000"/>
-                <a:gridCol w="8046720"/>
+                <a:gridCol w="6035040"/>
+                <a:gridCol w="4297680"/>
               </a:tblGrid>
-              <a:tr h="457200">
+              <a:tr h="713232">
                 <a:tc>
                   <a:txBody>
                     <a:bodyPr/>
@@ -10573,13 +6860,13 @@
                         </a:lnSpc>
                       </a:pPr>
                       <a:r>
-                        <a:rPr sz="900" b="1">
+                        <a:rPr sz="1000" b="1">
                           <a:solidFill>
                             <a:srgbClr val="6B7280"/>
                           </a:solidFill>
                           <a:latin typeface="微软雅黑"/>
                         </a:rPr>
-                        <a:t>页面</a:t>
+                        <a:t>层级 · 请求</a:t>
                       </a:r>
                     </a:p>
                   </a:txBody>
@@ -10596,20 +6883,20 @@
                         </a:lnSpc>
                       </a:pPr>
                       <a:r>
-                        <a:rPr sz="900" b="1">
+                        <a:rPr sz="1000" b="1">
                           <a:solidFill>
                             <a:srgbClr val="6B7280"/>
                           </a:solidFill>
                           <a:latin typeface="微软雅黑"/>
                         </a:rPr>
-                        <a:t>回答什么问题</a:t>
+                        <a:t>我们的承诺</a:t>
                       </a:r>
                     </a:p>
                   </a:txBody>
                   <a:tcPr marL="73152" marR="73152" marT="27432" marB="27432" anchor="ctr"/>
                 </a:tc>
               </a:tr>
-              <a:tr h="457200">
+              <a:tr h="713232">
                 <a:tc>
                   <a:txBody>
                     <a:bodyPr/>
@@ -10621,13 +6908,13 @@
                         </a:lnSpc>
                       </a:pPr>
                       <a:r>
-                        <a:rPr sz="1050" b="0">
+                        <a:rPr sz="1150" b="0">
                           <a:solidFill>
                             <a:srgbClr val="1F2937"/>
                           </a:solidFill>
                           <a:latin typeface="微软雅黑"/>
                         </a:rPr>
-                        <a:t>知识图谱</a:t>
+                        <a:t>第一层：帮我们评审一份真实城市简报，指出无效字段与缺失信息</a:t>
                       </a:r>
                     </a:p>
                   </a:txBody>
@@ -10644,20 +6931,20 @@
                         </a:lnSpc>
                       </a:pPr>
                       <a:r>
-                        <a:rPr sz="1050" b="0">
+                        <a:rPr sz="1150" b="0">
                           <a:solidFill>
                             <a:srgbClr val="1F2937"/>
                           </a:solidFill>
                           <a:latin typeface="微软雅黑"/>
                         </a:rPr>
-                        <a:t>一个活动和哪些场馆、地区、酒店有关；缺的关系写「待补充」</a:t>
+                        <a:t>不增加企业同事工作量</a:t>
                       </a:r>
                     </a:p>
                   </a:txBody>
                   <a:tcPr marL="73152" marR="73152" marT="27432" marB="27432" anchor="ctr"/>
                 </a:tc>
               </a:tr>
-              <a:tr h="457200">
+              <a:tr h="713232">
                 <a:tc>
                   <a:txBody>
                     <a:bodyPr/>
@@ -10669,13 +6956,13 @@
                         </a:lnSpc>
                       </a:pPr>
                       <a:r>
-                        <a:rPr sz="1050" b="0">
+                        <a:rPr sz="1150" b="0">
                           <a:solidFill>
                             <a:srgbClr val="1F2937"/>
                           </a:solidFill>
                           <a:latin typeface="微软雅黑"/>
                         </a:rPr>
-                        <a:t>商圈洞察</a:t>
+                        <a:t>第二层：20–30 分钟，与市场/销售/收益岗位交流业务流程</a:t>
                       </a:r>
                     </a:p>
                   </a:txBody>
@@ -10692,20 +6979,20 @@
                         </a:lnSpc>
                       </a:pPr>
                       <a:r>
-                        <a:rPr sz="1050" b="0">
+                        <a:rPr sz="1150" b="0">
                           <a:solidFill>
                             <a:srgbClr val="1F2937"/>
                           </a:solidFill>
                           <a:latin typeface="微软雅黑"/>
                         </a:rPr>
-                        <a:t>行政区与商业商圈分开统计；经济情景是参数假设，缺参数不出金额</a:t>
+                        <a:t>提前给议题，不超时</a:t>
                       </a:r>
                     </a:p>
                   </a:txBody>
                   <a:tcPr marL="73152" marR="73152" marT="27432" marB="27432" anchor="ctr"/>
                 </a:tc>
               </a:tr>
-              <a:tr h="457200">
+              <a:tr h="713232">
                 <a:tc>
                   <a:txBody>
                     <a:bodyPr/>
@@ -10717,13 +7004,13 @@
                         </a:lnSpc>
                       </a:pPr>
                       <a:r>
-                        <a:rPr sz="1050" b="0">
+                        <a:rPr sz="1150" b="0">
                           <a:solidFill>
                             <a:srgbClr val="1F2937"/>
                           </a:solidFill>
                           <a:latin typeface="微软雅黑"/>
                         </a:rPr>
-                        <a:t>酒店活动情报</a:t>
+                        <a:t>第三层：推荐一家合适酒店，做单城市小范围验证</a:t>
                       </a:r>
                     </a:p>
                   </a:txBody>
@@ -10740,20 +7027,368 @@
                         </a:lnSpc>
                       </a:pPr>
                       <a:r>
-                        <a:rPr sz="1050" b="0">
+                        <a:rPr sz="1150" b="0">
                           <a:solidFill>
                             <a:srgbClr val="1F2937"/>
                           </a:solidFill>
                           <a:latin typeface="微软雅黑"/>
                         </a:rPr>
-                        <a:t>某家酒店周边 10 km 内的活动；坐标未核验的不计入距离</a:t>
+                        <a:t>系统运行、简报整理、问题修正由我们负责</a:t>
                       </a:r>
                     </a:p>
                   </a:txBody>
                   <a:tcPr marL="73152" marR="73152" marT="27432" marB="27432" anchor="ctr"/>
                 </a:tc>
               </a:tr>
-              <a:tr h="457200">
+            </a:tbl>
+          </a:graphicData>
+        </a:graphic>
+      </p:graphicFrame>
+      <p:cxnSp>
+        <p:nvCxnSpPr>
+          <p:cNvPr id="8" name="Connector 7"/>
+          <p:cNvCxnSpPr/>
+          <p:nvPr/>
+        </p:nvCxnSpPr>
+        <p:spPr>
+          <a:xfrm>
+            <a:off x="868680" y="2496312"/>
+            <a:ext cx="10332720" cy="0"/>
+          </a:xfrm>
+          <a:prstGeom prst="line">
+            <a:avLst/>
+          </a:prstGeom>
+          <a:ln w="11430">
+            <a:solidFill>
+              <a:srgbClr val="D8DEE6"/>
+            </a:solidFill>
+          </a:ln>
+        </p:spPr>
+        <p:style>
+          <a:lnRef idx="2">
+            <a:schemeClr val="accent1"/>
+          </a:lnRef>
+          <a:fillRef idx="0">
+            <a:schemeClr val="accent1"/>
+          </a:fillRef>
+          <a:effectRef idx="1">
+            <a:schemeClr val="accent1"/>
+          </a:effectRef>
+          <a:fontRef idx="minor">
+            <a:schemeClr val="tx1"/>
+          </a:fontRef>
+        </p:style>
+      </p:cxnSp>
+      <p:sp>
+        <p:nvSpPr>
+          <p:cNvPr id="9" name="TextBox 8"/>
+          <p:cNvSpPr txBox="1"/>
+          <p:nvPr/>
+        </p:nvSpPr>
+        <p:spPr>
+          <a:xfrm>
+            <a:off x="868680" y="4892040"/>
+            <a:ext cx="10332720" cy="411480"/>
+          </a:xfrm>
+          <a:prstGeom prst="rect">
+            <a:avLst/>
+          </a:prstGeom>
+          <a:noFill/>
+        </p:spPr>
+        <p:txBody>
+          <a:bodyPr wrap="square">
+            <a:spAutoFit/>
+          </a:bodyPr>
+          <a:lstStyle/>
+          <a:p>
+            <a:pPr algn="l">
+              <a:lnSpc>
+                <a:spcPct val="115000"/>
+              </a:lnSpc>
+            </a:pPr>
+            <a:r>
+              <a:rPr sz="1500" b="0">
+                <a:solidFill>
+                  <a:srgbClr val="1D4ED8"/>
+                </a:solidFill>
+                <a:latin typeface="微软雅黑"/>
+              </a:rPr>
+              <a:t>不需要接入酒店内部系统，也不要客户名单、订单明细或任何个人信息。</a:t>
+            </a:r>
+          </a:p>
+        </p:txBody>
+      </p:sp>
+      <p:sp>
+        <p:nvSpPr>
+          <p:cNvPr id="10" name="TextBox 9"/>
+          <p:cNvSpPr txBox="1"/>
+          <p:nvPr/>
+        </p:nvSpPr>
+        <p:spPr>
+          <a:xfrm>
+            <a:off x="868680" y="5349240"/>
+            <a:ext cx="10332720" cy="365760"/>
+          </a:xfrm>
+          <a:prstGeom prst="rect">
+            <a:avLst/>
+          </a:prstGeom>
+          <a:noFill/>
+        </p:spPr>
+        <p:txBody>
+          <a:bodyPr wrap="square">
+            <a:spAutoFit/>
+          </a:bodyPr>
+          <a:lstStyle/>
+          <a:p>
+            <a:pPr algn="l">
+              <a:lnSpc>
+                <a:spcPct val="115000"/>
+              </a:lnSpc>
+            </a:pPr>
+            <a:r>
+              <a:rPr sz="1400" b="0">
+                <a:solidFill>
+                  <a:srgbClr val="6B7280"/>
+                </a:solidFill>
+                <a:latin typeface="微软雅黑"/>
+              </a:rPr>
+              <a:t>如果近期不方便，也完全可以先从业务建议和材料反馈开始。</a:t>
+            </a:r>
+          </a:p>
+        </p:txBody>
+      </p:sp>
+    </p:spTree>
+  </p:cSld>
+  <p:clrMapOvr>
+    <a:masterClrMapping/>
+  </p:clrMapOvr>
+</p:sld>
+</file>
+
+<file path=ppt/slides/slide8.xml><?xml version="1.0" encoding="utf-8"?>
+<p:sld xmlns:a="http://schemas.openxmlformats.org/drawingml/2006/main" xmlns:p="http://schemas.openxmlformats.org/presentationml/2006/main" xmlns:r="http://schemas.openxmlformats.org/officeDocument/2006/relationships">
+  <p:cSld>
+    <p:spTree>
+      <p:nvGrpSpPr>
+        <p:cNvPr id="1" name=""/>
+        <p:cNvGrpSpPr/>
+        <p:nvPr/>
+      </p:nvGrpSpPr>
+      <p:grpSpPr/>
+      <p:sp>
+        <p:nvSpPr>
+          <p:cNvPr id="2" name="TextBox 1"/>
+          <p:cNvSpPr txBox="1"/>
+          <p:nvPr/>
+        </p:nvSpPr>
+        <p:spPr>
+          <a:xfrm>
+            <a:off x="822960" y="475488"/>
+            <a:ext cx="10515600" cy="292608"/>
+          </a:xfrm>
+          <a:prstGeom prst="rect">
+            <a:avLst/>
+          </a:prstGeom>
+          <a:noFill/>
+        </p:spPr>
+        <p:txBody>
+          <a:bodyPr wrap="square">
+            <a:spAutoFit/>
+          </a:bodyPr>
+          <a:lstStyle/>
+          <a:p>
+            <a:pPr algn="l">
+              <a:lnSpc>
+                <a:spcPct val="115000"/>
+              </a:lnSpc>
+            </a:pPr>
+            <a:r>
+              <a:rPr sz="1200" b="0">
+                <a:solidFill>
+                  <a:srgbClr val="6B7280"/>
+                </a:solidFill>
+                <a:latin typeface="微软雅黑"/>
+              </a:rPr>
+              <a:t>价值</a:t>
+            </a:r>
+          </a:p>
+        </p:txBody>
+      </p:sp>
+      <p:sp>
+        <p:nvSpPr>
+          <p:cNvPr id="3" name="TextBox 2"/>
+          <p:cNvSpPr txBox="1"/>
+          <p:nvPr/>
+        </p:nvSpPr>
+        <p:spPr>
+          <a:xfrm>
+            <a:off x="822960" y="749808"/>
+            <a:ext cx="10607040" cy="640080"/>
+          </a:xfrm>
+          <a:prstGeom prst="rect">
+            <a:avLst/>
+          </a:prstGeom>
+          <a:noFill/>
+        </p:spPr>
+        <p:txBody>
+          <a:bodyPr wrap="square">
+            <a:spAutoFit/>
+          </a:bodyPr>
+          <a:lstStyle/>
+          <a:p>
+            <a:pPr algn="l">
+              <a:lnSpc>
+                <a:spcPct val="115000"/>
+              </a:lnSpc>
+            </a:pPr>
+            <a:r>
+              <a:rPr sz="3000" b="1">
+                <a:solidFill>
+                  <a:srgbClr val="1F2937"/>
+                </a:solidFill>
+                <a:latin typeface="微软雅黑"/>
+              </a:rPr>
+              <a:t>企业能得到的：三项可以量出来的结果</a:t>
+            </a:r>
+          </a:p>
+        </p:txBody>
+      </p:sp>
+      <p:cxnSp>
+        <p:nvCxnSpPr>
+          <p:cNvPr id="4" name="Connector 3"/>
+          <p:cNvCxnSpPr/>
+          <p:nvPr/>
+        </p:nvCxnSpPr>
+        <p:spPr>
+          <a:xfrm>
+            <a:off x="822960" y="1481328"/>
+            <a:ext cx="10543032" cy="0"/>
+          </a:xfrm>
+          <a:prstGeom prst="line">
+            <a:avLst/>
+          </a:prstGeom>
+          <a:ln w="11430">
+            <a:solidFill>
+              <a:srgbClr val="D8DEE6"/>
+            </a:solidFill>
+          </a:ln>
+        </p:spPr>
+        <p:style>
+          <a:lnRef idx="2">
+            <a:schemeClr val="accent1"/>
+          </a:lnRef>
+          <a:fillRef idx="0">
+            <a:schemeClr val="accent1"/>
+          </a:fillRef>
+          <a:effectRef idx="1">
+            <a:schemeClr val="accent1"/>
+          </a:effectRef>
+          <a:fontRef idx="minor">
+            <a:schemeClr val="tx1"/>
+          </a:fontRef>
+        </p:style>
+      </p:cxnSp>
+      <p:sp>
+        <p:nvSpPr>
+          <p:cNvPr id="5" name="TextBox 4"/>
+          <p:cNvSpPr txBox="1"/>
+          <p:nvPr/>
+        </p:nvSpPr>
+        <p:spPr>
+          <a:xfrm>
+            <a:off x="11292840" y="6355080"/>
+            <a:ext cx="548640" cy="274320"/>
+          </a:xfrm>
+          <a:prstGeom prst="rect">
+            <a:avLst/>
+          </a:prstGeom>
+          <a:noFill/>
+        </p:spPr>
+        <p:txBody>
+          <a:bodyPr wrap="square">
+            <a:spAutoFit/>
+          </a:bodyPr>
+          <a:lstStyle/>
+          <a:p>
+            <a:pPr algn="r">
+              <a:lnSpc>
+                <a:spcPct val="115000"/>
+              </a:lnSpc>
+            </a:pPr>
+            <a:r>
+              <a:rPr sz="1000" b="0">
+                <a:solidFill>
+                  <a:srgbClr val="6B7280"/>
+                </a:solidFill>
+                <a:latin typeface="微软雅黑"/>
+              </a:rPr>
+              <a:t>8</a:t>
+            </a:r>
+          </a:p>
+        </p:txBody>
+      </p:sp>
+      <p:sp>
+        <p:nvSpPr>
+          <p:cNvPr id="6" name="TextBox 5"/>
+          <p:cNvSpPr txBox="1"/>
+          <p:nvPr/>
+        </p:nvSpPr>
+        <p:spPr>
+          <a:xfrm>
+            <a:off x="822960" y="6355080"/>
+            <a:ext cx="5486400" cy="274320"/>
+          </a:xfrm>
+          <a:prstGeom prst="rect">
+            <a:avLst/>
+          </a:prstGeom>
+          <a:noFill/>
+        </p:spPr>
+        <p:txBody>
+          <a:bodyPr wrap="square">
+            <a:spAutoFit/>
+          </a:bodyPr>
+          <a:lstStyle/>
+          <a:p>
+            <a:pPr algn="l">
+              <a:lnSpc>
+                <a:spcPct val="115000"/>
+              </a:lnSpc>
+            </a:pPr>
+            <a:r>
+              <a:rPr sz="1000" b="0">
+                <a:solidFill>
+                  <a:srgbClr val="6B7280"/>
+                </a:solidFill>
+                <a:latin typeface="微软雅黑"/>
+              </a:rPr>
+              <a:t>Menduner · ENT303TC 第 14 组</a:t>
+            </a:r>
+          </a:p>
+        </p:txBody>
+      </p:sp>
+      <p:graphicFrame>
+        <p:nvGraphicFramePr>
+          <p:cNvPr id="7" name="Table 6"/>
+          <p:cNvGraphicFramePr>
+            <a:graphicFrameLocks noGrp="1"/>
+          </p:cNvGraphicFramePr>
+          <p:nvPr/>
+        </p:nvGraphicFramePr>
+        <p:xfrm>
+          <a:off x="868680" y="1828800"/>
+          <a:ext cx="10332719" cy="2194560"/>
+        </p:xfrm>
+        <a:graphic>
+          <a:graphicData uri="http://schemas.openxmlformats.org/drawingml/2006/table">
+            <a:tbl>
+              <a:tblPr firstRow="0" bandRow="0">
+                <a:tableStyleId>{2D5ABB26-0587-4C30-8999-92F81FD0307C}</a:tableStyleId>
+              </a:tblPr>
+              <a:tblGrid>
+                <a:gridCol w="2377440"/>
+                <a:gridCol w="7955279"/>
+              </a:tblGrid>
+              <a:tr h="548640">
                 <a:tc>
                   <a:txBody>
                     <a:bodyPr/>
@@ -10765,13 +7400,13 @@
                         </a:lnSpc>
                       </a:pPr>
                       <a:r>
-                        <a:rPr sz="1050" b="0">
+                        <a:rPr sz="1000" b="1">
                           <a:solidFill>
-                            <a:srgbClr val="1F2937"/>
+                            <a:srgbClr val="6B7280"/>
                           </a:solidFill>
                           <a:latin typeface="微软雅黑"/>
                         </a:rPr>
-                        <a:t>找酒店</a:t>
+                        <a:t>维度</a:t>
                       </a:r>
                     </a:p>
                   </a:txBody>
@@ -10788,20 +7423,20 @@
                         </a:lnSpc>
                       </a:pPr>
                       <a:r>
-                        <a:rPr sz="1050" b="0">
+                        <a:rPr sz="1000" b="1">
                           <a:solidFill>
-                            <a:srgbClr val="1F2937"/>
+                            <a:srgbClr val="6B7280"/>
                           </a:solidFill>
                           <a:latin typeface="微软雅黑"/>
                         </a:rPr>
-                        <a:t>按星级、地区、名称找已收录的 19 家酒店</a:t>
+                        <a:t>验证方式</a:t>
                       </a:r>
                     </a:p>
                   </a:txBody>
                   <a:tcPr marL="73152" marR="73152" marT="27432" marB="27432" anchor="ctr"/>
                 </a:tc>
               </a:tr>
-              <a:tr h="457200">
+              <a:tr h="548640">
                 <a:tc>
                   <a:txBody>
                     <a:bodyPr/>
@@ -10813,13 +7448,13 @@
                         </a:lnSpc>
                       </a:pPr>
                       <a:r>
-                        <a:rPr sz="1050" b="0">
+                        <a:rPr sz="1150" b="0">
                           <a:solidFill>
                             <a:srgbClr val="1F2937"/>
                           </a:solidFill>
                           <a:latin typeface="微软雅黑"/>
                         </a:rPr>
-                        <a:t>本店经营数据</a:t>
+                        <a:t>信息价值</a:t>
                       </a:r>
                     </a:p>
                   </a:txBody>
@@ -10836,20 +7471,20 @@
                         </a:lnSpc>
                       </a:pPr>
                       <a:r>
-                        <a:rPr sz="1050" b="0">
+                        <a:rPr sz="1150" b="0">
                           <a:solidFill>
                             <a:srgbClr val="1F2937"/>
                           </a:solidFill>
                           <a:latin typeface="微软雅黑"/>
                         </a:rPr>
-                        <a:t>酒店自己上传经营数据，只在本店账号内可见</a:t>
+                        <a:t>能否更早发现与自身相关的活动（发现时间差）</a:t>
                       </a:r>
                     </a:p>
                   </a:txBody>
                   <a:tcPr marL="73152" marR="73152" marT="27432" marB="27432" anchor="ctr"/>
                 </a:tc>
               </a:tr>
-              <a:tr h="457200">
+              <a:tr h="548640">
                 <a:tc>
                   <a:txBody>
                     <a:bodyPr/>
@@ -10861,13 +7496,13 @@
                         </a:lnSpc>
                       </a:pPr>
                       <a:r>
-                        <a:rPr sz="1050" b="0">
+                        <a:rPr sz="1150" b="0">
                           <a:solidFill>
                             <a:srgbClr val="1F2937"/>
                           </a:solidFill>
                           <a:latin typeface="微软雅黑"/>
                         </a:rPr>
-                        <a:t>数据质量与来源</a:t>
+                        <a:t>工作效率</a:t>
                       </a:r>
                     </a:p>
                   </a:txBody>
@@ -10884,13 +7519,61 @@
                         </a:lnSpc>
                       </a:pPr>
                       <a:r>
-                        <a:rPr sz="1050" b="0">
+                        <a:rPr sz="1150" b="0">
                           <a:solidFill>
                             <a:srgbClr val="1F2937"/>
                           </a:solidFill>
                           <a:latin typeface="微软雅黑"/>
                         </a:rPr>
-                        <a:t>每条数据能不能用、来源在哪、还缺什么</a:t>
+                        <a:t>整理一份活动简报所需时间是否减少</a:t>
+                      </a:r>
+                    </a:p>
+                  </a:txBody>
+                  <a:tcPr marL="73152" marR="73152" marT="27432" marB="27432" anchor="ctr"/>
+                </a:tc>
+              </a:tr>
+              <a:tr h="548640">
+                <a:tc>
+                  <a:txBody>
+                    <a:bodyPr/>
+                    <a:lstStyle/>
+                    <a:p>
+                      <a:pPr>
+                        <a:lnSpc>
+                          <a:spcPct val="105000"/>
+                        </a:lnSpc>
+                      </a:pPr>
+                      <a:r>
+                        <a:rPr sz="1150" b="0">
+                          <a:solidFill>
+                            <a:srgbClr val="1F2937"/>
+                          </a:solidFill>
+                          <a:latin typeface="微软雅黑"/>
+                        </a:rPr>
+                        <a:t>决策价值</a:t>
+                      </a:r>
+                    </a:p>
+                  </a:txBody>
+                  <a:tcPr marL="73152" marR="73152" marT="27432" marB="27432" anchor="ctr"/>
+                </a:tc>
+                <a:tc>
+                  <a:txBody>
+                    <a:bodyPr/>
+                    <a:lstStyle/>
+                    <a:p>
+                      <a:pPr>
+                        <a:lnSpc>
+                          <a:spcPct val="105000"/>
+                        </a:lnSpc>
+                      </a:pPr>
+                      <a:r>
+                        <a:rPr sz="1150" b="0">
+                          <a:solidFill>
+                            <a:srgbClr val="1F2937"/>
+                          </a:solidFill>
+                          <a:latin typeface="微软雅黑"/>
+                        </a:rPr>
+                        <a:t>员工能否基于简报挑出该跟进的活动，并说清理由</a:t>
                       </a:r>
                     </a:p>
                   </a:txBody>
@@ -10909,8 +7592,8 @@
         </p:nvCxnSpPr>
         <p:spPr>
           <a:xfrm>
-            <a:off x="868680" y="2240280"/>
-            <a:ext cx="10332720" cy="0"/>
+            <a:off x="868680" y="2377440"/>
+            <a:ext cx="10332719" cy="0"/>
           </a:xfrm>
           <a:prstGeom prst="line">
             <a:avLst/>
@@ -10936,6 +7619,449 @@
           </a:fontRef>
         </p:style>
       </p:cxnSp>
+      <p:sp>
+        <p:nvSpPr>
+          <p:cNvPr id="9" name="TextBox 8"/>
+          <p:cNvSpPr txBox="1"/>
+          <p:nvPr/>
+        </p:nvSpPr>
+        <p:spPr>
+          <a:xfrm>
+            <a:off x="868680" y="4343400"/>
+            <a:ext cx="10332720" cy="457200"/>
+          </a:xfrm>
+          <a:prstGeom prst="rect">
+            <a:avLst/>
+          </a:prstGeom>
+          <a:noFill/>
+        </p:spPr>
+        <p:txBody>
+          <a:bodyPr wrap="square">
+            <a:spAutoFit/>
+          </a:bodyPr>
+          <a:lstStyle/>
+          <a:p>
+            <a:pPr algn="l">
+              <a:lnSpc>
+                <a:spcPct val="115000"/>
+              </a:lnSpc>
+            </a:pPr>
+            <a:r>
+              <a:rPr sz="1600" b="0">
+                <a:solidFill>
+                  <a:srgbClr val="6B7280"/>
+                </a:solidFill>
+                <a:latin typeface="微软雅黑"/>
+              </a:rPr>
+              <a:t>我们不承诺营业额提升，只承诺把这三件事量出来给您看。</a:t>
+            </a:r>
+          </a:p>
+        </p:txBody>
+      </p:sp>
+    </p:spTree>
+  </p:cSld>
+  <p:clrMapOvr>
+    <a:masterClrMapping/>
+  </p:clrMapOvr>
+</p:sld>
+</file>
+
+<file path=ppt/slides/slide9.xml><?xml version="1.0" encoding="utf-8"?>
+<p:sld xmlns:a="http://schemas.openxmlformats.org/drawingml/2006/main" xmlns:p="http://schemas.openxmlformats.org/presentationml/2006/main" xmlns:r="http://schemas.openxmlformats.org/officeDocument/2006/relationships">
+  <p:cSld>
+    <p:spTree>
+      <p:nvGrpSpPr>
+        <p:cNvPr id="1" name=""/>
+        <p:cNvGrpSpPr/>
+        <p:nvPr/>
+      </p:nvGrpSpPr>
+      <p:grpSpPr/>
+      <p:sp>
+        <p:nvSpPr>
+          <p:cNvPr id="2" name="TextBox 1"/>
+          <p:cNvSpPr txBox="1"/>
+          <p:nvPr/>
+        </p:nvSpPr>
+        <p:spPr>
+          <a:xfrm>
+            <a:off x="822960" y="475488"/>
+            <a:ext cx="10515600" cy="292608"/>
+          </a:xfrm>
+          <a:prstGeom prst="rect">
+            <a:avLst/>
+          </a:prstGeom>
+          <a:noFill/>
+        </p:spPr>
+        <p:txBody>
+          <a:bodyPr wrap="square">
+            <a:spAutoFit/>
+          </a:bodyPr>
+          <a:lstStyle/>
+          <a:p>
+            <a:pPr algn="l">
+              <a:lnSpc>
+                <a:spcPct val="115000"/>
+              </a:lnSpc>
+            </a:pPr>
+            <a:r>
+              <a:rPr sz="1200" b="0">
+                <a:solidFill>
+                  <a:srgbClr val="6B7280"/>
+                </a:solidFill>
+                <a:latin typeface="微软雅黑"/>
+              </a:rPr>
+              <a:t>收尾</a:t>
+            </a:r>
+          </a:p>
+        </p:txBody>
+      </p:sp>
+      <p:sp>
+        <p:nvSpPr>
+          <p:cNvPr id="3" name="TextBox 2"/>
+          <p:cNvSpPr txBox="1"/>
+          <p:nvPr/>
+        </p:nvSpPr>
+        <p:spPr>
+          <a:xfrm>
+            <a:off x="822960" y="749808"/>
+            <a:ext cx="10607040" cy="640080"/>
+          </a:xfrm>
+          <a:prstGeom prst="rect">
+            <a:avLst/>
+          </a:prstGeom>
+          <a:noFill/>
+        </p:spPr>
+        <p:txBody>
+          <a:bodyPr wrap="square">
+            <a:spAutoFit/>
+          </a:bodyPr>
+          <a:lstStyle/>
+          <a:p>
+            <a:pPr algn="l">
+              <a:lnSpc>
+                <a:spcPct val="115000"/>
+              </a:lnSpc>
+            </a:pPr>
+            <a:r>
+              <a:rPr sz="3000" b="1">
+                <a:solidFill>
+                  <a:srgbClr val="1F2937"/>
+                </a:solidFill>
+                <a:latin typeface="微软雅黑"/>
+              </a:rPr>
+              <a:t>今天离场前，希望能拿到两个答案</a:t>
+            </a:r>
+          </a:p>
+        </p:txBody>
+      </p:sp>
+      <p:cxnSp>
+        <p:nvCxnSpPr>
+          <p:cNvPr id="4" name="Connector 3"/>
+          <p:cNvCxnSpPr/>
+          <p:nvPr/>
+        </p:nvCxnSpPr>
+        <p:spPr>
+          <a:xfrm>
+            <a:off x="822960" y="1481328"/>
+            <a:ext cx="10543032" cy="0"/>
+          </a:xfrm>
+          <a:prstGeom prst="line">
+            <a:avLst/>
+          </a:prstGeom>
+          <a:ln w="11430">
+            <a:solidFill>
+              <a:srgbClr val="D8DEE6"/>
+            </a:solidFill>
+          </a:ln>
+        </p:spPr>
+        <p:style>
+          <a:lnRef idx="2">
+            <a:schemeClr val="accent1"/>
+          </a:lnRef>
+          <a:fillRef idx="0">
+            <a:schemeClr val="accent1"/>
+          </a:fillRef>
+          <a:effectRef idx="1">
+            <a:schemeClr val="accent1"/>
+          </a:effectRef>
+          <a:fontRef idx="minor">
+            <a:schemeClr val="tx1"/>
+          </a:fontRef>
+        </p:style>
+      </p:cxnSp>
+      <p:sp>
+        <p:nvSpPr>
+          <p:cNvPr id="5" name="TextBox 4"/>
+          <p:cNvSpPr txBox="1"/>
+          <p:nvPr/>
+        </p:nvSpPr>
+        <p:spPr>
+          <a:xfrm>
+            <a:off x="11292840" y="6355080"/>
+            <a:ext cx="548640" cy="274320"/>
+          </a:xfrm>
+          <a:prstGeom prst="rect">
+            <a:avLst/>
+          </a:prstGeom>
+          <a:noFill/>
+        </p:spPr>
+        <p:txBody>
+          <a:bodyPr wrap="square">
+            <a:spAutoFit/>
+          </a:bodyPr>
+          <a:lstStyle/>
+          <a:p>
+            <a:pPr algn="r">
+              <a:lnSpc>
+                <a:spcPct val="115000"/>
+              </a:lnSpc>
+            </a:pPr>
+            <a:r>
+              <a:rPr sz="1000" b="0">
+                <a:solidFill>
+                  <a:srgbClr val="6B7280"/>
+                </a:solidFill>
+                <a:latin typeface="微软雅黑"/>
+              </a:rPr>
+              <a:t>9</a:t>
+            </a:r>
+          </a:p>
+        </p:txBody>
+      </p:sp>
+      <p:sp>
+        <p:nvSpPr>
+          <p:cNvPr id="6" name="TextBox 5"/>
+          <p:cNvSpPr txBox="1"/>
+          <p:nvPr/>
+        </p:nvSpPr>
+        <p:spPr>
+          <a:xfrm>
+            <a:off x="822960" y="6355080"/>
+            <a:ext cx="5486400" cy="274320"/>
+          </a:xfrm>
+          <a:prstGeom prst="rect">
+            <a:avLst/>
+          </a:prstGeom>
+          <a:noFill/>
+        </p:spPr>
+        <p:txBody>
+          <a:bodyPr wrap="square">
+            <a:spAutoFit/>
+          </a:bodyPr>
+          <a:lstStyle/>
+          <a:p>
+            <a:pPr algn="l">
+              <a:lnSpc>
+                <a:spcPct val="115000"/>
+              </a:lnSpc>
+            </a:pPr>
+            <a:r>
+              <a:rPr sz="1000" b="0">
+                <a:solidFill>
+                  <a:srgbClr val="6B7280"/>
+                </a:solidFill>
+                <a:latin typeface="微软雅黑"/>
+              </a:rPr>
+              <a:t>Menduner · ENT303TC 第 14 组</a:t>
+            </a:r>
+          </a:p>
+        </p:txBody>
+      </p:sp>
+      <p:sp>
+        <p:nvSpPr>
+          <p:cNvPr id="7" name="TextBox 6"/>
+          <p:cNvSpPr txBox="1"/>
+          <p:nvPr/>
+        </p:nvSpPr>
+        <p:spPr>
+          <a:xfrm>
+            <a:off x="868680" y="2011680"/>
+            <a:ext cx="274320" cy="365760"/>
+          </a:xfrm>
+          <a:prstGeom prst="rect">
+            <a:avLst/>
+          </a:prstGeom>
+          <a:noFill/>
+        </p:spPr>
+        <p:txBody>
+          <a:bodyPr wrap="square">
+            <a:spAutoFit/>
+          </a:bodyPr>
+          <a:lstStyle/>
+          <a:p>
+            <a:pPr algn="l">
+              <a:lnSpc>
+                <a:spcPct val="115000"/>
+              </a:lnSpc>
+            </a:pPr>
+            <a:r>
+              <a:rPr sz="2100" b="0">
+                <a:solidFill>
+                  <a:srgbClr val="1D4ED8"/>
+                </a:solidFill>
+                <a:latin typeface="微软雅黑"/>
+              </a:rPr>
+              <a:t>· </a:t>
+            </a:r>
+          </a:p>
+        </p:txBody>
+      </p:sp>
+      <p:sp>
+        <p:nvSpPr>
+          <p:cNvPr id="8" name="TextBox 7"/>
+          <p:cNvSpPr txBox="1"/>
+          <p:nvPr/>
+        </p:nvSpPr>
+        <p:spPr>
+          <a:xfrm>
+            <a:off x="1179576" y="2011680"/>
+            <a:ext cx="10021824" cy="457200"/>
+          </a:xfrm>
+          <a:prstGeom prst="rect">
+            <a:avLst/>
+          </a:prstGeom>
+          <a:noFill/>
+        </p:spPr>
+        <p:txBody>
+          <a:bodyPr wrap="square">
+            <a:spAutoFit/>
+          </a:bodyPr>
+          <a:lstStyle/>
+          <a:p>
+            <a:pPr algn="l">
+              <a:lnSpc>
+                <a:spcPct val="115000"/>
+              </a:lnSpc>
+            </a:pPr>
+            <a:r>
+              <a:rPr sz="2100" b="0">
+                <a:solidFill>
+                  <a:srgbClr val="1F2937"/>
+                </a:solidFill>
+                <a:latin typeface="微软雅黑"/>
+              </a:rPr>
+              <a:t>先找哪个岗位、先解决哪一个具体问题？</a:t>
+            </a:r>
+          </a:p>
+        </p:txBody>
+      </p:sp>
+      <p:sp>
+        <p:nvSpPr>
+          <p:cNvPr id="9" name="TextBox 8"/>
+          <p:cNvSpPr txBox="1"/>
+          <p:nvPr/>
+        </p:nvSpPr>
+        <p:spPr>
+          <a:xfrm>
+            <a:off x="868680" y="2880360"/>
+            <a:ext cx="274320" cy="365760"/>
+          </a:xfrm>
+          <a:prstGeom prst="rect">
+            <a:avLst/>
+          </a:prstGeom>
+          <a:noFill/>
+        </p:spPr>
+        <p:txBody>
+          <a:bodyPr wrap="square">
+            <a:spAutoFit/>
+          </a:bodyPr>
+          <a:lstStyle/>
+          <a:p>
+            <a:pPr algn="l">
+              <a:lnSpc>
+                <a:spcPct val="115000"/>
+              </a:lnSpc>
+            </a:pPr>
+            <a:r>
+              <a:rPr sz="2100" b="0">
+                <a:solidFill>
+                  <a:srgbClr val="1D4ED8"/>
+                </a:solidFill>
+                <a:latin typeface="微软雅黑"/>
+              </a:rPr>
+              <a:t>· </a:t>
+            </a:r>
+          </a:p>
+        </p:txBody>
+      </p:sp>
+      <p:sp>
+        <p:nvSpPr>
+          <p:cNvPr id="10" name="TextBox 9"/>
+          <p:cNvSpPr txBox="1"/>
+          <p:nvPr/>
+        </p:nvSpPr>
+        <p:spPr>
+          <a:xfrm>
+            <a:off x="1179576" y="2880360"/>
+            <a:ext cx="10021824" cy="457200"/>
+          </a:xfrm>
+          <a:prstGeom prst="rect">
+            <a:avLst/>
+          </a:prstGeom>
+          <a:noFill/>
+        </p:spPr>
+        <p:txBody>
+          <a:bodyPr wrap="square">
+            <a:spAutoFit/>
+          </a:bodyPr>
+          <a:lstStyle/>
+          <a:p>
+            <a:pPr algn="l">
+              <a:lnSpc>
+                <a:spcPct val="115000"/>
+              </a:lnSpc>
+            </a:pPr>
+            <a:r>
+              <a:rPr sz="2100" b="0">
+                <a:solidFill>
+                  <a:srgbClr val="1F2937"/>
+                </a:solidFill>
+                <a:latin typeface="微软雅黑"/>
+              </a:rPr>
+              <a:t>下一步由谁在什么时候给我们一次反馈（哪怕是微信一句话）？</a:t>
+            </a:r>
+          </a:p>
+        </p:txBody>
+      </p:sp>
+      <p:sp>
+        <p:nvSpPr>
+          <p:cNvPr id="11" name="TextBox 10"/>
+          <p:cNvSpPr txBox="1"/>
+          <p:nvPr/>
+        </p:nvSpPr>
+        <p:spPr>
+          <a:xfrm>
+            <a:off x="868680" y="4343400"/>
+            <a:ext cx="10332720" cy="457200"/>
+          </a:xfrm>
+          <a:prstGeom prst="rect">
+            <a:avLst/>
+          </a:prstGeom>
+          <a:noFill/>
+        </p:spPr>
+        <p:txBody>
+          <a:bodyPr wrap="square">
+            <a:spAutoFit/>
+          </a:bodyPr>
+          <a:lstStyle/>
+          <a:p>
+            <a:pPr algn="l">
+              <a:lnSpc>
+                <a:spcPct val="115000"/>
+              </a:lnSpc>
+            </a:pPr>
+            <a:r>
+              <a:rPr sz="1700" b="0">
+                <a:solidFill>
+                  <a:srgbClr val="1D4ED8"/>
+                </a:solidFill>
+                <a:latin typeface="微软雅黑"/>
+              </a:rPr>
+              <a:t>如果只能给一个建议：您觉得我们最该先验证的方向是哪个？</a:t>
+            </a:r>
+          </a:p>
+        </p:txBody>
+      </p:sp>
     </p:spTree>
   </p:cSld>
   <p:clrMapOvr>
